--- a/数据平台与计算平台/data-platform-architecture.pptx
+++ b/数据平台与计算平台/data-platform-architecture.pptx
@@ -1,19 +1,25 @@
 
 <file path=ppt/presentation.xml><?xml version="1.0" encoding="utf-8"?>
-<p:presentation xmlns:a="http://schemas.openxmlformats.org/drawingml/2006/main" xmlns:r="http://schemas.openxmlformats.org/officeDocument/2006/relationships" xmlns:p="http://schemas.openxmlformats.org/presentationml/2006/main" saveSubsetFonts="1" autoCompressPictures="0">
+<p:presentation xmlns:a="http://schemas.openxmlformats.org/drawingml/2006/main" xmlns:r="http://schemas.openxmlformats.org/officeDocument/2006/relationships" xmlns:p="http://schemas.openxmlformats.org/presentationml/2006/main" autoCompressPictures="0">
   <p:sldMasterIdLst>
     <p:sldMasterId id="2147483648" r:id="rId1"/>
   </p:sldMasterIdLst>
+  <p:notesMasterIdLst>
+    <p:notesMasterId r:id="rId4"/>
+  </p:notesMasterIdLst>
   <p:sldIdLst>
-    <p:sldId id="256" r:id="rId2"/>
-    <p:sldId id="257" r:id="rId3"/>
-    <p:sldId id="258" r:id="rId4"/>
-    <p:sldId id="259" r:id="rId5"/>
-    <p:sldId id="260" r:id="rId6"/>
+    <p:sldId id="256" r:id="rId3"/>
+    <p:sldId id="257" r:id="rId5"/>
+    <p:sldId id="258" r:id="rId6"/>
+    <p:sldId id="259" r:id="rId7"/>
+    <p:sldId id="260" r:id="rId8"/>
+    <p:sldId id="261" r:id="rId9"/>
+    <p:sldId id="263" r:id="rId10"/>
+    <p:sldId id="262" r:id="rId11"/>
+    <p:sldId id="265" r:id="rId12"/>
+    <p:sldId id="266" r:id="rId13"/>
+    <p:sldId id="264" r:id="rId14"/>
   </p:sldIdLst>
-  <p:notesMasterIdLst>
-    <p:notesMasterId r:id="rId7"/>
-  </p:notesMasterIdLst>
   <p:sldSz cx="9144000" cy="5143500"/>
   <p:notesSz cx="5143500" cy="9144000"/>
   <p:defaultTextStyle>
@@ -193,7 +199,6 @@
           <a:p>
             <a:fld id="{5282F153-3F37-0F45-9E97-73ACFA13230C}" type="datetimeFigureOut">
               <a:rPr lang="en-US"/>
-              <a:t>7/23/19</a:t>
             </a:fld>
             <a:endParaRPr lang="en-US"/>
           </a:p>
@@ -260,6 +265,7 @@
               <a:rPr lang="en-US"/>
               <a:t>Click to edit Master text styles</a:t>
             </a:r>
+            <a:endParaRPr lang="en-US"/>
           </a:p>
           <a:p>
             <a:pPr lvl="1"/>
@@ -267,6 +273,7 @@
               <a:rPr lang="en-US"/>
               <a:t>Second level</a:t>
             </a:r>
+            <a:endParaRPr lang="en-US"/>
           </a:p>
           <a:p>
             <a:pPr lvl="2"/>
@@ -274,6 +281,7 @@
               <a:rPr lang="en-US"/>
               <a:t>Third level</a:t>
             </a:r>
+            <a:endParaRPr lang="en-US"/>
           </a:p>
           <a:p>
             <a:pPr lvl="3"/>
@@ -281,6 +289,7 @@
               <a:rPr lang="en-US"/>
               <a:t>Fourth level</a:t>
             </a:r>
+            <a:endParaRPr lang="en-US"/>
           </a:p>
           <a:p>
             <a:pPr lvl="4"/>
@@ -288,6 +297,7 @@
               <a:rPr lang="en-US"/>
               <a:t>Fifth level</a:t>
             </a:r>
+            <a:endParaRPr lang="en-US"/>
           </a:p>
         </p:txBody>
       </p:sp>
@@ -351,18 +361,12 @@
           <a:p>
             <a:fld id="{CE5E9CC1-C706-0F49-92D6-E571CC5EEA8F}" type="slidenum">
               <a:rPr lang="en-US"/>
-              <a:t>‹#›</a:t>
             </a:fld>
             <a:endParaRPr lang="en-US"/>
           </a:p>
         </p:txBody>
       </p:sp>
     </p:spTree>
-    <p:extLst>
-      <p:ext uri="{BB962C8B-B14F-4D97-AF65-F5344CB8AC3E}">
-        <p14:creationId xmlns:p14="http://schemas.microsoft.com/office/powerpoint/2010/main" val="1024086991"/>
-      </p:ext>
-    </p:extLst>
   </p:cSld>
   <p:clrMap bg1="lt1" tx1="dk1" bg2="lt2" tx2="dk2" accent1="accent1" accent2="accent2" accent3="accent3" accent4="accent4" accent5="accent5" accent6="accent6" hlink="hlink" folHlink="folHlink"/>
   <p:notesStyle>
@@ -504,10 +508,6 @@
           <a:bodyPr/>
           <a:lstStyle/>
           <a:p>
-            <a:r>
-              <a:rPr lang="en-US" dirty="0"/>
-              <a:t/>
-            </a:r>
             <a:endParaRPr lang="en-US" dirty="0"/>
           </a:p>
         </p:txBody>
@@ -529,18 +529,12 @@
           <a:p>
             <a:fld id="{F7021451-1387-4CA6-816F-3879F97B5CBC}" type="slidenum">
               <a:rPr lang="en-US"/>
-              <a:t>1</a:t>
             </a:fld>
             <a:endParaRPr lang="en-US"/>
           </a:p>
         </p:txBody>
       </p:sp>
     </p:spTree>
-    <p:extLst>
-      <p:ext uri="{BB962C8B-B14F-4D97-AF65-F5344CB8AC3E}">
-        <p14:creationId xmlns:p14="http://schemas.microsoft.com/office/powerpoint/2010/main" val="1024086991"/>
-      </p:ext>
-    </p:extLst>
   </p:cSld>
   <p:clrMapOvr>
     <a:masterClrMapping/>
@@ -592,10 +586,6 @@
           <a:bodyPr/>
           <a:lstStyle/>
           <a:p>
-            <a:r>
-              <a:rPr lang="en-US" dirty="0"/>
-              <a:t/>
-            </a:r>
             <a:endParaRPr lang="en-US" dirty="0"/>
           </a:p>
         </p:txBody>
@@ -617,18 +607,12 @@
           <a:p>
             <a:fld id="{F7021451-1387-4CA6-816F-3879F97B5CBC}" type="slidenum">
               <a:rPr lang="en-US"/>
-              <a:t>2</a:t>
             </a:fld>
             <a:endParaRPr lang="en-US"/>
           </a:p>
         </p:txBody>
       </p:sp>
     </p:spTree>
-    <p:extLst>
-      <p:ext uri="{BB962C8B-B14F-4D97-AF65-F5344CB8AC3E}">
-        <p14:creationId xmlns:p14="http://schemas.microsoft.com/office/powerpoint/2010/main" val="1024086991"/>
-      </p:ext>
-    </p:extLst>
   </p:cSld>
   <p:clrMapOvr>
     <a:masterClrMapping/>
@@ -680,10 +664,6 @@
           <a:bodyPr/>
           <a:lstStyle/>
           <a:p>
-            <a:r>
-              <a:rPr lang="en-US" dirty="0"/>
-              <a:t/>
-            </a:r>
             <a:endParaRPr lang="en-US" dirty="0"/>
           </a:p>
         </p:txBody>
@@ -705,18 +685,12 @@
           <a:p>
             <a:fld id="{F7021451-1387-4CA6-816F-3879F97B5CBC}" type="slidenum">
               <a:rPr lang="en-US"/>
-              <a:t>3</a:t>
             </a:fld>
             <a:endParaRPr lang="en-US"/>
           </a:p>
         </p:txBody>
       </p:sp>
     </p:spTree>
-    <p:extLst>
-      <p:ext uri="{BB962C8B-B14F-4D97-AF65-F5344CB8AC3E}">
-        <p14:creationId xmlns:p14="http://schemas.microsoft.com/office/powerpoint/2010/main" val="1024086991"/>
-      </p:ext>
-    </p:extLst>
   </p:cSld>
   <p:clrMapOvr>
     <a:masterClrMapping/>
@@ -768,10 +742,6 @@
           <a:bodyPr/>
           <a:lstStyle/>
           <a:p>
-            <a:r>
-              <a:rPr lang="en-US" dirty="0"/>
-              <a:t/>
-            </a:r>
             <a:endParaRPr lang="en-US" dirty="0"/>
           </a:p>
         </p:txBody>
@@ -793,18 +763,12 @@
           <a:p>
             <a:fld id="{F7021451-1387-4CA6-816F-3879F97B5CBC}" type="slidenum">
               <a:rPr lang="en-US"/>
-              <a:t>4</a:t>
             </a:fld>
             <a:endParaRPr lang="en-US"/>
           </a:p>
         </p:txBody>
       </p:sp>
     </p:spTree>
-    <p:extLst>
-      <p:ext uri="{BB962C8B-B14F-4D97-AF65-F5344CB8AC3E}">
-        <p14:creationId xmlns:p14="http://schemas.microsoft.com/office/powerpoint/2010/main" val="1024086991"/>
-      </p:ext>
-    </p:extLst>
   </p:cSld>
   <p:clrMapOvr>
     <a:masterClrMapping/>
@@ -856,10 +820,6 @@
           <a:bodyPr/>
           <a:lstStyle/>
           <a:p>
-            <a:r>
-              <a:rPr lang="en-US" dirty="0"/>
-              <a:t/>
-            </a:r>
             <a:endParaRPr lang="en-US" dirty="0"/>
           </a:p>
         </p:txBody>
@@ -881,18 +841,12 @@
           <a:p>
             <a:fld id="{F7021451-1387-4CA6-816F-3879F97B5CBC}" type="slidenum">
               <a:rPr lang="en-US"/>
-              <a:t>5</a:t>
             </a:fld>
             <a:endParaRPr lang="en-US"/>
           </a:p>
         </p:txBody>
       </p:sp>
     </p:spTree>
-    <p:extLst>
-      <p:ext uri="{BB962C8B-B14F-4D97-AF65-F5344CB8AC3E}">
-        <p14:creationId xmlns:p14="http://schemas.microsoft.com/office/powerpoint/2010/main" val="1024086991"/>
-      </p:ext>
-    </p:extLst>
   </p:cSld>
   <p:clrMapOvr>
     <a:masterClrMapping/>
@@ -930,9 +884,298 @@
 </p:sldLayout>
 </file>
 
+<file path=ppt/slideLayouts/slideLayout2.xml><?xml version="1.0" encoding="utf-8"?>
+<p:sldLayout xmlns:a="http://schemas.openxmlformats.org/drawingml/2006/main" xmlns:r="http://schemas.openxmlformats.org/officeDocument/2006/relationships" xmlns:p="http://schemas.openxmlformats.org/presentationml/2006/main" type="blank" preserve="1">
+  <p:cSld name="空白">
+    <p:spTree>
+      <p:nvGrpSpPr>
+        <p:cNvPr id="1" name=""/>
+        <p:cNvGrpSpPr/>
+        <p:nvPr/>
+      </p:nvGrpSpPr>
+      <p:grpSpPr>
+        <a:xfrm>
+          <a:off x="0" y="0"/>
+          <a:ext cx="0" cy="0"/>
+          <a:chOff x="0" y="0"/>
+          <a:chExt cx="0" cy="0"/>
+        </a:xfrm>
+      </p:grpSpPr>
+      <p:sp>
+        <p:nvSpPr>
+          <p:cNvPr id="2" name="日期占位符 1"/>
+          <p:cNvSpPr>
+            <a:spLocks noGrp="1"/>
+          </p:cNvSpPr>
+          <p:nvPr>
+            <p:ph type="dt" sz="half" idx="10"/>
+          </p:nvPr>
+        </p:nvSpPr>
+        <p:spPr>
+          <a:xfrm>
+            <a:off x="838200" y="6356350"/>
+            <a:ext cx="2743200" cy="365125"/>
+          </a:xfrm>
+        </p:spPr>
+        <p:txBody>
+          <a:bodyPr/>
+          <a:lstStyle/>
+          <a:p>
+            <a:fld id="{82F288E0-7875-42C4-84C8-98DBBD3BF4D2}" type="datetimeFigureOut">
+              <a:rPr lang="zh-CN" altLang="en-US" smtClean="0"/>
+            </a:fld>
+            <a:endParaRPr lang="zh-CN" altLang="en-US"/>
+          </a:p>
+        </p:txBody>
+      </p:sp>
+      <p:sp>
+        <p:nvSpPr>
+          <p:cNvPr id="3" name="页脚占位符 2"/>
+          <p:cNvSpPr>
+            <a:spLocks noGrp="1"/>
+          </p:cNvSpPr>
+          <p:nvPr>
+            <p:ph type="ftr" sz="quarter" idx="11"/>
+          </p:nvPr>
+        </p:nvSpPr>
+        <p:spPr>
+          <a:xfrm>
+            <a:off x="4038600" y="6356350"/>
+            <a:ext cx="4114800" cy="365125"/>
+          </a:xfrm>
+        </p:spPr>
+        <p:txBody>
+          <a:bodyPr/>
+          <a:lstStyle/>
+          <a:p>
+            <a:endParaRPr lang="zh-CN" altLang="en-US"/>
+          </a:p>
+        </p:txBody>
+      </p:sp>
+      <p:sp>
+        <p:nvSpPr>
+          <p:cNvPr id="4" name="灯片编号占位符 3"/>
+          <p:cNvSpPr>
+            <a:spLocks noGrp="1"/>
+          </p:cNvSpPr>
+          <p:nvPr>
+            <p:ph type="sldNum" sz="quarter" idx="12"/>
+          </p:nvPr>
+        </p:nvSpPr>
+        <p:spPr>
+          <a:xfrm>
+            <a:off x="8610600" y="6356350"/>
+            <a:ext cx="2743200" cy="365125"/>
+          </a:xfrm>
+        </p:spPr>
+        <p:txBody>
+          <a:bodyPr/>
+          <a:lstStyle/>
+          <a:p>
+            <a:fld id="{7D9BB5D0-35E4-459D-AEF3-FE4D7C45CC19}" type="slidenum">
+              <a:rPr lang="zh-CN" altLang="en-US" smtClean="0"/>
+            </a:fld>
+            <a:endParaRPr lang="zh-CN" altLang="en-US"/>
+          </a:p>
+        </p:txBody>
+      </p:sp>
+    </p:spTree>
+  </p:cSld>
+  <p:clrMapOvr>
+    <a:masterClrMapping/>
+  </p:clrMapOvr>
+</p:sldLayout>
+</file>
+
+<file path=ppt/slideLayouts/slideLayout3.xml><?xml version="1.0" encoding="utf-8"?>
+<p:sldLayout xmlns:a="http://schemas.openxmlformats.org/drawingml/2006/main" xmlns:r="http://schemas.openxmlformats.org/officeDocument/2006/relationships" xmlns:p="http://schemas.openxmlformats.org/presentationml/2006/main" type="titleOnly" preserve="1">
+  <p:cSld name="仅标题">
+    <p:spTree>
+      <p:nvGrpSpPr>
+        <p:cNvPr id="1" name=""/>
+        <p:cNvGrpSpPr/>
+        <p:nvPr/>
+      </p:nvGrpSpPr>
+      <p:grpSpPr>
+        <a:xfrm>
+          <a:off x="0" y="0"/>
+          <a:ext cx="0" cy="0"/>
+          <a:chOff x="0" y="0"/>
+          <a:chExt cx="0" cy="0"/>
+        </a:xfrm>
+      </p:grpSpPr>
+      <p:sp>
+        <p:nvSpPr>
+          <p:cNvPr id="2" name="标题 1"/>
+          <p:cNvSpPr>
+            <a:spLocks noGrp="1"/>
+          </p:cNvSpPr>
+          <p:nvPr>
+            <p:ph type="title"/>
+            <p:custDataLst>
+              <p:tags r:id="rId2"/>
+            </p:custDataLst>
+          </p:nvPr>
+        </p:nvSpPr>
+        <p:spPr>
+          <a:xfrm>
+            <a:off x="521970" y="270000"/>
+            <a:ext cx="8100000" cy="540000"/>
+          </a:xfrm>
+        </p:spPr>
+        <p:txBody>
+          <a:bodyPr wrap="square">
+            <a:normAutofit/>
+          </a:bodyPr>
+          <a:lstStyle>
+            <a:lvl1pPr>
+              <a:defRPr>
+                <a:latin typeface="+mn-ea"/>
+                <a:ea typeface="+mn-ea"/>
+                <a:cs typeface="+mn-cs"/>
+              </a:defRPr>
+            </a:lvl1pPr>
+          </a:lstStyle>
+          <a:p>
+            <a:r>
+              <a:rPr lang="zh-CN" altLang="en-US" dirty="0"/>
+              <a:t>单击此处编辑母版标题样式</a:t>
+            </a:r>
+            <a:endParaRPr lang="zh-CN" altLang="en-US" dirty="0"/>
+          </a:p>
+        </p:txBody>
+      </p:sp>
+      <p:sp>
+        <p:nvSpPr>
+          <p:cNvPr id="3" name="日期占位符 2"/>
+          <p:cNvSpPr>
+            <a:spLocks noGrp="1"/>
+          </p:cNvSpPr>
+          <p:nvPr>
+            <p:ph type="dt" sz="half" idx="10"/>
+            <p:custDataLst>
+              <p:tags r:id="rId3"/>
+            </p:custDataLst>
+          </p:nvPr>
+        </p:nvSpPr>
+        <p:spPr>
+          <a:xfrm>
+            <a:off x="521970" y="4767263"/>
+            <a:ext cx="2057400" cy="273844"/>
+          </a:xfrm>
+        </p:spPr>
+        <p:txBody>
+          <a:bodyPr wrap="square">
+            <a:normAutofit/>
+          </a:bodyPr>
+          <a:lstStyle>
+            <a:lvl1pPr>
+              <a:defRPr>
+                <a:latin typeface="+mn-ea"/>
+                <a:ea typeface="+mn-ea"/>
+                <a:cs typeface="+mn-cs"/>
+              </a:defRPr>
+            </a:lvl1pPr>
+          </a:lstStyle>
+          <a:p>
+            <a:fld id="{5592522B-0F24-4480-B9DD-A9474A6880D6}" type="datetimeFigureOut">
+              <a:rPr lang="zh-CN" altLang="en-US" smtClean="0"/>
+            </a:fld>
+            <a:endParaRPr lang="zh-CN" altLang="en-US"/>
+          </a:p>
+        </p:txBody>
+      </p:sp>
+      <p:sp>
+        <p:nvSpPr>
+          <p:cNvPr id="4" name="页脚占位符 3"/>
+          <p:cNvSpPr>
+            <a:spLocks noGrp="1"/>
+          </p:cNvSpPr>
+          <p:nvPr>
+            <p:ph type="ftr" sz="quarter" idx="11"/>
+            <p:custDataLst>
+              <p:tags r:id="rId4"/>
+            </p:custDataLst>
+          </p:nvPr>
+        </p:nvSpPr>
+        <p:spPr>
+          <a:xfrm>
+            <a:off x="3028950" y="4767263"/>
+            <a:ext cx="3086100" cy="273844"/>
+          </a:xfrm>
+        </p:spPr>
+        <p:txBody>
+          <a:bodyPr/>
+          <a:lstStyle>
+            <a:lvl1pPr>
+              <a:defRPr>
+                <a:latin typeface="+mn-ea"/>
+                <a:ea typeface="+mn-ea"/>
+                <a:cs typeface="+mn-cs"/>
+              </a:defRPr>
+            </a:lvl1pPr>
+          </a:lstStyle>
+          <a:p>
+            <a:endParaRPr lang="zh-CN" altLang="en-US"/>
+          </a:p>
+        </p:txBody>
+      </p:sp>
+      <p:sp>
+        <p:nvSpPr>
+          <p:cNvPr id="5" name="灯片编号占位符 4"/>
+          <p:cNvSpPr>
+            <a:spLocks noGrp="1"/>
+          </p:cNvSpPr>
+          <p:nvPr>
+            <p:ph type="sldNum" sz="quarter" idx="12"/>
+            <p:custDataLst>
+              <p:tags r:id="rId5"/>
+            </p:custDataLst>
+          </p:nvPr>
+        </p:nvSpPr>
+        <p:spPr>
+          <a:xfrm>
+            <a:off x="6565487" y="4767263"/>
+            <a:ext cx="2057400" cy="273844"/>
+          </a:xfrm>
+        </p:spPr>
+        <p:txBody>
+          <a:bodyPr wrap="square">
+            <a:normAutofit/>
+          </a:bodyPr>
+          <a:lstStyle>
+            <a:lvl1pPr>
+              <a:defRPr>
+                <a:latin typeface="+mn-ea"/>
+                <a:ea typeface="+mn-ea"/>
+                <a:cs typeface="+mn-cs"/>
+              </a:defRPr>
+            </a:lvl1pPr>
+          </a:lstStyle>
+          <a:p>
+            <a:fld id="{BE5F26B5-172A-4DC2-B0B7-181CFC56B87C}" type="slidenum">
+              <a:rPr lang="zh-CN" altLang="en-US" smtClean="0"/>
+            </a:fld>
+            <a:endParaRPr lang="zh-CN" altLang="en-US"/>
+          </a:p>
+        </p:txBody>
+      </p:sp>
+    </p:spTree>
+  </p:cSld>
+  <p:clrMapOvr>
+    <a:masterClrMapping/>
+  </p:clrMapOvr>
+</p:sldLayout>
+</file>
+
 <file path=ppt/slideMasters/slideMaster1.xml><?xml version="1.0" encoding="utf-8"?>
 <p:sldMaster xmlns:a="http://schemas.openxmlformats.org/drawingml/2006/main" xmlns:r="http://schemas.openxmlformats.org/officeDocument/2006/relationships" xmlns:p="http://schemas.openxmlformats.org/presentationml/2006/main">
   <p:cSld>
+    <p:bg>
+      <p:bgRef idx="1001">
+        <a:schemeClr val="bg1"/>
+      </p:bgRef>
+    </p:bg>
     <p:spTree>
       <p:nvGrpSpPr>
         <p:cNvPr id="1" name=""/>
@@ -952,6 +1195,8 @@
   <p:clrMap bg1="lt1" tx1="dk1" bg2="lt2" tx2="dk2" accent1="accent1" accent2="accent2" accent3="accent3" accent4="accent4" accent5="accent5" accent6="accent6" hlink="hlink" folHlink="folHlink"/>
   <p:sldLayoutIdLst>
     <p:sldLayoutId id="2147483649" r:id="rId1"/>
+    <p:sldLayoutId id="2147483650" r:id="rId2"/>
+    <p:sldLayoutId id="2147483651" r:id="rId3"/>
   </p:sldLayoutIdLst>
   <p:hf sldNum="0" hdr="0" ftr="0" dt="0"/>
   <p:txStyles>
@@ -976,7 +1221,7 @@
         <a:spcBef>
           <a:spcPct val="20000"/>
         </a:spcBef>
-        <a:buFont typeface="Arial" pitchFamily="34" charset="0"/>
+        <a:buFont typeface="Arial" panose="020B0604020202090204" pitchFamily="34" charset="0"/>
         <a:buChar char="•"/>
         <a:defRPr sz="3200" kern="1200">
           <a:solidFill>
@@ -991,7 +1236,7 @@
         <a:spcBef>
           <a:spcPct val="20000"/>
         </a:spcBef>
-        <a:buFont typeface="Arial" pitchFamily="34" charset="0"/>
+        <a:buFont typeface="Arial" panose="020B0604020202090204" pitchFamily="34" charset="0"/>
         <a:buChar char="–"/>
         <a:defRPr sz="2800" kern="1200">
           <a:solidFill>
@@ -1006,7 +1251,7 @@
         <a:spcBef>
           <a:spcPct val="20000"/>
         </a:spcBef>
-        <a:buFont typeface="Arial" pitchFamily="34" charset="0"/>
+        <a:buFont typeface="Arial" panose="020B0604020202090204" pitchFamily="34" charset="0"/>
         <a:buChar char="•"/>
         <a:defRPr sz="2400" kern="1200">
           <a:solidFill>
@@ -1021,7 +1266,7 @@
         <a:spcBef>
           <a:spcPct val="20000"/>
         </a:spcBef>
-        <a:buFont typeface="Arial" pitchFamily="34" charset="0"/>
+        <a:buFont typeface="Arial" panose="020B0604020202090204" pitchFamily="34" charset="0"/>
         <a:buChar char="–"/>
         <a:defRPr sz="2000" kern="1200">
           <a:solidFill>
@@ -1036,7 +1281,7 @@
         <a:spcBef>
           <a:spcPct val="20000"/>
         </a:spcBef>
-        <a:buFont typeface="Arial" pitchFamily="34" charset="0"/>
+        <a:buFont typeface="Arial" panose="020B0604020202090204" pitchFamily="34" charset="0"/>
         <a:buChar char="»"/>
         <a:defRPr sz="2000" kern="1200">
           <a:solidFill>
@@ -1051,7 +1296,7 @@
         <a:spcBef>
           <a:spcPct val="20000"/>
         </a:spcBef>
-        <a:buFont typeface="Arial" pitchFamily="34" charset="0"/>
+        <a:buFont typeface="Arial" panose="020B0604020202090204" pitchFamily="34" charset="0"/>
         <a:buChar char="•"/>
         <a:defRPr sz="2000" kern="1200">
           <a:solidFill>
@@ -1066,7 +1311,7 @@
         <a:spcBef>
           <a:spcPct val="20000"/>
         </a:spcBef>
-        <a:buFont typeface="Arial" pitchFamily="34" charset="0"/>
+        <a:buFont typeface="Arial" panose="020B0604020202090204" pitchFamily="34" charset="0"/>
         <a:buChar char="•"/>
         <a:defRPr sz="2000" kern="1200">
           <a:solidFill>
@@ -1081,7 +1326,7 @@
         <a:spcBef>
           <a:spcPct val="20000"/>
         </a:spcBef>
-        <a:buFont typeface="Arial" pitchFamily="34" charset="0"/>
+        <a:buFont typeface="Arial" panose="020B0604020202090204" pitchFamily="34" charset="0"/>
         <a:buChar char="•"/>
         <a:defRPr sz="2000" kern="1200">
           <a:solidFill>
@@ -1096,7 +1341,7 @@
         <a:spcBef>
           <a:spcPct val="20000"/>
         </a:spcBef>
-        <a:buFont typeface="Arial" pitchFamily="34" charset="0"/>
+        <a:buFont typeface="Arial" panose="020B0604020202090204" pitchFamily="34" charset="0"/>
         <a:buChar char="•"/>
         <a:defRPr sz="2000" kern="1200">
           <a:solidFill>
@@ -1209,12 +1454,13 @@
 
 <file path=ppt/slides/slide1.xml><?xml version="1.0" encoding="utf-8"?>
 <p:sld xmlns:a="http://schemas.openxmlformats.org/drawingml/2006/main" xmlns:r="http://schemas.openxmlformats.org/officeDocument/2006/relationships" xmlns:p="http://schemas.openxmlformats.org/presentationml/2006/main">
-  <p:cSld name="Slide 1">
+  <p:cSld>
     <p:bg>
       <p:bgPr>
         <a:solidFill>
           <a:srgbClr val="1B3A4B"/>
         </a:solidFill>
+        <a:effectLst/>
       </p:bgPr>
     </p:bg>
     <p:spTree>
@@ -1248,7 +1494,6 @@
           <a:solidFill>
             <a:srgbClr val="256D4B"/>
           </a:solidFill>
-          <a:ln/>
         </p:spPr>
       </p:sp>
       <p:sp>
@@ -1266,13 +1511,12 @@
             <a:avLst/>
           </a:prstGeom>
           <a:noFill/>
-          <a:ln/>
-        </p:spPr>
-        <p:txBody>
-          <a:bodyPr wrap="square" rtlCol="0" anchor="ctr"/>
-          <a:lstStyle/>
-          <a:p>
-            <a:pPr algn="l" indent="0" marL="0">
+        </p:spPr>
+        <p:txBody>
+          <a:bodyPr wrap="square" rtlCol="0" anchor="ctr"/>
+          <a:lstStyle/>
+          <a:p>
+            <a:pPr marL="0" indent="0" algn="l">
               <a:lnSpc>
                 <a:spcPct val="130000"/>
               </a:lnSpc>
@@ -1283,16 +1527,16 @@
                 <a:solidFill>
                   <a:srgbClr val="FFFFFF"/>
                 </a:solidFill>
-                <a:latin typeface="Microsoft YaHei" pitchFamily="34" charset="0"/>
-                <a:ea typeface="Microsoft YaHei" pitchFamily="34" charset="-122"/>
-                <a:cs typeface="Microsoft YaHei" pitchFamily="34" charset="-120"/>
+                <a:latin typeface="微软雅黑" pitchFamily="34" charset="0"/>
+                <a:ea typeface="微软雅黑" pitchFamily="34" charset="-122"/>
+                <a:cs typeface="微软雅黑" pitchFamily="34" charset="-120"/>
               </a:rPr>
               <a:t>存算分离数据平台</a:t>
             </a:r>
             <a:endParaRPr lang="en-US" sz="4200" dirty="0"/>
           </a:p>
           <a:p>
-            <a:pPr algn="l" indent="0" marL="0">
+            <a:pPr marL="0" indent="0" algn="l">
               <a:lnSpc>
                 <a:spcPct val="130000"/>
               </a:lnSpc>
@@ -1303,9 +1547,9 @@
                 <a:solidFill>
                   <a:srgbClr val="FFFFFF"/>
                 </a:solidFill>
-                <a:latin typeface="Microsoft YaHei" pitchFamily="34" charset="0"/>
-                <a:ea typeface="Microsoft YaHei" pitchFamily="34" charset="-122"/>
-                <a:cs typeface="Microsoft YaHei" pitchFamily="34" charset="-120"/>
+                <a:latin typeface="微软雅黑" pitchFamily="34" charset="0"/>
+                <a:ea typeface="微软雅黑" pitchFamily="34" charset="-122"/>
+                <a:cs typeface="微软雅黑" pitchFamily="34" charset="-120"/>
               </a:rPr>
               <a:t>架构设计</a:t>
             </a:r>
@@ -1328,13 +1572,12 @@
             <a:avLst/>
           </a:prstGeom>
           <a:noFill/>
-          <a:ln/>
-        </p:spPr>
-        <p:txBody>
-          <a:bodyPr wrap="square" rtlCol="0" anchor="ctr"/>
-          <a:lstStyle/>
-          <a:p>
-            <a:pPr algn="l" indent="0" marL="0">
+        </p:spPr>
+        <p:txBody>
+          <a:bodyPr wrap="square" rtlCol="0" anchor="ctr"/>
+          <a:lstStyle/>
+          <a:p>
+            <a:pPr marL="0" indent="0" algn="l">
               <a:buNone/>
             </a:pPr>
             <a:r>
@@ -1342,9 +1585,9 @@
                 <a:solidFill>
                   <a:srgbClr val="B8D4E0"/>
                 </a:solidFill>
-                <a:latin typeface="Microsoft YaHei" pitchFamily="34" charset="0"/>
-                <a:ea typeface="Microsoft YaHei" pitchFamily="34" charset="-122"/>
-                <a:cs typeface="Microsoft YaHei" pitchFamily="34" charset="-120"/>
+                <a:latin typeface="微软雅黑" pitchFamily="34" charset="0"/>
+                <a:ea typeface="微软雅黑" pitchFamily="34" charset="-122"/>
+                <a:cs typeface="微软雅黑" pitchFamily="34" charset="-120"/>
               </a:rPr>
               <a:t>业务数据处理 + AI训练数据准备 — 双模数据基础设施</a:t>
             </a:r>
@@ -1369,7 +1612,6 @@
           <a:solidFill>
             <a:srgbClr val="256D4B"/>
           </a:solidFill>
-          <a:ln/>
         </p:spPr>
       </p:sp>
       <p:sp>
@@ -1387,13 +1629,12 @@
             <a:avLst/>
           </a:prstGeom>
           <a:noFill/>
-          <a:ln/>
-        </p:spPr>
-        <p:txBody>
-          <a:bodyPr wrap="square" rtlCol="0" anchor="ctr"/>
-          <a:lstStyle/>
-          <a:p>
-            <a:pPr indent="0" marL="0">
+        </p:spPr>
+        <p:txBody>
+          <a:bodyPr wrap="square" rtlCol="0" anchor="ctr"/>
+          <a:lstStyle/>
+          <a:p>
+            <a:pPr marL="0" indent="0">
               <a:buNone/>
             </a:pPr>
             <a:r>
@@ -1401,13 +1642,962 @@
                 <a:solidFill>
                   <a:srgbClr val="7DA0AE"/>
                 </a:solidFill>
-                <a:latin typeface="Microsoft YaHei" pitchFamily="34" charset="0"/>
-                <a:ea typeface="Microsoft YaHei" pitchFamily="34" charset="-122"/>
-                <a:cs typeface="Microsoft YaHei" pitchFamily="34" charset="-120"/>
+                <a:latin typeface="微软雅黑" pitchFamily="34" charset="0"/>
+                <a:ea typeface="微软雅黑" pitchFamily="34" charset="-122"/>
+                <a:cs typeface="微软雅黑" pitchFamily="34" charset="-120"/>
               </a:rPr>
               <a:t>2026 年 7 月</a:t>
             </a:r>
             <a:endParaRPr lang="en-US" sz="1200" dirty="0"/>
+          </a:p>
+        </p:txBody>
+      </p:sp>
+    </p:spTree>
+  </p:cSld>
+  <p:clrMapOvr>
+    <a:masterClrMapping/>
+  </p:clrMapOvr>
+</p:sld>
+</file>
+
+<file path=ppt/slides/slide10.xml><?xml version="1.0" encoding="utf-8"?>
+<p:sld xmlns:a="http://schemas.openxmlformats.org/drawingml/2006/main" xmlns:r="http://schemas.openxmlformats.org/officeDocument/2006/relationships" xmlns:p="http://schemas.openxmlformats.org/presentationml/2006/main">
+  <p:cSld>
+    <p:spTree>
+      <p:nvGrpSpPr>
+        <p:cNvPr id="1" name=""/>
+        <p:cNvGrpSpPr/>
+        <p:nvPr/>
+      </p:nvGrpSpPr>
+      <p:grpSpPr>
+        <a:xfrm>
+          <a:off x="0" y="0"/>
+          <a:ext cx="0" cy="0"/>
+          <a:chOff x="0" y="0"/>
+          <a:chExt cx="0" cy="0"/>
+        </a:xfrm>
+      </p:grpSpPr>
+      <p:sp>
+        <p:nvSpPr>
+          <p:cNvPr id="17" name="标题 16"/>
+          <p:cNvSpPr>
+            <a:spLocks noGrp="1"/>
+          </p:cNvSpPr>
+          <p:nvPr>
+            <p:ph type="title"/>
+            <p:custDataLst>
+              <p:tags r:id="rId1"/>
+            </p:custDataLst>
+          </p:nvPr>
+        </p:nvSpPr>
+        <p:spPr/>
+        <p:txBody>
+          <a:bodyPr>
+            <a:normAutofit fontScale="90000"/>
+          </a:bodyPr>
+          <a:lstStyle/>
+          <a:p>
+            <a:r>
+              <a:rPr lang="zh-CN" altLang="en-US" dirty="0">
+                <a:latin typeface="+mn-ea"/>
+                <a:ea typeface="+mn-ea"/>
+                <a:cs typeface="+mn-cs"/>
+              </a:rPr>
+              <a:t>数据平台</a:t>
+            </a:r>
+            <a:r>
+              <a:rPr lang="zh-CN" altLang="en-US" dirty="0">
+                <a:latin typeface="+mn-ea"/>
+                <a:ea typeface="+mn-ea"/>
+                <a:cs typeface="+mn-cs"/>
+              </a:rPr>
+              <a:t>演进</a:t>
+            </a:r>
+            <a:endParaRPr lang="zh-CN" altLang="en-US" dirty="0">
+              <a:latin typeface="+mn-ea"/>
+              <a:ea typeface="+mn-ea"/>
+              <a:cs typeface="+mn-cs"/>
+            </a:endParaRPr>
+          </a:p>
+        </p:txBody>
+      </p:sp>
+      <p:sp>
+        <p:nvSpPr>
+          <p:cNvPr id="50" name="矩形 49"/>
+          <p:cNvSpPr/>
+          <p:nvPr>
+            <p:custDataLst>
+              <p:tags r:id="rId2"/>
+            </p:custDataLst>
+          </p:nvPr>
+        </p:nvSpPr>
+        <p:spPr>
+          <a:xfrm>
+            <a:off x="1016794" y="1073468"/>
+            <a:ext cx="7604760" cy="762000"/>
+          </a:xfrm>
+          <a:prstGeom prst="rect">
+            <a:avLst/>
+          </a:prstGeom>
+          <a:noFill/>
+        </p:spPr>
+        <p:txBody>
+          <a:bodyPr wrap="square" lIns="0" tIns="0" rIns="0" bIns="0" rtlCol="0" anchor="ctr" anchorCtr="0">
+            <a:noAutofit/>
+          </a:bodyPr>
+          <a:lstStyle/>
+          <a:p>
+            <a:pPr indent="0" fontAlgn="auto">
+              <a:lnSpc>
+                <a:spcPct val="150000"/>
+              </a:lnSpc>
+              <a:spcBef>
+                <a:spcPct val="0"/>
+              </a:spcBef>
+              <a:spcAft>
+                <a:spcPts val="1200"/>
+              </a:spcAft>
+            </a:pPr>
+            <a:r>
+              <a:rPr lang="zh-CN" altLang="en-US" sz="1050" dirty="0">
+                <a:ln>
+                  <a:noFill/>
+                  <a:prstDash val="sysDot"/>
+                </a:ln>
+                <a:solidFill>
+                  <a:schemeClr val="tx1">
+                    <a:lumMod val="85000"/>
+                    <a:lumOff val="15000"/>
+                  </a:schemeClr>
+                </a:solidFill>
+                <a:latin typeface="+mn-ea"/>
+              </a:rPr>
+              <a:t>单击此处添加文本具体内容，简明扼要地阐述您的观点。根据需要可酌情增减文字，以便观者准确地理解您传达的思想。单击此处添加文本具体内容，简明扼要地阐述您的观点。根据需要可酌情增减文字。单击此处添加文本具体内容，简明扼要地阐述您的观点</a:t>
+            </a:r>
+            <a:endParaRPr lang="zh-CN" altLang="en-US" sz="1050" dirty="0">
+              <a:ln>
+                <a:noFill/>
+                <a:prstDash val="sysDot"/>
+              </a:ln>
+              <a:solidFill>
+                <a:schemeClr val="tx1">
+                  <a:lumMod val="85000"/>
+                  <a:lumOff val="15000"/>
+                </a:schemeClr>
+              </a:solidFill>
+              <a:latin typeface="+mn-ea"/>
+            </a:endParaRPr>
+          </a:p>
+        </p:txBody>
+      </p:sp>
+      <p:sp>
+        <p:nvSpPr>
+          <p:cNvPr id="2" name="圆角矩形 1"/>
+          <p:cNvSpPr/>
+          <p:nvPr>
+            <p:custDataLst>
+              <p:tags r:id="rId3"/>
+            </p:custDataLst>
+          </p:nvPr>
+        </p:nvSpPr>
+        <p:spPr>
+          <a:xfrm>
+            <a:off x="521970" y="1296829"/>
+            <a:ext cx="315278" cy="315278"/>
+          </a:xfrm>
+          <a:prstGeom prst="roundRect">
+            <a:avLst/>
+          </a:prstGeom>
+          <a:gradFill>
+            <a:gsLst>
+              <a:gs pos="0">
+                <a:schemeClr val="accent1">
+                  <a:lumMod val="40000"/>
+                  <a:lumOff val="60000"/>
+                </a:schemeClr>
+              </a:gs>
+              <a:gs pos="100000">
+                <a:schemeClr val="accent1"/>
+              </a:gs>
+            </a:gsLst>
+            <a:lin ang="2700000" scaled="0"/>
+          </a:gradFill>
+          <a:ln>
+            <a:noFill/>
+          </a:ln>
+          <a:effectLst>
+            <a:outerShdw blurRad="177800" dist="38100" dir="2700000" algn="tl" rotWithShape="0">
+              <a:schemeClr val="accent1">
+                <a:lumMod val="75000"/>
+                <a:alpha val="15000"/>
+              </a:schemeClr>
+            </a:outerShdw>
+          </a:effectLst>
+        </p:spPr>
+        <p:style>
+          <a:lnRef idx="2">
+            <a:schemeClr val="accent1">
+              <a:lumMod val="75000"/>
+            </a:schemeClr>
+          </a:lnRef>
+          <a:fillRef idx="1">
+            <a:schemeClr val="accent1"/>
+          </a:fillRef>
+          <a:effectRef idx="0">
+            <a:srgbClr val="FFFFFF"/>
+          </a:effectRef>
+          <a:fontRef idx="minor">
+            <a:schemeClr val="lt1"/>
+          </a:fontRef>
+        </p:style>
+        <p:txBody>
+          <a:bodyPr rtlCol="0" anchor="ctr"/>
+          <a:lstStyle/>
+          <a:p>
+            <a:pPr algn="ctr"/>
+            <a:endParaRPr lang="zh-CN" altLang="en-US" sz="1350">
+              <a:latin typeface="+mn-ea"/>
+            </a:endParaRPr>
+          </a:p>
+        </p:txBody>
+      </p:sp>
+      <p:pic>
+        <p:nvPicPr>
+          <p:cNvPr id="22" name="图片 21" descr="343439383331313b343532303031393bd2b5bca8b9dcc0ed"/>
+          <p:cNvPicPr>
+            <a:picLocks noChangeAspect="1"/>
+          </p:cNvPicPr>
+          <p:nvPr>
+            <p:custDataLst>
+              <p:tags r:id="rId4"/>
+            </p:custDataLst>
+          </p:nvPr>
+        </p:nvPicPr>
+        <p:blipFill>
+          <a:blip r:embed="rId5">
+            <a:extLst>
+              <a:ext uri="{96DAC541-7B7A-43D3-8B79-37D633B846F1}">
+                <asvg:svgBlip xmlns:asvg="http://schemas.microsoft.com/office/drawing/2016/SVG/main" r:embed="rId6"/>
+              </a:ext>
+            </a:extLst>
+          </a:blip>
+          <a:stretch>
+            <a:fillRect/>
+          </a:stretch>
+        </p:blipFill>
+        <p:spPr>
+          <a:xfrm>
+            <a:off x="611029" y="1385888"/>
+            <a:ext cx="137160" cy="137160"/>
+          </a:xfrm>
+          <a:prstGeom prst="rect">
+            <a:avLst/>
+          </a:prstGeom>
+          <a:effectLst/>
+        </p:spPr>
+      </p:pic>
+      <p:cxnSp>
+        <p:nvCxnSpPr>
+          <p:cNvPr id="66" name="直接连接符 65"/>
+          <p:cNvCxnSpPr/>
+          <p:nvPr>
+            <p:custDataLst>
+              <p:tags r:id="rId7"/>
+            </p:custDataLst>
+          </p:nvPr>
+        </p:nvCxnSpPr>
+        <p:spPr>
+          <a:xfrm>
+            <a:off x="521970" y="1945005"/>
+            <a:ext cx="8094345" cy="0"/>
+          </a:xfrm>
+          <a:prstGeom prst="line">
+            <a:avLst/>
+          </a:prstGeom>
+          <a:ln>
+            <a:solidFill>
+              <a:schemeClr val="accent1">
+                <a:lumMod val="40000"/>
+                <a:lumOff val="60000"/>
+                <a:alpha val="40000"/>
+              </a:schemeClr>
+            </a:solidFill>
+          </a:ln>
+        </p:spPr>
+        <p:style>
+          <a:lnRef idx="2">
+            <a:schemeClr val="accent1"/>
+          </a:lnRef>
+          <a:fillRef idx="0">
+            <a:srgbClr val="FFFFFF"/>
+          </a:fillRef>
+          <a:effectRef idx="0">
+            <a:srgbClr val="FFFFFF"/>
+          </a:effectRef>
+          <a:fontRef idx="minor">
+            <a:schemeClr val="tx1"/>
+          </a:fontRef>
+        </p:style>
+      </p:cxnSp>
+      <p:sp>
+        <p:nvSpPr>
+          <p:cNvPr id="33" name="矩形 32"/>
+          <p:cNvSpPr/>
+          <p:nvPr>
+            <p:custDataLst>
+              <p:tags r:id="rId8"/>
+            </p:custDataLst>
+          </p:nvPr>
+        </p:nvSpPr>
+        <p:spPr>
+          <a:xfrm>
+            <a:off x="1016794" y="2054543"/>
+            <a:ext cx="7604760" cy="762000"/>
+          </a:xfrm>
+          <a:prstGeom prst="rect">
+            <a:avLst/>
+          </a:prstGeom>
+          <a:noFill/>
+        </p:spPr>
+        <p:txBody>
+          <a:bodyPr wrap="square" lIns="0" tIns="0" rIns="0" bIns="0" rtlCol="0" anchor="ctr" anchorCtr="0">
+            <a:noAutofit/>
+          </a:bodyPr>
+          <a:lstStyle/>
+          <a:p>
+            <a:pPr indent="0" fontAlgn="auto">
+              <a:lnSpc>
+                <a:spcPct val="150000"/>
+              </a:lnSpc>
+              <a:spcBef>
+                <a:spcPct val="0"/>
+              </a:spcBef>
+              <a:spcAft>
+                <a:spcPts val="1200"/>
+              </a:spcAft>
+            </a:pPr>
+            <a:r>
+              <a:rPr lang="zh-CN" altLang="en-US" sz="1050" dirty="0">
+                <a:ln>
+                  <a:noFill/>
+                  <a:prstDash val="sysDot"/>
+                </a:ln>
+                <a:solidFill>
+                  <a:schemeClr val="tx1">
+                    <a:lumMod val="85000"/>
+                    <a:lumOff val="15000"/>
+                  </a:schemeClr>
+                </a:solidFill>
+                <a:latin typeface="+mn-ea"/>
+              </a:rPr>
+              <a:t>单击此处添加文本具体内容，简明扼要地阐述您的观点。根据需要可酌情增减文字，以便观者准确地理解您传达的思想。单击此处添加文本具体内容，简明扼要地阐述您的观点。根据需要可酌情增减文字。单击此处添加文本具体内容，简明扼要地阐述您的观点</a:t>
+            </a:r>
+            <a:endParaRPr lang="zh-CN" altLang="en-US" sz="1050" dirty="0">
+              <a:ln>
+                <a:noFill/>
+                <a:prstDash val="sysDot"/>
+              </a:ln>
+              <a:solidFill>
+                <a:schemeClr val="tx1">
+                  <a:lumMod val="85000"/>
+                  <a:lumOff val="15000"/>
+                </a:schemeClr>
+              </a:solidFill>
+              <a:latin typeface="+mn-ea"/>
+            </a:endParaRPr>
+          </a:p>
+        </p:txBody>
+      </p:sp>
+      <p:sp>
+        <p:nvSpPr>
+          <p:cNvPr id="35" name="圆角矩形 34"/>
+          <p:cNvSpPr/>
+          <p:nvPr>
+            <p:custDataLst>
+              <p:tags r:id="rId9"/>
+            </p:custDataLst>
+          </p:nvPr>
+        </p:nvSpPr>
+        <p:spPr>
+          <a:xfrm>
+            <a:off x="521970" y="2277904"/>
+            <a:ext cx="315278" cy="315278"/>
+          </a:xfrm>
+          <a:prstGeom prst="roundRect">
+            <a:avLst/>
+          </a:prstGeom>
+          <a:gradFill>
+            <a:gsLst>
+              <a:gs pos="0">
+                <a:schemeClr val="accent1">
+                  <a:lumMod val="40000"/>
+                  <a:lumOff val="60000"/>
+                </a:schemeClr>
+              </a:gs>
+              <a:gs pos="100000">
+                <a:schemeClr val="accent1"/>
+              </a:gs>
+            </a:gsLst>
+            <a:lin ang="2700000" scaled="0"/>
+          </a:gradFill>
+          <a:ln>
+            <a:noFill/>
+          </a:ln>
+          <a:effectLst>
+            <a:outerShdw blurRad="177800" dist="38100" dir="2700000" algn="tl" rotWithShape="0">
+              <a:schemeClr val="accent1">
+                <a:lumMod val="75000"/>
+                <a:alpha val="15000"/>
+              </a:schemeClr>
+            </a:outerShdw>
+          </a:effectLst>
+        </p:spPr>
+        <p:style>
+          <a:lnRef idx="2">
+            <a:schemeClr val="accent1">
+              <a:lumMod val="75000"/>
+            </a:schemeClr>
+          </a:lnRef>
+          <a:fillRef idx="1">
+            <a:schemeClr val="accent1"/>
+          </a:fillRef>
+          <a:effectRef idx="0">
+            <a:srgbClr val="FFFFFF"/>
+          </a:effectRef>
+          <a:fontRef idx="minor">
+            <a:schemeClr val="lt1"/>
+          </a:fontRef>
+        </p:style>
+        <p:txBody>
+          <a:bodyPr rtlCol="0" anchor="ctr"/>
+          <a:lstStyle/>
+          <a:p>
+            <a:pPr algn="ctr"/>
+            <a:endParaRPr lang="zh-CN" altLang="en-US" sz="1350">
+              <a:latin typeface="+mn-ea"/>
+            </a:endParaRPr>
+          </a:p>
+        </p:txBody>
+      </p:sp>
+      <p:cxnSp>
+        <p:nvCxnSpPr>
+          <p:cNvPr id="37" name="直接连接符 36"/>
+          <p:cNvCxnSpPr/>
+          <p:nvPr>
+            <p:custDataLst>
+              <p:tags r:id="rId10"/>
+            </p:custDataLst>
+          </p:nvPr>
+        </p:nvCxnSpPr>
+        <p:spPr>
+          <a:xfrm>
+            <a:off x="521970" y="2926080"/>
+            <a:ext cx="8094345" cy="0"/>
+          </a:xfrm>
+          <a:prstGeom prst="line">
+            <a:avLst/>
+          </a:prstGeom>
+          <a:ln>
+            <a:solidFill>
+              <a:schemeClr val="accent1">
+                <a:lumMod val="40000"/>
+                <a:lumOff val="60000"/>
+                <a:alpha val="40000"/>
+              </a:schemeClr>
+            </a:solidFill>
+          </a:ln>
+        </p:spPr>
+        <p:style>
+          <a:lnRef idx="2">
+            <a:schemeClr val="accent1"/>
+          </a:lnRef>
+          <a:fillRef idx="0">
+            <a:srgbClr val="FFFFFF"/>
+          </a:fillRef>
+          <a:effectRef idx="0">
+            <a:srgbClr val="FFFFFF"/>
+          </a:effectRef>
+          <a:fontRef idx="minor">
+            <a:schemeClr val="tx1"/>
+          </a:fontRef>
+        </p:style>
+      </p:cxnSp>
+      <p:sp>
+        <p:nvSpPr>
+          <p:cNvPr id="39" name="矩形 38"/>
+          <p:cNvSpPr/>
+          <p:nvPr>
+            <p:custDataLst>
+              <p:tags r:id="rId11"/>
+            </p:custDataLst>
+          </p:nvPr>
+        </p:nvSpPr>
+        <p:spPr>
+          <a:xfrm>
+            <a:off x="1016794" y="3035618"/>
+            <a:ext cx="7604760" cy="762000"/>
+          </a:xfrm>
+          <a:prstGeom prst="rect">
+            <a:avLst/>
+          </a:prstGeom>
+          <a:noFill/>
+        </p:spPr>
+        <p:txBody>
+          <a:bodyPr wrap="square" lIns="0" tIns="0" rIns="0" bIns="0" rtlCol="0" anchor="ctr" anchorCtr="0">
+            <a:noAutofit/>
+          </a:bodyPr>
+          <a:lstStyle/>
+          <a:p>
+            <a:pPr indent="0" fontAlgn="auto">
+              <a:lnSpc>
+                <a:spcPct val="150000"/>
+              </a:lnSpc>
+              <a:spcBef>
+                <a:spcPct val="0"/>
+              </a:spcBef>
+              <a:spcAft>
+                <a:spcPts val="1200"/>
+              </a:spcAft>
+            </a:pPr>
+            <a:r>
+              <a:rPr lang="zh-CN" altLang="en-US" sz="1050" dirty="0">
+                <a:ln>
+                  <a:noFill/>
+                  <a:prstDash val="sysDot"/>
+                </a:ln>
+                <a:solidFill>
+                  <a:schemeClr val="tx1">
+                    <a:lumMod val="85000"/>
+                    <a:lumOff val="15000"/>
+                  </a:schemeClr>
+                </a:solidFill>
+                <a:latin typeface="+mn-ea"/>
+              </a:rPr>
+              <a:t>单击此处添加文本具体内容，简明扼要地阐述您的观点。根据需要可酌情增减文字，以便观者准确地理解您传达的思想。单击此处添加文本具体内容，简明扼要地阐述您的观点。根据需要可酌情增减文字。单击此处添加文本具体内容，简明扼要地阐述您的观点</a:t>
+            </a:r>
+            <a:endParaRPr lang="zh-CN" altLang="en-US" sz="1050" dirty="0">
+              <a:ln>
+                <a:noFill/>
+                <a:prstDash val="sysDot"/>
+              </a:ln>
+              <a:solidFill>
+                <a:schemeClr val="tx1">
+                  <a:lumMod val="85000"/>
+                  <a:lumOff val="15000"/>
+                </a:schemeClr>
+              </a:solidFill>
+              <a:latin typeface="+mn-ea"/>
+            </a:endParaRPr>
+          </a:p>
+        </p:txBody>
+      </p:sp>
+      <p:sp>
+        <p:nvSpPr>
+          <p:cNvPr id="41" name="圆角矩形 40"/>
+          <p:cNvSpPr/>
+          <p:nvPr>
+            <p:custDataLst>
+              <p:tags r:id="rId12"/>
+            </p:custDataLst>
+          </p:nvPr>
+        </p:nvSpPr>
+        <p:spPr>
+          <a:xfrm>
+            <a:off x="521970" y="3258979"/>
+            <a:ext cx="315278" cy="315278"/>
+          </a:xfrm>
+          <a:prstGeom prst="roundRect">
+            <a:avLst/>
+          </a:prstGeom>
+          <a:gradFill>
+            <a:gsLst>
+              <a:gs pos="0">
+                <a:schemeClr val="accent1">
+                  <a:lumMod val="40000"/>
+                  <a:lumOff val="60000"/>
+                </a:schemeClr>
+              </a:gs>
+              <a:gs pos="100000">
+                <a:schemeClr val="accent1"/>
+              </a:gs>
+            </a:gsLst>
+            <a:lin ang="2700000" scaled="0"/>
+          </a:gradFill>
+          <a:ln>
+            <a:noFill/>
+          </a:ln>
+          <a:effectLst>
+            <a:outerShdw blurRad="177800" dist="38100" dir="2700000" algn="tl" rotWithShape="0">
+              <a:schemeClr val="accent1">
+                <a:lumMod val="75000"/>
+                <a:alpha val="15000"/>
+              </a:schemeClr>
+            </a:outerShdw>
+          </a:effectLst>
+        </p:spPr>
+        <p:style>
+          <a:lnRef idx="2">
+            <a:schemeClr val="accent1">
+              <a:lumMod val="75000"/>
+            </a:schemeClr>
+          </a:lnRef>
+          <a:fillRef idx="1">
+            <a:schemeClr val="accent1"/>
+          </a:fillRef>
+          <a:effectRef idx="0">
+            <a:srgbClr val="FFFFFF"/>
+          </a:effectRef>
+          <a:fontRef idx="minor">
+            <a:schemeClr val="lt1"/>
+          </a:fontRef>
+        </p:style>
+        <p:txBody>
+          <a:bodyPr rtlCol="0" anchor="ctr"/>
+          <a:lstStyle/>
+          <a:p>
+            <a:pPr algn="ctr"/>
+            <a:endParaRPr lang="zh-CN" altLang="en-US" sz="1350">
+              <a:latin typeface="+mn-ea"/>
+            </a:endParaRPr>
+          </a:p>
+        </p:txBody>
+      </p:sp>
+      <p:cxnSp>
+        <p:nvCxnSpPr>
+          <p:cNvPr id="43" name="直接连接符 42"/>
+          <p:cNvCxnSpPr/>
+          <p:nvPr>
+            <p:custDataLst>
+              <p:tags r:id="rId13"/>
+            </p:custDataLst>
+          </p:nvPr>
+        </p:nvCxnSpPr>
+        <p:spPr>
+          <a:xfrm>
+            <a:off x="521970" y="3907155"/>
+            <a:ext cx="8094345" cy="0"/>
+          </a:xfrm>
+          <a:prstGeom prst="line">
+            <a:avLst/>
+          </a:prstGeom>
+          <a:ln>
+            <a:solidFill>
+              <a:schemeClr val="accent1">
+                <a:lumMod val="40000"/>
+                <a:lumOff val="60000"/>
+                <a:alpha val="40000"/>
+              </a:schemeClr>
+            </a:solidFill>
+          </a:ln>
+        </p:spPr>
+        <p:style>
+          <a:lnRef idx="2">
+            <a:schemeClr val="accent1"/>
+          </a:lnRef>
+          <a:fillRef idx="0">
+            <a:srgbClr val="FFFFFF"/>
+          </a:fillRef>
+          <a:effectRef idx="0">
+            <a:srgbClr val="FFFFFF"/>
+          </a:effectRef>
+          <a:fontRef idx="minor">
+            <a:schemeClr val="tx1"/>
+          </a:fontRef>
+        </p:style>
+      </p:cxnSp>
+      <p:sp>
+        <p:nvSpPr>
+          <p:cNvPr id="45" name="矩形 44"/>
+          <p:cNvSpPr/>
+          <p:nvPr>
+            <p:custDataLst>
+              <p:tags r:id="rId14"/>
+            </p:custDataLst>
+          </p:nvPr>
+        </p:nvSpPr>
+        <p:spPr>
+          <a:xfrm>
+            <a:off x="1016794" y="4016693"/>
+            <a:ext cx="7604760" cy="762000"/>
+          </a:xfrm>
+          <a:prstGeom prst="rect">
+            <a:avLst/>
+          </a:prstGeom>
+          <a:noFill/>
+        </p:spPr>
+        <p:txBody>
+          <a:bodyPr wrap="square" lIns="0" tIns="0" rIns="0" bIns="0" rtlCol="0" anchor="ctr" anchorCtr="0">
+            <a:noAutofit/>
+          </a:bodyPr>
+          <a:lstStyle/>
+          <a:p>
+            <a:pPr indent="0" fontAlgn="auto">
+              <a:lnSpc>
+                <a:spcPct val="150000"/>
+              </a:lnSpc>
+              <a:spcBef>
+                <a:spcPct val="0"/>
+              </a:spcBef>
+              <a:spcAft>
+                <a:spcPts val="1200"/>
+              </a:spcAft>
+            </a:pPr>
+            <a:r>
+              <a:rPr lang="zh-CN" altLang="en-US" sz="1050" dirty="0">
+                <a:ln>
+                  <a:noFill/>
+                  <a:prstDash val="sysDot"/>
+                </a:ln>
+                <a:solidFill>
+                  <a:schemeClr val="tx1">
+                    <a:lumMod val="85000"/>
+                    <a:lumOff val="15000"/>
+                  </a:schemeClr>
+                </a:solidFill>
+                <a:latin typeface="+mn-ea"/>
+              </a:rPr>
+              <a:t>单击此处添加文本具体内容，简明扼要地阐述您的观点。根据需要可酌情增减文字，以便观者准确地理解您传达的思想。单击此处添加文本具体内容，简明扼要地阐述您的观点。根据需要可酌情增减文字。单击此处添加文本具体内容，简明扼要地阐述您的观点</a:t>
+            </a:r>
+            <a:endParaRPr lang="zh-CN" altLang="en-US" sz="1050" dirty="0">
+              <a:ln>
+                <a:noFill/>
+                <a:prstDash val="sysDot"/>
+              </a:ln>
+              <a:solidFill>
+                <a:schemeClr val="tx1">
+                  <a:lumMod val="85000"/>
+                  <a:lumOff val="15000"/>
+                </a:schemeClr>
+              </a:solidFill>
+              <a:latin typeface="+mn-ea"/>
+            </a:endParaRPr>
+          </a:p>
+        </p:txBody>
+      </p:sp>
+      <p:sp>
+        <p:nvSpPr>
+          <p:cNvPr id="47" name="圆角矩形 46"/>
+          <p:cNvSpPr/>
+          <p:nvPr>
+            <p:custDataLst>
+              <p:tags r:id="rId15"/>
+            </p:custDataLst>
+          </p:nvPr>
+        </p:nvSpPr>
+        <p:spPr>
+          <a:xfrm>
+            <a:off x="521970" y="4240054"/>
+            <a:ext cx="315278" cy="315278"/>
+          </a:xfrm>
+          <a:prstGeom prst="roundRect">
+            <a:avLst/>
+          </a:prstGeom>
+          <a:gradFill>
+            <a:gsLst>
+              <a:gs pos="0">
+                <a:schemeClr val="accent1">
+                  <a:lumMod val="40000"/>
+                  <a:lumOff val="60000"/>
+                </a:schemeClr>
+              </a:gs>
+              <a:gs pos="100000">
+                <a:schemeClr val="accent1"/>
+              </a:gs>
+            </a:gsLst>
+            <a:lin ang="2700000" scaled="0"/>
+          </a:gradFill>
+          <a:ln>
+            <a:noFill/>
+          </a:ln>
+          <a:effectLst>
+            <a:outerShdw blurRad="177800" dist="38100" dir="2700000" algn="tl" rotWithShape="0">
+              <a:schemeClr val="accent1">
+                <a:lumMod val="75000"/>
+                <a:alpha val="15000"/>
+              </a:schemeClr>
+            </a:outerShdw>
+          </a:effectLst>
+        </p:spPr>
+        <p:style>
+          <a:lnRef idx="2">
+            <a:schemeClr val="accent1">
+              <a:lumMod val="75000"/>
+            </a:schemeClr>
+          </a:lnRef>
+          <a:fillRef idx="1">
+            <a:schemeClr val="accent1"/>
+          </a:fillRef>
+          <a:effectRef idx="0">
+            <a:srgbClr val="FFFFFF"/>
+          </a:effectRef>
+          <a:fontRef idx="minor">
+            <a:schemeClr val="lt1"/>
+          </a:fontRef>
+        </p:style>
+        <p:txBody>
+          <a:bodyPr rtlCol="0" anchor="ctr"/>
+          <a:lstStyle/>
+          <a:p>
+            <a:pPr algn="ctr"/>
+            <a:endParaRPr lang="zh-CN" altLang="en-US" sz="1350">
+              <a:latin typeface="+mn-ea"/>
+            </a:endParaRPr>
+          </a:p>
+        </p:txBody>
+      </p:sp>
+      <p:pic>
+        <p:nvPicPr>
+          <p:cNvPr id="51" name="图片 50" descr="343439383331313b343532303032303bb8f6c8cbd0c5cfa2"/>
+          <p:cNvPicPr>
+            <a:picLocks noChangeAspect="1"/>
+          </p:cNvPicPr>
+          <p:nvPr>
+            <p:custDataLst>
+              <p:tags r:id="rId16"/>
+            </p:custDataLst>
+          </p:nvPr>
+        </p:nvPicPr>
+        <p:blipFill>
+          <a:blip r:embed="rId17">
+            <a:extLst>
+              <a:ext uri="{96DAC541-7B7A-43D3-8B79-37D633B846F1}">
+                <asvg:svgBlip xmlns:asvg="http://schemas.microsoft.com/office/drawing/2016/SVG/main" r:embed="rId18"/>
+              </a:ext>
+            </a:extLst>
+          </a:blip>
+          <a:stretch>
+            <a:fillRect/>
+          </a:stretch>
+        </p:blipFill>
+        <p:spPr>
+          <a:xfrm>
+            <a:off x="599599" y="2355533"/>
+            <a:ext cx="160020" cy="160020"/>
+          </a:xfrm>
+          <a:prstGeom prst="rect">
+            <a:avLst/>
+          </a:prstGeom>
+        </p:spPr>
+      </p:pic>
+      <p:pic>
+        <p:nvPicPr>
+          <p:cNvPr id="52" name="图片 51" descr="343439383331313b343532303033323bd3a6d3c3b9dcc0ed"/>
+          <p:cNvPicPr>
+            <a:picLocks noChangeAspect="1"/>
+          </p:cNvPicPr>
+          <p:nvPr>
+            <p:custDataLst>
+              <p:tags r:id="rId19"/>
+            </p:custDataLst>
+          </p:nvPr>
+        </p:nvPicPr>
+        <p:blipFill>
+          <a:blip r:embed="rId20">
+            <a:extLst>
+              <a:ext uri="{96DAC541-7B7A-43D3-8B79-37D633B846F1}">
+                <asvg:svgBlip xmlns:asvg="http://schemas.microsoft.com/office/drawing/2016/SVG/main" r:embed="rId21"/>
+              </a:ext>
+            </a:extLst>
+          </a:blip>
+          <a:stretch>
+            <a:fillRect/>
+          </a:stretch>
+        </p:blipFill>
+        <p:spPr>
+          <a:xfrm>
+            <a:off x="599599" y="3336608"/>
+            <a:ext cx="160020" cy="160020"/>
+          </a:xfrm>
+          <a:prstGeom prst="rect">
+            <a:avLst/>
+          </a:prstGeom>
+        </p:spPr>
+      </p:pic>
+      <p:pic>
+        <p:nvPicPr>
+          <p:cNvPr id="53" name="图片 52" descr="343439383331313b343532303032383bbfcdbba7b9dcc0ed"/>
+          <p:cNvPicPr>
+            <a:picLocks noChangeAspect="1"/>
+          </p:cNvPicPr>
+          <p:nvPr>
+            <p:custDataLst>
+              <p:tags r:id="rId22"/>
+            </p:custDataLst>
+          </p:nvPr>
+        </p:nvPicPr>
+        <p:blipFill>
+          <a:blip r:embed="rId23">
+            <a:extLst>
+              <a:ext uri="{96DAC541-7B7A-43D3-8B79-37D633B846F1}">
+                <asvg:svgBlip xmlns:asvg="http://schemas.microsoft.com/office/drawing/2016/SVG/main" r:embed="rId24"/>
+              </a:ext>
+            </a:extLst>
+          </a:blip>
+          <a:stretch>
+            <a:fillRect/>
+          </a:stretch>
+        </p:blipFill>
+        <p:spPr>
+          <a:xfrm>
+            <a:off x="598609" y="4316693"/>
+            <a:ext cx="162000" cy="162000"/>
+          </a:xfrm>
+          <a:prstGeom prst="rect">
+            <a:avLst/>
+          </a:prstGeom>
+        </p:spPr>
+      </p:pic>
+    </p:spTree>
+    <p:custDataLst>
+      <p:tags r:id="rId25"/>
+    </p:custDataLst>
+  </p:cSld>
+  <p:clrMapOvr>
+    <a:masterClrMapping/>
+  </p:clrMapOvr>
+</p:sld>
+</file>
+
+<file path=ppt/slides/slide11.xml><?xml version="1.0" encoding="utf-8"?>
+<p:sld xmlns:a="http://schemas.openxmlformats.org/drawingml/2006/main" xmlns:r="http://schemas.openxmlformats.org/officeDocument/2006/relationships" xmlns:p="http://schemas.openxmlformats.org/presentationml/2006/main">
+  <p:cSld>
+    <p:spTree>
+      <p:nvGrpSpPr>
+        <p:cNvPr id="1" name=""/>
+        <p:cNvGrpSpPr/>
+        <p:nvPr/>
+      </p:nvGrpSpPr>
+      <p:grpSpPr/>
+      <p:sp>
+        <p:nvSpPr>
+          <p:cNvPr id="2" name="文本框 1"/>
+          <p:cNvSpPr txBox="1"/>
+          <p:nvPr/>
+        </p:nvSpPr>
+        <p:spPr>
+          <a:xfrm>
+            <a:off x="344170" y="972185"/>
+            <a:ext cx="8395335" cy="368300"/>
+          </a:xfrm>
+          <a:prstGeom prst="rect">
+            <a:avLst/>
+          </a:prstGeom>
+          <a:noFill/>
+        </p:spPr>
+        <p:txBody>
+          <a:bodyPr wrap="square" rtlCol="0">
+            <a:spAutoFit/>
+          </a:bodyPr>
+          <a:p>
+            <a:r>
+              <a:rPr lang="zh-CN" altLang="en-US"/>
+              <a:t>数据平台的</a:t>
+            </a:r>
+            <a:r>
+              <a:rPr lang="zh-CN" altLang="en-US"/>
+              <a:t>演进</a:t>
+            </a:r>
+            <a:endParaRPr lang="zh-CN" altLang="en-US"/>
           </a:p>
         </p:txBody>
       </p:sp>
@@ -1421,12 +2611,13 @@
 
 <file path=ppt/slides/slide2.xml><?xml version="1.0" encoding="utf-8"?>
 <p:sld xmlns:a="http://schemas.openxmlformats.org/drawingml/2006/main" xmlns:r="http://schemas.openxmlformats.org/officeDocument/2006/relationships" xmlns:p="http://schemas.openxmlformats.org/presentationml/2006/main">
-  <p:cSld name="Slide 2">
+  <p:cSld>
     <p:bg>
       <p:bgPr>
         <a:solidFill>
           <a:srgbClr val="F8FBFC"/>
         </a:solidFill>
+        <a:effectLst/>
       </p:bgPr>
     </p:bg>
     <p:spTree>
@@ -1458,13 +2649,12 @@
             <a:avLst/>
           </a:prstGeom>
           <a:noFill/>
-          <a:ln/>
-        </p:spPr>
-        <p:txBody>
-          <a:bodyPr wrap="square" rtlCol="0" anchor="ctr"/>
-          <a:lstStyle/>
-          <a:p>
-            <a:pPr indent="0" marL="0">
+        </p:spPr>
+        <p:txBody>
+          <a:bodyPr wrap="square" rtlCol="0" anchor="ctr"/>
+          <a:lstStyle/>
+          <a:p>
+            <a:pPr marL="0" indent="0">
               <a:buNone/>
             </a:pPr>
             <a:r>
@@ -1472,9 +2662,9 @@
                 <a:solidFill>
                   <a:srgbClr val="1B3A4B"/>
                 </a:solidFill>
-                <a:latin typeface="Microsoft YaHei" pitchFamily="34" charset="0"/>
-                <a:ea typeface="Microsoft YaHei" pitchFamily="34" charset="-122"/>
-                <a:cs typeface="Microsoft YaHei" pitchFamily="34" charset="-120"/>
+                <a:latin typeface="微软雅黑" pitchFamily="34" charset="0"/>
+                <a:ea typeface="微软雅黑" pitchFamily="34" charset="-122"/>
+                <a:cs typeface="微软雅黑" pitchFamily="34" charset="-120"/>
               </a:rPr>
               <a:t>架构总览 — 七层存算分离数据平台</a:t>
             </a:r>
@@ -1524,13 +2714,12 @@
             <a:avLst/>
           </a:prstGeom>
           <a:noFill/>
-          <a:ln/>
         </p:spPr>
         <p:txBody>
           <a:bodyPr wrap="square" rtlCol="0" anchor="t"/>
           <a:lstStyle/>
           <a:p>
-            <a:pPr algn="l" indent="0" marL="0">
+            <a:pPr marL="0" indent="0" algn="l">
               <a:buNone/>
             </a:pPr>
             <a:r>
@@ -1538,9 +2727,9 @@
                 <a:solidFill>
                   <a:srgbClr val="7B1FA2"/>
                 </a:solidFill>
-                <a:latin typeface="Microsoft YaHei" pitchFamily="34" charset="0"/>
-                <a:ea typeface="Microsoft YaHei" pitchFamily="34" charset="-122"/>
-                <a:cs typeface="Microsoft YaHei" pitchFamily="34" charset="-120"/>
+                <a:latin typeface="微软雅黑" pitchFamily="34" charset="0"/>
+                <a:ea typeface="微软雅黑" pitchFamily="34" charset="-122"/>
+                <a:cs typeface="微软雅黑" pitchFamily="34" charset="-120"/>
               </a:rPr>
               <a:t>数据源</a:t>
             </a:r>
@@ -1590,13 +2779,12 @@
             <a:avLst/>
           </a:prstGeom>
           <a:noFill/>
-          <a:ln/>
-        </p:spPr>
-        <p:txBody>
-          <a:bodyPr wrap="square" rtlCol="0" anchor="ctr"/>
-          <a:lstStyle/>
-          <a:p>
-            <a:pPr algn="ctr" indent="0" marL="0">
+        </p:spPr>
+        <p:txBody>
+          <a:bodyPr wrap="square" rtlCol="0" anchor="ctr"/>
+          <a:lstStyle/>
+          <a:p>
+            <a:pPr marL="0" indent="0" algn="ctr">
               <a:buNone/>
             </a:pPr>
             <a:r>
@@ -1604,9 +2792,9 @@
                 <a:solidFill>
                   <a:srgbClr val="7B1FA2"/>
                 </a:solidFill>
-                <a:latin typeface="Microsoft YaHei" pitchFamily="34" charset="0"/>
-                <a:ea typeface="Microsoft YaHei" pitchFamily="34" charset="-122"/>
-                <a:cs typeface="Microsoft YaHei" pitchFamily="34" charset="-120"/>
+                <a:latin typeface="微软雅黑" pitchFamily="34" charset="0"/>
+                <a:ea typeface="微软雅黑" pitchFamily="34" charset="-122"/>
+                <a:cs typeface="微软雅黑" pitchFamily="34" charset="-120"/>
               </a:rPr>
               <a:t>RDBMS MySQL/PG</a:t>
             </a:r>
@@ -1656,13 +2844,12 @@
             <a:avLst/>
           </a:prstGeom>
           <a:noFill/>
-          <a:ln/>
-        </p:spPr>
-        <p:txBody>
-          <a:bodyPr wrap="square" rtlCol="0" anchor="ctr"/>
-          <a:lstStyle/>
-          <a:p>
-            <a:pPr algn="ctr" indent="0" marL="0">
+        </p:spPr>
+        <p:txBody>
+          <a:bodyPr wrap="square" rtlCol="0" anchor="ctr"/>
+          <a:lstStyle/>
+          <a:p>
+            <a:pPr marL="0" indent="0" algn="ctr">
               <a:buNone/>
             </a:pPr>
             <a:r>
@@ -1670,9 +2857,9 @@
                 <a:solidFill>
                   <a:srgbClr val="7B1FA2"/>
                 </a:solidFill>
-                <a:latin typeface="Microsoft YaHei" pitchFamily="34" charset="0"/>
-                <a:ea typeface="Microsoft YaHei" pitchFamily="34" charset="-122"/>
-                <a:cs typeface="Microsoft YaHei" pitchFamily="34" charset="-120"/>
+                <a:latin typeface="微软雅黑" pitchFamily="34" charset="0"/>
+                <a:ea typeface="微软雅黑" pitchFamily="34" charset="-122"/>
+                <a:cs typeface="微软雅黑" pitchFamily="34" charset="-120"/>
               </a:rPr>
               <a:t>用户行为日志</a:t>
             </a:r>
@@ -1722,13 +2909,12 @@
             <a:avLst/>
           </a:prstGeom>
           <a:noFill/>
-          <a:ln/>
-        </p:spPr>
-        <p:txBody>
-          <a:bodyPr wrap="square" rtlCol="0" anchor="ctr"/>
-          <a:lstStyle/>
-          <a:p>
-            <a:pPr algn="ctr" indent="0" marL="0">
+        </p:spPr>
+        <p:txBody>
+          <a:bodyPr wrap="square" rtlCol="0" anchor="ctr"/>
+          <a:lstStyle/>
+          <a:p>
+            <a:pPr marL="0" indent="0" algn="ctr">
               <a:buNone/>
             </a:pPr>
             <a:r>
@@ -1736,9 +2922,9 @@
                 <a:solidFill>
                   <a:srgbClr val="7B1FA2"/>
                 </a:solidFill>
-                <a:latin typeface="Microsoft YaHei" pitchFamily="34" charset="0"/>
-                <a:ea typeface="Microsoft YaHei" pitchFamily="34" charset="-122"/>
-                <a:cs typeface="Microsoft YaHei" pitchFamily="34" charset="-120"/>
+                <a:latin typeface="微软雅黑" pitchFamily="34" charset="0"/>
+                <a:ea typeface="微软雅黑" pitchFamily="34" charset="-122"/>
+                <a:cs typeface="微软雅黑" pitchFamily="34" charset="-120"/>
               </a:rPr>
               <a:t>IoT 设备 MQTT</a:t>
             </a:r>
@@ -1788,13 +2974,12 @@
             <a:avLst/>
           </a:prstGeom>
           <a:noFill/>
-          <a:ln/>
-        </p:spPr>
-        <p:txBody>
-          <a:bodyPr wrap="square" rtlCol="0" anchor="ctr"/>
-          <a:lstStyle/>
-          <a:p>
-            <a:pPr algn="ctr" indent="0" marL="0">
+        </p:spPr>
+        <p:txBody>
+          <a:bodyPr wrap="square" rtlCol="0" anchor="ctr"/>
+          <a:lstStyle/>
+          <a:p>
+            <a:pPr marL="0" indent="0" algn="ctr">
               <a:buNone/>
             </a:pPr>
             <a:r>
@@ -1802,9 +2987,9 @@
                 <a:solidFill>
                   <a:srgbClr val="7B1FA2"/>
                 </a:solidFill>
-                <a:latin typeface="Microsoft YaHei" pitchFamily="34" charset="0"/>
-                <a:ea typeface="Microsoft YaHei" pitchFamily="34" charset="-122"/>
-                <a:cs typeface="Microsoft YaHei" pitchFamily="34" charset="-120"/>
+                <a:latin typeface="微软雅黑" pitchFamily="34" charset="0"/>
+                <a:ea typeface="微软雅黑" pitchFamily="34" charset="-122"/>
+                <a:cs typeface="微软雅黑" pitchFamily="34" charset="-120"/>
               </a:rPr>
               <a:t>遥感影像 tiff/nc</a:t>
             </a:r>
@@ -1854,13 +3039,12 @@
             <a:avLst/>
           </a:prstGeom>
           <a:noFill/>
-          <a:ln/>
-        </p:spPr>
-        <p:txBody>
-          <a:bodyPr wrap="square" rtlCol="0" anchor="ctr"/>
-          <a:lstStyle/>
-          <a:p>
-            <a:pPr algn="ctr" indent="0" marL="0">
+        </p:spPr>
+        <p:txBody>
+          <a:bodyPr wrap="square" rtlCol="0" anchor="ctr"/>
+          <a:lstStyle/>
+          <a:p>
+            <a:pPr marL="0" indent="0" algn="ctr">
               <a:buNone/>
             </a:pPr>
             <a:r>
@@ -1868,9 +3052,9 @@
                 <a:solidFill>
                   <a:srgbClr val="7B1FA2"/>
                 </a:solidFill>
-                <a:latin typeface="Microsoft YaHei" pitchFamily="34" charset="0"/>
-                <a:ea typeface="Microsoft YaHei" pitchFamily="34" charset="-122"/>
-                <a:cs typeface="Microsoft YaHei" pitchFamily="34" charset="-120"/>
+                <a:latin typeface="微软雅黑" pitchFamily="34" charset="0"/>
+                <a:ea typeface="微软雅黑" pitchFamily="34" charset="-122"/>
+                <a:cs typeface="微软雅黑" pitchFamily="34" charset="-120"/>
               </a:rPr>
               <a:t>外部 API</a:t>
             </a:r>
@@ -1920,13 +3104,12 @@
             <a:avLst/>
           </a:prstGeom>
           <a:noFill/>
-          <a:ln/>
         </p:spPr>
         <p:txBody>
           <a:bodyPr wrap="square" rtlCol="0" anchor="t"/>
           <a:lstStyle/>
           <a:p>
-            <a:pPr algn="l" indent="0" marL="0">
+            <a:pPr marL="0" indent="0" algn="l">
               <a:buNone/>
             </a:pPr>
             <a:r>
@@ -1934,9 +3117,9 @@
                 <a:solidFill>
                   <a:srgbClr val="3949AB"/>
                 </a:solidFill>
-                <a:latin typeface="Microsoft YaHei" pitchFamily="34" charset="0"/>
-                <a:ea typeface="Microsoft YaHei" pitchFamily="34" charset="-122"/>
-                <a:cs typeface="Microsoft YaHei" pitchFamily="34" charset="-120"/>
+                <a:latin typeface="微软雅黑" pitchFamily="34" charset="0"/>
+                <a:ea typeface="微软雅黑" pitchFamily="34" charset="-122"/>
+                <a:cs typeface="微软雅黑" pitchFamily="34" charset="-120"/>
               </a:rPr>
               <a:t>接入层</a:t>
             </a:r>
@@ -1986,13 +3169,12 @@
             <a:avLst/>
           </a:prstGeom>
           <a:noFill/>
-          <a:ln/>
-        </p:spPr>
-        <p:txBody>
-          <a:bodyPr wrap="square" rtlCol="0" anchor="ctr"/>
-          <a:lstStyle/>
-          <a:p>
-            <a:pPr algn="ctr" indent="0" marL="0">
+        </p:spPr>
+        <p:txBody>
+          <a:bodyPr wrap="square" rtlCol="0" anchor="ctr"/>
+          <a:lstStyle/>
+          <a:p>
+            <a:pPr marL="0" indent="0" algn="ctr">
               <a:buNone/>
             </a:pPr>
             <a:r>
@@ -2000,9 +3182,9 @@
                 <a:solidFill>
                   <a:srgbClr val="3949AB"/>
                 </a:solidFill>
-                <a:latin typeface="Microsoft YaHei" pitchFamily="34" charset="0"/>
-                <a:ea typeface="Microsoft YaHei" pitchFamily="34" charset="-122"/>
-                <a:cs typeface="Microsoft YaHei" pitchFamily="34" charset="-120"/>
+                <a:latin typeface="微软雅黑" pitchFamily="34" charset="0"/>
+                <a:ea typeface="微软雅黑" pitchFamily="34" charset="-122"/>
+                <a:cs typeface="微软雅黑" pitchFamily="34" charset="-120"/>
               </a:rPr>
               <a:t>Kafka 消息总线</a:t>
             </a:r>
@@ -2052,13 +3234,12 @@
             <a:avLst/>
           </a:prstGeom>
           <a:noFill/>
-          <a:ln/>
-        </p:spPr>
-        <p:txBody>
-          <a:bodyPr wrap="square" rtlCol="0" anchor="ctr"/>
-          <a:lstStyle/>
-          <a:p>
-            <a:pPr algn="ctr" indent="0" marL="0">
+        </p:spPr>
+        <p:txBody>
+          <a:bodyPr wrap="square" rtlCol="0" anchor="ctr"/>
+          <a:lstStyle/>
+          <a:p>
+            <a:pPr marL="0" indent="0" algn="ctr">
               <a:buNone/>
             </a:pPr>
             <a:r>
@@ -2066,9 +3247,9 @@
                 <a:solidFill>
                   <a:srgbClr val="3949AB"/>
                 </a:solidFill>
-                <a:latin typeface="Microsoft YaHei" pitchFamily="34" charset="0"/>
-                <a:ea typeface="Microsoft YaHei" pitchFamily="34" charset="-122"/>
-                <a:cs typeface="Microsoft YaHei" pitchFamily="34" charset="-120"/>
+                <a:latin typeface="微软雅黑" pitchFamily="34" charset="0"/>
+                <a:ea typeface="微软雅黑" pitchFamily="34" charset="-122"/>
+                <a:cs typeface="微软雅黑" pitchFamily="34" charset="-120"/>
               </a:rPr>
               <a:t>Flink CDC 变更捕获</a:t>
             </a:r>
@@ -2118,13 +3299,12 @@
             <a:avLst/>
           </a:prstGeom>
           <a:noFill/>
-          <a:ln/>
-        </p:spPr>
-        <p:txBody>
-          <a:bodyPr wrap="square" rtlCol="0" anchor="ctr"/>
-          <a:lstStyle/>
-          <a:p>
-            <a:pPr algn="ctr" indent="0" marL="0">
+        </p:spPr>
+        <p:txBody>
+          <a:bodyPr wrap="square" rtlCol="0" anchor="ctr"/>
+          <a:lstStyle/>
+          <a:p>
+            <a:pPr marL="0" indent="0" algn="ctr">
               <a:buNone/>
             </a:pPr>
             <a:r>
@@ -2132,9 +3312,9 @@
                 <a:solidFill>
                   <a:srgbClr val="3949AB"/>
                 </a:solidFill>
-                <a:latin typeface="Microsoft YaHei" pitchFamily="34" charset="0"/>
-                <a:ea typeface="Microsoft YaHei" pitchFamily="34" charset="-122"/>
-                <a:cs typeface="Microsoft YaHei" pitchFamily="34" charset="-120"/>
+                <a:latin typeface="微软雅黑" pitchFamily="34" charset="0"/>
+                <a:ea typeface="微软雅黑" pitchFamily="34" charset="-122"/>
+                <a:cs typeface="微软雅黑" pitchFamily="34" charset="-120"/>
               </a:rPr>
               <a:t>Filebeat 日志采集</a:t>
             </a:r>
@@ -2184,13 +3364,12 @@
             <a:avLst/>
           </a:prstGeom>
           <a:noFill/>
-          <a:ln/>
-        </p:spPr>
-        <p:txBody>
-          <a:bodyPr wrap="square" rtlCol="0" anchor="ctr"/>
-          <a:lstStyle/>
-          <a:p>
-            <a:pPr algn="ctr" indent="0" marL="0">
+        </p:spPr>
+        <p:txBody>
+          <a:bodyPr wrap="square" rtlCol="0" anchor="ctr"/>
+          <a:lstStyle/>
+          <a:p>
+            <a:pPr marL="0" indent="0" algn="ctr">
               <a:buNone/>
             </a:pPr>
             <a:r>
@@ -2198,9 +3377,9 @@
                 <a:solidFill>
                   <a:srgbClr val="3949AB"/>
                 </a:solidFill>
-                <a:latin typeface="Microsoft YaHei" pitchFamily="34" charset="0"/>
-                <a:ea typeface="Microsoft YaHei" pitchFamily="34" charset="-122"/>
-                <a:cs typeface="Microsoft YaHei" pitchFamily="34" charset="-120"/>
+                <a:latin typeface="微软雅黑" pitchFamily="34" charset="0"/>
+                <a:ea typeface="微软雅黑" pitchFamily="34" charset="-122"/>
+                <a:cs typeface="微软雅黑" pitchFamily="34" charset="-120"/>
               </a:rPr>
               <a:t>文件接入网关</a:t>
             </a:r>
@@ -2250,13 +3429,12 @@
             <a:avLst/>
           </a:prstGeom>
           <a:noFill/>
-          <a:ln/>
         </p:spPr>
         <p:txBody>
           <a:bodyPr wrap="square" rtlCol="0" anchor="t"/>
           <a:lstStyle/>
           <a:p>
-            <a:pPr algn="l" indent="0" marL="0">
+            <a:pPr marL="0" indent="0" algn="l">
               <a:buNone/>
             </a:pPr>
             <a:r>
@@ -2264,9 +3442,9 @@
                 <a:solidFill>
                   <a:srgbClr val="1B5E20"/>
                 </a:solidFill>
-                <a:latin typeface="Microsoft YaHei" pitchFamily="34" charset="0"/>
-                <a:ea typeface="Microsoft YaHei" pitchFamily="34" charset="-122"/>
-                <a:cs typeface="Microsoft YaHei" pitchFamily="34" charset="-120"/>
+                <a:latin typeface="微软雅黑" pitchFamily="34" charset="0"/>
+                <a:ea typeface="微软雅黑" pitchFamily="34" charset="-122"/>
+                <a:cs typeface="微软雅黑" pitchFamily="34" charset="-120"/>
               </a:rPr>
               <a:t>存储层 ★ 存算分离核心</a:t>
             </a:r>
@@ -2316,13 +3494,12 @@
             <a:avLst/>
           </a:prstGeom>
           <a:noFill/>
-          <a:ln/>
-        </p:spPr>
-        <p:txBody>
-          <a:bodyPr wrap="square" rtlCol="0" anchor="ctr"/>
-          <a:lstStyle/>
-          <a:p>
-            <a:pPr algn="ctr" indent="0" marL="0">
+        </p:spPr>
+        <p:txBody>
+          <a:bodyPr wrap="square" rtlCol="0" anchor="ctr"/>
+          <a:lstStyle/>
+          <a:p>
+            <a:pPr marL="0" indent="0" algn="ctr">
               <a:buNone/>
             </a:pPr>
             <a:r>
@@ -2330,9 +3507,9 @@
                 <a:solidFill>
                   <a:srgbClr val="1B5E20"/>
                 </a:solidFill>
-                <a:latin typeface="Microsoft YaHei" pitchFamily="34" charset="0"/>
-                <a:ea typeface="Microsoft YaHei" pitchFamily="34" charset="-122"/>
-                <a:cs typeface="Microsoft YaHei" pitchFamily="34" charset="-120"/>
+                <a:latin typeface="微软雅黑" pitchFamily="34" charset="0"/>
+                <a:ea typeface="微软雅黑" pitchFamily="34" charset="-122"/>
+                <a:cs typeface="微软雅黑" pitchFamily="34" charset="-120"/>
               </a:rPr>
               <a:t>S3 / MinIO 对象存储底座</a:t>
             </a:r>
@@ -2382,13 +3559,12 @@
             <a:avLst/>
           </a:prstGeom>
           <a:noFill/>
-          <a:ln/>
-        </p:spPr>
-        <p:txBody>
-          <a:bodyPr wrap="square" rtlCol="0" anchor="ctr"/>
-          <a:lstStyle/>
-          <a:p>
-            <a:pPr algn="ctr" indent="0" marL="0">
+        </p:spPr>
+        <p:txBody>
+          <a:bodyPr wrap="square" rtlCol="0" anchor="ctr"/>
+          <a:lstStyle/>
+          <a:p>
+            <a:pPr marL="0" indent="0" algn="ctr">
               <a:buNone/>
             </a:pPr>
             <a:r>
@@ -2396,9 +3572,9 @@
                 <a:solidFill>
                   <a:srgbClr val="1B5E20"/>
                 </a:solidFill>
-                <a:latin typeface="Microsoft YaHei" pitchFamily="34" charset="0"/>
-                <a:ea typeface="Microsoft YaHei" pitchFamily="34" charset="-122"/>
-                <a:cs typeface="Microsoft YaHei" pitchFamily="34" charset="-120"/>
+                <a:latin typeface="微软雅黑" pitchFamily="34" charset="0"/>
+                <a:ea typeface="微软雅黑" pitchFamily="34" charset="-122"/>
+                <a:cs typeface="微软雅黑" pitchFamily="34" charset="-120"/>
               </a:rPr>
               <a:t>Hive Metastore 表元数据</a:t>
             </a:r>
@@ -2448,13 +3624,12 @@
             <a:avLst/>
           </a:prstGeom>
           <a:noFill/>
-          <a:ln/>
-        </p:spPr>
-        <p:txBody>
-          <a:bodyPr wrap="square" rtlCol="0" anchor="ctr"/>
-          <a:lstStyle/>
-          <a:p>
-            <a:pPr algn="ctr" indent="0" marL="0">
+        </p:spPr>
+        <p:txBody>
+          <a:bodyPr wrap="square" rtlCol="0" anchor="ctr"/>
+          <a:lstStyle/>
+          <a:p>
+            <a:pPr marL="0" indent="0" algn="ctr">
               <a:buNone/>
             </a:pPr>
             <a:r>
@@ -2462,9 +3637,9 @@
                 <a:solidFill>
                   <a:srgbClr val="1B5E20"/>
                 </a:solidFill>
-                <a:latin typeface="Microsoft YaHei" pitchFamily="34" charset="0"/>
-                <a:ea typeface="Microsoft YaHei" pitchFamily="34" charset="-122"/>
-                <a:cs typeface="Microsoft YaHei" pitchFamily="34" charset="-120"/>
+                <a:latin typeface="微软雅黑" pitchFamily="34" charset="0"/>
+                <a:ea typeface="微软雅黑" pitchFamily="34" charset="-122"/>
+                <a:cs typeface="微软雅黑" pitchFamily="34" charset="-120"/>
               </a:rPr>
               <a:t>Hive 业务表 Parquet/ORC</a:t>
             </a:r>
@@ -2514,13 +3689,12 @@
             <a:avLst/>
           </a:prstGeom>
           <a:noFill/>
-          <a:ln/>
-        </p:spPr>
-        <p:txBody>
-          <a:bodyPr wrap="square" rtlCol="0" anchor="ctr"/>
-          <a:lstStyle/>
-          <a:p>
-            <a:pPr algn="ctr" indent="0" marL="0">
+        </p:spPr>
+        <p:txBody>
+          <a:bodyPr wrap="square" rtlCol="0" anchor="ctr"/>
+          <a:lstStyle/>
+          <a:p>
+            <a:pPr marL="0" indent="0" algn="ctr">
               <a:buNone/>
             </a:pPr>
             <a:r>
@@ -2528,9 +3702,9 @@
                 <a:solidFill>
                   <a:srgbClr val="1B5E20"/>
                 </a:solidFill>
-                <a:latin typeface="Microsoft YaHei" pitchFamily="34" charset="0"/>
-                <a:ea typeface="Microsoft YaHei" pitchFamily="34" charset="-122"/>
-                <a:cs typeface="Microsoft YaHei" pitchFamily="34" charset="-120"/>
+                <a:latin typeface="微软雅黑" pitchFamily="34" charset="0"/>
+                <a:ea typeface="微软雅黑" pitchFamily="34" charset="-122"/>
+                <a:cs typeface="微软雅黑" pitchFamily="34" charset="-120"/>
               </a:rPr>
               <a:t>Hive IoT 时序分区表</a:t>
             </a:r>
@@ -2580,13 +3754,12 @@
             <a:avLst/>
           </a:prstGeom>
           <a:noFill/>
-          <a:ln/>
-        </p:spPr>
-        <p:txBody>
-          <a:bodyPr wrap="square" rtlCol="0" anchor="ctr"/>
-          <a:lstStyle/>
-          <a:p>
-            <a:pPr algn="ctr" indent="0" marL="0">
+        </p:spPr>
+        <p:txBody>
+          <a:bodyPr wrap="square" rtlCol="0" anchor="ctr"/>
+          <a:lstStyle/>
+          <a:p>
+            <a:pPr marL="0" indent="0" algn="ctr">
               <a:buNone/>
             </a:pPr>
             <a:r>
@@ -2594,9 +3767,9 @@
                 <a:solidFill>
                   <a:srgbClr val="1B5E20"/>
                 </a:solidFill>
-                <a:latin typeface="Microsoft YaHei" pitchFamily="34" charset="0"/>
-                <a:ea typeface="Microsoft YaHei" pitchFamily="34" charset="-122"/>
-                <a:cs typeface="Microsoft YaHei" pitchFamily="34" charset="-120"/>
+                <a:latin typeface="微软雅黑" pitchFamily="34" charset="0"/>
+                <a:ea typeface="微软雅黑" pitchFamily="34" charset="-122"/>
+                <a:cs typeface="微软雅黑" pitchFamily="34" charset="-120"/>
               </a:rPr>
               <a:t>Hive 遥感分块影像表</a:t>
             </a:r>
@@ -2646,13 +3819,12 @@
             <a:avLst/>
           </a:prstGeom>
           <a:noFill/>
-          <a:ln/>
-        </p:spPr>
-        <p:txBody>
-          <a:bodyPr wrap="square" rtlCol="0" anchor="ctr"/>
-          <a:lstStyle/>
-          <a:p>
-            <a:pPr algn="ctr" indent="0" marL="0">
+        </p:spPr>
+        <p:txBody>
+          <a:bodyPr wrap="square" rtlCol="0" anchor="ctr"/>
+          <a:lstStyle/>
+          <a:p>
+            <a:pPr marL="0" indent="0" algn="ctr">
               <a:buNone/>
             </a:pPr>
             <a:r>
@@ -2660,9 +3832,9 @@
                 <a:solidFill>
                   <a:srgbClr val="1B5E20"/>
                 </a:solidFill>
-                <a:latin typeface="Microsoft YaHei" pitchFamily="34" charset="0"/>
-                <a:ea typeface="Microsoft YaHei" pitchFamily="34" charset="-122"/>
-                <a:cs typeface="Microsoft YaHei" pitchFamily="34" charset="-120"/>
+                <a:latin typeface="微软雅黑" pitchFamily="34" charset="0"/>
+                <a:ea typeface="微软雅黑" pitchFamily="34" charset="-122"/>
+                <a:cs typeface="微软雅黑" pitchFamily="34" charset="-120"/>
               </a:rPr>
               <a:t>原始文件区 tiff/nc 保底</a:t>
             </a:r>
@@ -2712,13 +3884,12 @@
             <a:avLst/>
           </a:prstGeom>
           <a:noFill/>
-          <a:ln/>
         </p:spPr>
         <p:txBody>
           <a:bodyPr wrap="square" rtlCol="0" anchor="t"/>
           <a:lstStyle/>
           <a:p>
-            <a:pPr algn="l" indent="0" marL="0">
+            <a:pPr marL="0" indent="0" algn="l">
               <a:buNone/>
             </a:pPr>
             <a:r>
@@ -2726,9 +3897,9 @@
                 <a:solidFill>
                   <a:srgbClr val="BF360C"/>
                 </a:solidFill>
-                <a:latin typeface="Microsoft YaHei" pitchFamily="34" charset="0"/>
-                <a:ea typeface="Microsoft YaHei" pitchFamily="34" charset="-122"/>
-                <a:cs typeface="Microsoft YaHei" pitchFamily="34" charset="-120"/>
+                <a:latin typeface="微软雅黑" pitchFamily="34" charset="0"/>
+                <a:ea typeface="微软雅黑" pitchFamily="34" charset="-122"/>
+                <a:cs typeface="微软雅黑" pitchFamily="34" charset="-120"/>
               </a:rPr>
               <a:t>计算层 K8s</a:t>
             </a:r>
@@ -2778,13 +3949,12 @@
             <a:avLst/>
           </a:prstGeom>
           <a:noFill/>
-          <a:ln/>
-        </p:spPr>
-        <p:txBody>
-          <a:bodyPr wrap="square" rtlCol="0" anchor="ctr"/>
-          <a:lstStyle/>
-          <a:p>
-            <a:pPr algn="ctr" indent="0" marL="0">
+        </p:spPr>
+        <p:txBody>
+          <a:bodyPr wrap="square" rtlCol="0" anchor="ctr"/>
+          <a:lstStyle/>
+          <a:p>
+            <a:pPr marL="0" indent="0" algn="ctr">
               <a:buNone/>
             </a:pPr>
             <a:r>
@@ -2792,9 +3962,9 @@
                 <a:solidFill>
                   <a:srgbClr val="BF360C"/>
                 </a:solidFill>
-                <a:latin typeface="Microsoft YaHei" pitchFamily="34" charset="0"/>
-                <a:ea typeface="Microsoft YaHei" pitchFamily="34" charset="-122"/>
-                <a:cs typeface="Microsoft YaHei" pitchFamily="34" charset="-120"/>
+                <a:latin typeface="微软雅黑" pitchFamily="34" charset="0"/>
+                <a:ea typeface="微软雅黑" pitchFamily="34" charset="-122"/>
+                <a:cs typeface="微软雅黑" pitchFamily="34" charset="-120"/>
               </a:rPr>
               <a:t>Flink on K8s 实时流处理</a:t>
             </a:r>
@@ -2844,13 +4014,12 @@
             <a:avLst/>
           </a:prstGeom>
           <a:noFill/>
-          <a:ln/>
-        </p:spPr>
-        <p:txBody>
-          <a:bodyPr wrap="square" rtlCol="0" anchor="ctr"/>
-          <a:lstStyle/>
-          <a:p>
-            <a:pPr algn="ctr" indent="0" marL="0">
+        </p:spPr>
+        <p:txBody>
+          <a:bodyPr wrap="square" rtlCol="0" anchor="ctr"/>
+          <a:lstStyle/>
+          <a:p>
+            <a:pPr marL="0" indent="0" algn="ctr">
               <a:buNone/>
             </a:pPr>
             <a:r>
@@ -2858,9 +4027,9 @@
                 <a:solidFill>
                   <a:srgbClr val="BF360C"/>
                 </a:solidFill>
-                <a:latin typeface="Microsoft YaHei" pitchFamily="34" charset="0"/>
-                <a:ea typeface="Microsoft YaHei" pitchFamily="34" charset="-122"/>
-                <a:cs typeface="Microsoft YaHei" pitchFamily="34" charset="-120"/>
+                <a:latin typeface="微软雅黑" pitchFamily="34" charset="0"/>
+                <a:ea typeface="微软雅黑" pitchFamily="34" charset="-122"/>
+                <a:cs typeface="微软雅黑" pitchFamily="34" charset="-120"/>
               </a:rPr>
               <a:t>Spark on K8s 批量处理</a:t>
             </a:r>
@@ -2910,13 +4079,12 @@
             <a:avLst/>
           </a:prstGeom>
           <a:noFill/>
-          <a:ln/>
         </p:spPr>
         <p:txBody>
           <a:bodyPr wrap="square" rtlCol="0" anchor="t"/>
           <a:lstStyle/>
           <a:p>
-            <a:pPr algn="l" indent="0" marL="0">
+            <a:pPr marL="0" indent="0" algn="l">
               <a:buNone/>
             </a:pPr>
             <a:r>
@@ -2924,9 +4092,9 @@
                 <a:solidFill>
                   <a:srgbClr val="0D47A1"/>
                 </a:solidFill>
-                <a:latin typeface="Microsoft YaHei" pitchFamily="34" charset="0"/>
-                <a:ea typeface="Microsoft YaHei" pitchFamily="34" charset="-122"/>
-                <a:cs typeface="Microsoft YaHei" pitchFamily="34" charset="-120"/>
+                <a:latin typeface="微软雅黑" pitchFamily="34" charset="0"/>
+                <a:ea typeface="微软雅黑" pitchFamily="34" charset="-122"/>
+                <a:cs typeface="微软雅黑" pitchFamily="34" charset="-120"/>
               </a:rPr>
               <a:t>服务层</a:t>
             </a:r>
@@ -2976,13 +4144,12 @@
             <a:avLst/>
           </a:prstGeom>
           <a:noFill/>
-          <a:ln/>
-        </p:spPr>
-        <p:txBody>
-          <a:bodyPr wrap="square" rtlCol="0" anchor="ctr"/>
-          <a:lstStyle/>
-          <a:p>
-            <a:pPr algn="ctr" indent="0" marL="0">
+        </p:spPr>
+        <p:txBody>
+          <a:bodyPr wrap="square" rtlCol="0" anchor="ctr"/>
+          <a:lstStyle/>
+          <a:p>
+            <a:pPr marL="0" indent="0" algn="ctr">
               <a:buNone/>
             </a:pPr>
             <a:r>
@@ -2990,9 +4157,9 @@
                 <a:solidFill>
                   <a:srgbClr val="0D47A1"/>
                 </a:solidFill>
-                <a:latin typeface="Microsoft YaHei" pitchFamily="34" charset="0"/>
-                <a:ea typeface="Microsoft YaHei" pitchFamily="34" charset="-122"/>
-                <a:cs typeface="Microsoft YaHei" pitchFamily="34" charset="-120"/>
+                <a:latin typeface="微软雅黑" pitchFamily="34" charset="0"/>
+                <a:ea typeface="微软雅黑" pitchFamily="34" charset="-122"/>
+                <a:cs typeface="微软雅黑" pitchFamily="34" charset="-120"/>
               </a:rPr>
               <a:t>StarRocks/Doris OLAP</a:t>
             </a:r>
@@ -3042,13 +4209,12 @@
             <a:avLst/>
           </a:prstGeom>
           <a:noFill/>
-          <a:ln/>
-        </p:spPr>
-        <p:txBody>
-          <a:bodyPr wrap="square" rtlCol="0" anchor="ctr"/>
-          <a:lstStyle/>
-          <a:p>
-            <a:pPr algn="ctr" indent="0" marL="0">
+        </p:spPr>
+        <p:txBody>
+          <a:bodyPr wrap="square" rtlCol="0" anchor="ctr"/>
+          <a:lstStyle/>
+          <a:p>
+            <a:pPr marL="0" indent="0" algn="ctr">
               <a:buNone/>
             </a:pPr>
             <a:r>
@@ -3056,9 +4222,9 @@
                 <a:solidFill>
                   <a:srgbClr val="0D47A1"/>
                 </a:solidFill>
-                <a:latin typeface="Microsoft YaHei" pitchFamily="34" charset="0"/>
-                <a:ea typeface="Microsoft YaHei" pitchFamily="34" charset="-122"/>
-                <a:cs typeface="Microsoft YaHei" pitchFamily="34" charset="-120"/>
+                <a:latin typeface="微软雅黑" pitchFamily="34" charset="0"/>
+                <a:ea typeface="微软雅黑" pitchFamily="34" charset="-122"/>
+                <a:cs typeface="微软雅黑" pitchFamily="34" charset="-120"/>
               </a:rPr>
               <a:t>Presto/Trino 联邦查询</a:t>
             </a:r>
@@ -3108,13 +4274,12 @@
             <a:avLst/>
           </a:prstGeom>
           <a:noFill/>
-          <a:ln/>
-        </p:spPr>
-        <p:txBody>
-          <a:bodyPr wrap="square" rtlCol="0" anchor="ctr"/>
-          <a:lstStyle/>
-          <a:p>
-            <a:pPr algn="ctr" indent="0" marL="0">
+        </p:spPr>
+        <p:txBody>
+          <a:bodyPr wrap="square" rtlCol="0" anchor="ctr"/>
+          <a:lstStyle/>
+          <a:p>
+            <a:pPr marL="0" indent="0" algn="ctr">
               <a:buNone/>
             </a:pPr>
             <a:r>
@@ -3122,9 +4287,9 @@
                 <a:solidFill>
                   <a:srgbClr val="0D47A1"/>
                 </a:solidFill>
-                <a:latin typeface="Microsoft YaHei" pitchFamily="34" charset="0"/>
-                <a:ea typeface="Microsoft YaHei" pitchFamily="34" charset="-122"/>
-                <a:cs typeface="Microsoft YaHei" pitchFamily="34" charset="-120"/>
+                <a:latin typeface="微软雅黑" pitchFamily="34" charset="0"/>
+                <a:ea typeface="微软雅黑" pitchFamily="34" charset="-122"/>
+                <a:cs typeface="微软雅黑" pitchFamily="34" charset="-120"/>
               </a:rPr>
               <a:t>Superset/Grafana BI 看板</a:t>
             </a:r>
@@ -3174,13 +4339,12 @@
             <a:avLst/>
           </a:prstGeom>
           <a:noFill/>
-          <a:ln/>
         </p:spPr>
         <p:txBody>
           <a:bodyPr wrap="square" rtlCol="0" anchor="t"/>
           <a:lstStyle/>
           <a:p>
-            <a:pPr algn="l" indent="0" marL="0">
+            <a:pPr marL="0" indent="0" algn="l">
               <a:buNone/>
             </a:pPr>
             <a:r>
@@ -3188,9 +4352,9 @@
                 <a:solidFill>
                   <a:srgbClr val="B71C1C"/>
                 </a:solidFill>
-                <a:latin typeface="Microsoft YaHei" pitchFamily="34" charset="0"/>
-                <a:ea typeface="Microsoft YaHei" pitchFamily="34" charset="-122"/>
-                <a:cs typeface="Microsoft YaHei" pitchFamily="34" charset="-120"/>
+                <a:latin typeface="微软雅黑" pitchFamily="34" charset="0"/>
+                <a:ea typeface="微软雅黑" pitchFamily="34" charset="-122"/>
+                <a:cs typeface="微软雅黑" pitchFamily="34" charset="-120"/>
               </a:rPr>
               <a:t>AI 训练数据桥</a:t>
             </a:r>
@@ -3240,13 +4404,12 @@
             <a:avLst/>
           </a:prstGeom>
           <a:noFill/>
-          <a:ln/>
-        </p:spPr>
-        <p:txBody>
-          <a:bodyPr wrap="square" rtlCol="0" anchor="ctr"/>
-          <a:lstStyle/>
-          <a:p>
-            <a:pPr algn="ctr" indent="0" marL="0">
+        </p:spPr>
+        <p:txBody>
+          <a:bodyPr wrap="square" rtlCol="0" anchor="ctr"/>
+          <a:lstStyle/>
+          <a:p>
+            <a:pPr marL="0" indent="0" algn="ctr">
               <a:buNone/>
             </a:pPr>
             <a:r>
@@ -3254,9 +4417,9 @@
                 <a:solidFill>
                   <a:srgbClr val="B71C1C"/>
                 </a:solidFill>
-                <a:latin typeface="Microsoft YaHei" pitchFamily="34" charset="0"/>
-                <a:ea typeface="Microsoft YaHei" pitchFamily="34" charset="-122"/>
-                <a:cs typeface="Microsoft YaHei" pitchFamily="34" charset="-120"/>
+                <a:latin typeface="微软雅黑" pitchFamily="34" charset="0"/>
+                <a:ea typeface="微软雅黑" pitchFamily="34" charset="-122"/>
+                <a:cs typeface="微软雅黑" pitchFamily="34" charset="-120"/>
               </a:rPr>
               <a:t>Feature Store Feast</a:t>
             </a:r>
@@ -3306,13 +4469,12 @@
             <a:avLst/>
           </a:prstGeom>
           <a:noFill/>
-          <a:ln/>
-        </p:spPr>
-        <p:txBody>
-          <a:bodyPr wrap="square" rtlCol="0" anchor="ctr"/>
-          <a:lstStyle/>
-          <a:p>
-            <a:pPr algn="ctr" indent="0" marL="0">
+        </p:spPr>
+        <p:txBody>
+          <a:bodyPr wrap="square" rtlCol="0" anchor="ctr"/>
+          <a:lstStyle/>
+          <a:p>
+            <a:pPr marL="0" indent="0" algn="ctr">
               <a:buNone/>
             </a:pPr>
             <a:r>
@@ -3320,9 +4482,9 @@
                 <a:solidFill>
                   <a:srgbClr val="B71C1C"/>
                 </a:solidFill>
-                <a:latin typeface="Microsoft YaHei" pitchFamily="34" charset="0"/>
-                <a:ea typeface="Microsoft YaHei" pitchFamily="34" charset="-122"/>
-                <a:cs typeface="Microsoft YaHei" pitchFamily="34" charset="-120"/>
+                <a:latin typeface="微软雅黑" pitchFamily="34" charset="0"/>
+                <a:ea typeface="微软雅黑" pitchFamily="34" charset="-122"/>
+                <a:cs typeface="微软雅黑" pitchFamily="34" charset="-120"/>
               </a:rPr>
               <a:t>Spark 训练数据集构造器</a:t>
             </a:r>
@@ -3372,13 +4534,12 @@
             <a:avLst/>
           </a:prstGeom>
           <a:noFill/>
-          <a:ln/>
-        </p:spPr>
-        <p:txBody>
-          <a:bodyPr wrap="square" rtlCol="0" anchor="ctr"/>
-          <a:lstStyle/>
-          <a:p>
-            <a:pPr algn="ctr" indent="0" marL="0">
+        </p:spPr>
+        <p:txBody>
+          <a:bodyPr wrap="square" rtlCol="0" anchor="ctr"/>
+          <a:lstStyle/>
+          <a:p>
+            <a:pPr marL="0" indent="0" algn="ctr">
               <a:buNone/>
             </a:pPr>
             <a:r>
@@ -3386,9 +4547,9 @@
                 <a:solidFill>
                   <a:srgbClr val="B71C1C"/>
                 </a:solidFill>
-                <a:latin typeface="Microsoft YaHei" pitchFamily="34" charset="0"/>
-                <a:ea typeface="Microsoft YaHei" pitchFamily="34" charset="-122"/>
-                <a:cs typeface="Microsoft YaHei" pitchFamily="34" charset="-120"/>
+                <a:latin typeface="微软雅黑" pitchFamily="34" charset="0"/>
+                <a:ea typeface="微软雅黑" pitchFamily="34" charset="-122"/>
+                <a:cs typeface="微软雅黑" pitchFamily="34" charset="-120"/>
               </a:rPr>
               <a:t>S3 训练数据区</a:t>
             </a:r>
@@ -3438,13 +4599,12 @@
             <a:avLst/>
           </a:prstGeom>
           <a:noFill/>
-          <a:ln/>
-        </p:spPr>
-        <p:txBody>
-          <a:bodyPr wrap="square" rtlCol="0" anchor="ctr"/>
-          <a:lstStyle/>
-          <a:p>
-            <a:pPr algn="ctr" indent="0" marL="0">
+        </p:spPr>
+        <p:txBody>
+          <a:bodyPr wrap="square" rtlCol="0" anchor="ctr"/>
+          <a:lstStyle/>
+          <a:p>
+            <a:pPr marL="0" indent="0" algn="ctr">
               <a:buNone/>
             </a:pPr>
             <a:r>
@@ -3452,9 +4612,9 @@
                 <a:solidFill>
                   <a:srgbClr val="B71C1C"/>
                 </a:solidFill>
-                <a:latin typeface="Microsoft YaHei" pitchFamily="34" charset="0"/>
-                <a:ea typeface="Microsoft YaHei" pitchFamily="34" charset="-122"/>
-                <a:cs typeface="Microsoft YaHei" pitchFamily="34" charset="-120"/>
+                <a:latin typeface="微软雅黑" pitchFamily="34" charset="0"/>
+                <a:ea typeface="微软雅黑" pitchFamily="34" charset="-122"/>
+                <a:cs typeface="微软雅黑" pitchFamily="34" charset="-120"/>
               </a:rPr>
               <a:t>Alluxio 预热 → GPU 集群</a:t>
             </a:r>
@@ -3504,13 +4664,12 @@
             <a:avLst/>
           </a:prstGeom>
           <a:noFill/>
-          <a:ln/>
         </p:spPr>
         <p:txBody>
           <a:bodyPr wrap="square" rtlCol="0" anchor="t"/>
           <a:lstStyle/>
           <a:p>
-            <a:pPr algn="l" indent="0" marL="0">
+            <a:pPr marL="0" indent="0" algn="l">
               <a:buNone/>
             </a:pPr>
             <a:r>
@@ -3518,9 +4677,9 @@
                 <a:solidFill>
                   <a:srgbClr val="37474F"/>
                 </a:solidFill>
-                <a:latin typeface="Microsoft YaHei" pitchFamily="34" charset="0"/>
-                <a:ea typeface="Microsoft YaHei" pitchFamily="34" charset="-122"/>
-                <a:cs typeface="Microsoft YaHei" pitchFamily="34" charset="-120"/>
+                <a:latin typeface="微软雅黑" pitchFamily="34" charset="0"/>
+                <a:ea typeface="微软雅黑" pitchFamily="34" charset="-122"/>
+                <a:cs typeface="微软雅黑" pitchFamily="34" charset="-120"/>
               </a:rPr>
               <a:t>治理与平台</a:t>
             </a:r>
@@ -3570,13 +4729,12 @@
             <a:avLst/>
           </a:prstGeom>
           <a:noFill/>
-          <a:ln/>
-        </p:spPr>
-        <p:txBody>
-          <a:bodyPr wrap="square" rtlCol="0" anchor="ctr"/>
-          <a:lstStyle/>
-          <a:p>
-            <a:pPr algn="ctr" indent="0" marL="0">
+        </p:spPr>
+        <p:txBody>
+          <a:bodyPr wrap="square" rtlCol="0" anchor="ctr"/>
+          <a:lstStyle/>
+          <a:p>
+            <a:pPr marL="0" indent="0" algn="ctr">
               <a:buNone/>
             </a:pPr>
             <a:r>
@@ -3584,9 +4742,9 @@
                 <a:solidFill>
                   <a:srgbClr val="37474F"/>
                 </a:solidFill>
-                <a:latin typeface="Microsoft YaHei" pitchFamily="34" charset="0"/>
-                <a:ea typeface="Microsoft YaHei" pitchFamily="34" charset="-122"/>
-                <a:cs typeface="Microsoft YaHei" pitchFamily="34" charset="-120"/>
+                <a:latin typeface="微软雅黑" pitchFamily="34" charset="0"/>
+                <a:ea typeface="微软雅黑" pitchFamily="34" charset="-122"/>
+                <a:cs typeface="微软雅黑" pitchFamily="34" charset="-120"/>
               </a:rPr>
               <a:t>Airflow 任务调度</a:t>
             </a:r>
@@ -3636,13 +4794,12 @@
             <a:avLst/>
           </a:prstGeom>
           <a:noFill/>
-          <a:ln/>
-        </p:spPr>
-        <p:txBody>
-          <a:bodyPr wrap="square" rtlCol="0" anchor="ctr"/>
-          <a:lstStyle/>
-          <a:p>
-            <a:pPr algn="ctr" indent="0" marL="0">
+        </p:spPr>
+        <p:txBody>
+          <a:bodyPr wrap="square" rtlCol="0" anchor="ctr"/>
+          <a:lstStyle/>
+          <a:p>
+            <a:pPr marL="0" indent="0" algn="ctr">
               <a:buNone/>
             </a:pPr>
             <a:r>
@@ -3650,9 +4807,9 @@
                 <a:solidFill>
                   <a:srgbClr val="37474F"/>
                 </a:solidFill>
-                <a:latin typeface="Microsoft YaHei" pitchFamily="34" charset="0"/>
-                <a:ea typeface="Microsoft YaHei" pitchFamily="34" charset="-122"/>
-                <a:cs typeface="Microsoft YaHei" pitchFamily="34" charset="-120"/>
+                <a:latin typeface="微软雅黑" pitchFamily="34" charset="0"/>
+                <a:ea typeface="微软雅黑" pitchFamily="34" charset="-122"/>
+                <a:cs typeface="微软雅黑" pitchFamily="34" charset="-120"/>
               </a:rPr>
               <a:t>Data Catalog Atlas</a:t>
             </a:r>
@@ -3702,13 +4859,12 @@
             <a:avLst/>
           </a:prstGeom>
           <a:noFill/>
-          <a:ln/>
-        </p:spPr>
-        <p:txBody>
-          <a:bodyPr wrap="square" rtlCol="0" anchor="ctr"/>
-          <a:lstStyle/>
-          <a:p>
-            <a:pPr algn="ctr" indent="0" marL="0">
+        </p:spPr>
+        <p:txBody>
+          <a:bodyPr wrap="square" rtlCol="0" anchor="ctr"/>
+          <a:lstStyle/>
+          <a:p>
+            <a:pPr marL="0" indent="0" algn="ctr">
               <a:buNone/>
             </a:pPr>
             <a:r>
@@ -3716,9 +4872,9 @@
                 <a:solidFill>
                   <a:srgbClr val="37474F"/>
                 </a:solidFill>
-                <a:latin typeface="Microsoft YaHei" pitchFamily="34" charset="0"/>
-                <a:ea typeface="Microsoft YaHei" pitchFamily="34" charset="-122"/>
-                <a:cs typeface="Microsoft YaHei" pitchFamily="34" charset="-120"/>
+                <a:latin typeface="微软雅黑" pitchFamily="34" charset="0"/>
+                <a:ea typeface="微软雅黑" pitchFamily="34" charset="-122"/>
+                <a:cs typeface="微软雅黑" pitchFamily="34" charset="-120"/>
               </a:rPr>
               <a:t>数据血缘追踪</a:t>
             </a:r>
@@ -3768,13 +4924,12 @@
             <a:avLst/>
           </a:prstGeom>
           <a:noFill/>
-          <a:ln/>
-        </p:spPr>
-        <p:txBody>
-          <a:bodyPr wrap="square" rtlCol="0" anchor="ctr"/>
-          <a:lstStyle/>
-          <a:p>
-            <a:pPr algn="ctr" indent="0" marL="0">
+        </p:spPr>
+        <p:txBody>
+          <a:bodyPr wrap="square" rtlCol="0" anchor="ctr"/>
+          <a:lstStyle/>
+          <a:p>
+            <a:pPr marL="0" indent="0" algn="ctr">
               <a:buNone/>
             </a:pPr>
             <a:r>
@@ -3782,9 +4937,9 @@
                 <a:solidFill>
                   <a:srgbClr val="37474F"/>
                 </a:solidFill>
-                <a:latin typeface="Microsoft YaHei" pitchFamily="34" charset="0"/>
-                <a:ea typeface="Microsoft YaHei" pitchFamily="34" charset="-122"/>
-                <a:cs typeface="Microsoft YaHei" pitchFamily="34" charset="-120"/>
+                <a:latin typeface="微软雅黑" pitchFamily="34" charset="0"/>
+                <a:ea typeface="微软雅黑" pitchFamily="34" charset="-122"/>
+                <a:cs typeface="微软雅黑" pitchFamily="34" charset="-120"/>
               </a:rPr>
               <a:t>质量监控</a:t>
             </a:r>
@@ -3807,13 +4962,12 @@
             <a:avLst/>
           </a:prstGeom>
           <a:noFill/>
-          <a:ln/>
-        </p:spPr>
-        <p:txBody>
-          <a:bodyPr wrap="square" rtlCol="0" anchor="ctr"/>
-          <a:lstStyle/>
-          <a:p>
-            <a:pPr algn="ctr" indent="0" marL="0">
+        </p:spPr>
+        <p:txBody>
+          <a:bodyPr wrap="square" rtlCol="0" anchor="ctr"/>
+          <a:lstStyle/>
+          <a:p>
+            <a:pPr marL="0" indent="0" algn="ctr">
               <a:buNone/>
             </a:pPr>
             <a:r>
@@ -3843,13 +4997,12 @@
             <a:avLst/>
           </a:prstGeom>
           <a:noFill/>
-          <a:ln/>
-        </p:spPr>
-        <p:txBody>
-          <a:bodyPr wrap="square" rtlCol="0" anchor="ctr"/>
-          <a:lstStyle/>
-          <a:p>
-            <a:pPr algn="ctr" indent="0" marL="0">
+        </p:spPr>
+        <p:txBody>
+          <a:bodyPr wrap="square" rtlCol="0" anchor="ctr"/>
+          <a:lstStyle/>
+          <a:p>
+            <a:pPr marL="0" indent="0" algn="ctr">
               <a:buNone/>
             </a:pPr>
             <a:r>
@@ -3879,13 +5032,12 @@
             <a:avLst/>
           </a:prstGeom>
           <a:noFill/>
-          <a:ln/>
-        </p:spPr>
-        <p:txBody>
-          <a:bodyPr wrap="square" rtlCol="0" anchor="ctr"/>
-          <a:lstStyle/>
-          <a:p>
-            <a:pPr algn="ctr" indent="0" marL="0">
+        </p:spPr>
+        <p:txBody>
+          <a:bodyPr wrap="square" rtlCol="0" anchor="ctr"/>
+          <a:lstStyle/>
+          <a:p>
+            <a:pPr marL="0" indent="0" algn="ctr">
               <a:buNone/>
             </a:pPr>
             <a:r>
@@ -3915,13 +5067,12 @@
             <a:avLst/>
           </a:prstGeom>
           <a:noFill/>
-          <a:ln/>
-        </p:spPr>
-        <p:txBody>
-          <a:bodyPr wrap="square" rtlCol="0" anchor="ctr"/>
-          <a:lstStyle/>
-          <a:p>
-            <a:pPr algn="ctr" indent="0" marL="0">
+        </p:spPr>
+        <p:txBody>
+          <a:bodyPr wrap="square" rtlCol="0" anchor="ctr"/>
+          <a:lstStyle/>
+          <a:p>
+            <a:pPr marL="0" indent="0" algn="ctr">
               <a:buNone/>
             </a:pPr>
             <a:r>
@@ -3951,13 +5102,12 @@
             <a:avLst/>
           </a:prstGeom>
           <a:noFill/>
-          <a:ln/>
-        </p:spPr>
-        <p:txBody>
-          <a:bodyPr wrap="square" rtlCol="0" anchor="ctr"/>
-          <a:lstStyle/>
-          <a:p>
-            <a:pPr algn="ctr" indent="0" marL="0">
+        </p:spPr>
+        <p:txBody>
+          <a:bodyPr wrap="square" rtlCol="0" anchor="ctr"/>
+          <a:lstStyle/>
+          <a:p>
+            <a:pPr marL="0" indent="0" algn="ctr">
               <a:buNone/>
             </a:pPr>
             <a:r>
@@ -3987,13 +5137,12 @@
             <a:avLst/>
           </a:prstGeom>
           <a:noFill/>
-          <a:ln/>
-        </p:spPr>
-        <p:txBody>
-          <a:bodyPr wrap="square" rtlCol="0" anchor="ctr"/>
-          <a:lstStyle/>
-          <a:p>
-            <a:pPr algn="ctr" indent="0" marL="0">
+        </p:spPr>
+        <p:txBody>
+          <a:bodyPr wrap="square" rtlCol="0" anchor="ctr"/>
+          <a:lstStyle/>
+          <a:p>
+            <a:pPr marL="0" indent="0" algn="ctr">
               <a:buNone/>
             </a:pPr>
             <a:r>
@@ -4025,7 +5174,6 @@
           <a:solidFill>
             <a:srgbClr val="256D4B"/>
           </a:solidFill>
-          <a:ln/>
         </p:spPr>
       </p:sp>
       <p:sp>
@@ -4043,13 +5191,12 @@
             <a:avLst/>
           </a:prstGeom>
           <a:noFill/>
-          <a:ln/>
-        </p:spPr>
-        <p:txBody>
-          <a:bodyPr wrap="square" rtlCol="0" anchor="ctr"/>
-          <a:lstStyle/>
-          <a:p>
-            <a:pPr algn="ctr" indent="0" marL="0">
+        </p:spPr>
+        <p:txBody>
+          <a:bodyPr wrap="square" rtlCol="0" anchor="ctr"/>
+          <a:lstStyle/>
+          <a:p>
+            <a:pPr marL="0" indent="0" algn="ctr">
               <a:buNone/>
             </a:pPr>
             <a:r>
@@ -4057,9 +5204,9 @@
                 <a:solidFill>
                   <a:srgbClr val="FFFFFF"/>
                 </a:solidFill>
-                <a:latin typeface="Arial" pitchFamily="34" charset="0"/>
-                <a:ea typeface="Arial" pitchFamily="34" charset="-122"/>
-                <a:cs typeface="Arial" pitchFamily="34" charset="-120"/>
+                <a:latin typeface="Arial" panose="020B0604020202090204" pitchFamily="34" charset="0"/>
+                <a:ea typeface="Arial" panose="020B0604020202090204" pitchFamily="34" charset="-122"/>
+                <a:cs typeface="Arial" panose="020B0604020202090204" pitchFamily="34" charset="-120"/>
               </a:rPr>
               <a:t>2</a:t>
             </a:r>
@@ -4077,12 +5224,13 @@
 
 <file path=ppt/slides/slide3.xml><?xml version="1.0" encoding="utf-8"?>
 <p:sld xmlns:a="http://schemas.openxmlformats.org/drawingml/2006/main" xmlns:r="http://schemas.openxmlformats.org/officeDocument/2006/relationships" xmlns:p="http://schemas.openxmlformats.org/presentationml/2006/main">
-  <p:cSld name="Slide 3">
+  <p:cSld>
     <p:bg>
       <p:bgPr>
         <a:solidFill>
           <a:srgbClr val="F8FBFC"/>
         </a:solidFill>
+        <a:effectLst/>
       </p:bgPr>
     </p:bg>
     <p:spTree>
@@ -4114,13 +5262,12 @@
             <a:avLst/>
           </a:prstGeom>
           <a:noFill/>
-          <a:ln/>
-        </p:spPr>
-        <p:txBody>
-          <a:bodyPr wrap="square" rtlCol="0" anchor="ctr"/>
-          <a:lstStyle/>
-          <a:p>
-            <a:pPr indent="0" marL="0">
+        </p:spPr>
+        <p:txBody>
+          <a:bodyPr wrap="square" rtlCol="0" anchor="ctr"/>
+          <a:lstStyle/>
+          <a:p>
+            <a:pPr marL="0" indent="0">
               <a:buNone/>
             </a:pPr>
             <a:r>
@@ -4128,9 +5275,9 @@
                 <a:solidFill>
                   <a:srgbClr val="1B3A4B"/>
                 </a:solidFill>
-                <a:latin typeface="Microsoft YaHei" pitchFamily="34" charset="0"/>
-                <a:ea typeface="Microsoft YaHei" pitchFamily="34" charset="-122"/>
-                <a:cs typeface="Microsoft YaHei" pitchFamily="34" charset="-120"/>
+                <a:latin typeface="微软雅黑" pitchFamily="34" charset="0"/>
+                <a:ea typeface="微软雅黑" pitchFamily="34" charset="-122"/>
+                <a:cs typeface="微软雅黑" pitchFamily="34" charset="-120"/>
               </a:rPr>
               <a:t>存算分离 — 核心设计原理</a:t>
             </a:r>
@@ -4180,13 +5327,12 @@
             <a:avLst/>
           </a:prstGeom>
           <a:noFill/>
-          <a:ln/>
-        </p:spPr>
-        <p:txBody>
-          <a:bodyPr wrap="square" rtlCol="0" anchor="ctr"/>
-          <a:lstStyle/>
-          <a:p>
-            <a:pPr algn="ctr" indent="0" marL="0">
+        </p:spPr>
+        <p:txBody>
+          <a:bodyPr wrap="square" rtlCol="0" anchor="ctr"/>
+          <a:lstStyle/>
+          <a:p>
+            <a:pPr marL="0" indent="0" algn="ctr">
               <a:buNone/>
             </a:pPr>
             <a:r>
@@ -4194,16 +5340,16 @@
                 <a:solidFill>
                   <a:srgbClr val="2E7D32"/>
                 </a:solidFill>
-                <a:latin typeface="Microsoft YaHei" pitchFamily="34" charset="0"/>
-                <a:ea typeface="Microsoft YaHei" pitchFamily="34" charset="-122"/>
-                <a:cs typeface="Microsoft YaHei" pitchFamily="34" charset="-120"/>
+                <a:latin typeface="微软雅黑" pitchFamily="34" charset="0"/>
+                <a:ea typeface="微软雅黑" pitchFamily="34" charset="-122"/>
+                <a:cs typeface="微软雅黑" pitchFamily="34" charset="-120"/>
               </a:rPr>
               <a:t>存储层 (S3/MinIO)</a:t>
             </a:r>
             <a:endParaRPr lang="en-US" sz="1400" dirty="0"/>
           </a:p>
           <a:p>
-            <a:pPr algn="ctr" indent="0" marL="0">
+            <a:pPr marL="0" indent="0" algn="ctr">
               <a:buNone/>
             </a:pPr>
             <a:r>
@@ -4211,9 +5357,9 @@
                 <a:solidFill>
                   <a:srgbClr val="2E7D32"/>
                 </a:solidFill>
-                <a:latin typeface="Microsoft YaHei" pitchFamily="34" charset="0"/>
-                <a:ea typeface="Microsoft YaHei" pitchFamily="34" charset="-122"/>
-                <a:cs typeface="Microsoft YaHei" pitchFamily="34" charset="-120"/>
+                <a:latin typeface="微软雅黑" pitchFamily="34" charset="0"/>
+                <a:ea typeface="微软雅黑" pitchFamily="34" charset="-122"/>
+                <a:cs typeface="微软雅黑" pitchFamily="34" charset="-120"/>
               </a:rPr>
               <a:t>状态永驻</a:t>
             </a:r>
@@ -4236,13 +5382,12 @@
             <a:avLst/>
           </a:prstGeom>
           <a:noFill/>
-          <a:ln/>
-        </p:spPr>
-        <p:txBody>
-          <a:bodyPr wrap="square" rtlCol="0" anchor="ctr"/>
-          <a:lstStyle/>
-          <a:p>
-            <a:pPr indent="0" marL="0">
+        </p:spPr>
+        <p:txBody>
+          <a:bodyPr wrap="square" rtlCol="0" anchor="ctr"/>
+          <a:lstStyle/>
+          <a:p>
+            <a:pPr marL="0" indent="0">
               <a:buNone/>
             </a:pPr>
             <a:r>
@@ -4250,9 +5395,9 @@
                 <a:solidFill>
                   <a:srgbClr val="33691E"/>
                 </a:solidFill>
-                <a:latin typeface="Microsoft YaHei" pitchFamily="34" charset="0"/>
-                <a:ea typeface="Microsoft YaHei" pitchFamily="34" charset="-122"/>
-                <a:cs typeface="Microsoft YaHei" pitchFamily="34" charset="-120"/>
+                <a:latin typeface="微软雅黑" pitchFamily="34" charset="0"/>
+                <a:ea typeface="微软雅黑" pitchFamily="34" charset="-122"/>
+                <a:cs typeface="微软雅黑" pitchFamily="34" charset="-120"/>
               </a:rPr>
               <a:t>Hive Metastore — 表元数据管理</a:t>
             </a:r>
@@ -4275,13 +5420,12 @@
             <a:avLst/>
           </a:prstGeom>
           <a:noFill/>
-          <a:ln/>
-        </p:spPr>
-        <p:txBody>
-          <a:bodyPr wrap="square" rtlCol="0" anchor="ctr"/>
-          <a:lstStyle/>
-          <a:p>
-            <a:pPr indent="0" marL="0">
+        </p:spPr>
+        <p:txBody>
+          <a:bodyPr wrap="square" rtlCol="0" anchor="ctr"/>
+          <a:lstStyle/>
+          <a:p>
+            <a:pPr marL="0" indent="0">
               <a:buNone/>
             </a:pPr>
             <a:r>
@@ -4289,9 +5433,9 @@
                 <a:solidFill>
                   <a:srgbClr val="33691E"/>
                 </a:solidFill>
-                <a:latin typeface="Microsoft YaHei" pitchFamily="34" charset="0"/>
-                <a:ea typeface="Microsoft YaHei" pitchFamily="34" charset="-122"/>
-                <a:cs typeface="Microsoft YaHei" pitchFamily="34" charset="-120"/>
+                <a:latin typeface="微软雅黑" pitchFamily="34" charset="0"/>
+                <a:ea typeface="微软雅黑" pitchFamily="34" charset="-122"/>
+                <a:cs typeface="微软雅黑" pitchFamily="34" charset="-120"/>
               </a:rPr>
               <a:t>Hive 业务表 — Parquet/ORC</a:t>
             </a:r>
@@ -4314,13 +5458,12 @@
             <a:avLst/>
           </a:prstGeom>
           <a:noFill/>
-          <a:ln/>
-        </p:spPr>
-        <p:txBody>
-          <a:bodyPr wrap="square" rtlCol="0" anchor="ctr"/>
-          <a:lstStyle/>
-          <a:p>
-            <a:pPr indent="0" marL="0">
+        </p:spPr>
+        <p:txBody>
+          <a:bodyPr wrap="square" rtlCol="0" anchor="ctr"/>
+          <a:lstStyle/>
+          <a:p>
+            <a:pPr marL="0" indent="0">
               <a:buNone/>
             </a:pPr>
             <a:r>
@@ -4328,9 +5471,9 @@
                 <a:solidFill>
                   <a:srgbClr val="33691E"/>
                 </a:solidFill>
-                <a:latin typeface="Microsoft YaHei" pitchFamily="34" charset="0"/>
-                <a:ea typeface="Microsoft YaHei" pitchFamily="34" charset="-122"/>
-                <a:cs typeface="Microsoft YaHei" pitchFamily="34" charset="-120"/>
+                <a:latin typeface="微软雅黑" pitchFamily="34" charset="0"/>
+                <a:ea typeface="微软雅黑" pitchFamily="34" charset="-122"/>
+                <a:cs typeface="微软雅黑" pitchFamily="34" charset="-120"/>
               </a:rPr>
               <a:t>Hive IoT 表 — 按时间分区</a:t>
             </a:r>
@@ -4353,13 +5496,12 @@
             <a:avLst/>
           </a:prstGeom>
           <a:noFill/>
-          <a:ln/>
-        </p:spPr>
-        <p:txBody>
-          <a:bodyPr wrap="square" rtlCol="0" anchor="ctr"/>
-          <a:lstStyle/>
-          <a:p>
-            <a:pPr indent="0" marL="0">
+        </p:spPr>
+        <p:txBody>
+          <a:bodyPr wrap="square" rtlCol="0" anchor="ctr"/>
+          <a:lstStyle/>
+          <a:p>
+            <a:pPr marL="0" indent="0">
               <a:buNone/>
             </a:pPr>
             <a:r>
@@ -4367,9 +5509,9 @@
                 <a:solidFill>
                   <a:srgbClr val="33691E"/>
                 </a:solidFill>
-                <a:latin typeface="Microsoft YaHei" pitchFamily="34" charset="0"/>
-                <a:ea typeface="Microsoft YaHei" pitchFamily="34" charset="-122"/>
-                <a:cs typeface="Microsoft YaHei" pitchFamily="34" charset="-120"/>
+                <a:latin typeface="微软雅黑" pitchFamily="34" charset="0"/>
+                <a:ea typeface="微软雅黑" pitchFamily="34" charset="-122"/>
+                <a:cs typeface="微软雅黑" pitchFamily="34" charset="-120"/>
               </a:rPr>
               <a:t>Hive 遥感表 — 分块影像</a:t>
             </a:r>
@@ -4392,13 +5534,12 @@
             <a:avLst/>
           </a:prstGeom>
           <a:noFill/>
-          <a:ln/>
-        </p:spPr>
-        <p:txBody>
-          <a:bodyPr wrap="square" rtlCol="0" anchor="ctr"/>
-          <a:lstStyle/>
-          <a:p>
-            <a:pPr indent="0" marL="0">
+        </p:spPr>
+        <p:txBody>
+          <a:bodyPr wrap="square" rtlCol="0" anchor="ctr"/>
+          <a:lstStyle/>
+          <a:p>
+            <a:pPr marL="0" indent="0">
               <a:buNone/>
             </a:pPr>
             <a:r>
@@ -4406,9 +5547,9 @@
                 <a:solidFill>
                   <a:srgbClr val="33691E"/>
                 </a:solidFill>
-                <a:latin typeface="Microsoft YaHei" pitchFamily="34" charset="0"/>
-                <a:ea typeface="Microsoft YaHei" pitchFamily="34" charset="-122"/>
-                <a:cs typeface="Microsoft YaHei" pitchFamily="34" charset="-120"/>
+                <a:latin typeface="微软雅黑" pitchFamily="34" charset="0"/>
+                <a:ea typeface="微软雅黑" pitchFamily="34" charset="-122"/>
+                <a:cs typeface="微软雅黑" pitchFamily="34" charset="-120"/>
               </a:rPr>
               <a:t>原始文件区 — tiff/nc 保底</a:t>
             </a:r>
@@ -4431,13 +5572,12 @@
             <a:avLst/>
           </a:prstGeom>
           <a:noFill/>
-          <a:ln/>
-        </p:spPr>
-        <p:txBody>
-          <a:bodyPr wrap="square" rtlCol="0" anchor="ctr"/>
-          <a:lstStyle/>
-          <a:p>
-            <a:pPr indent="0" marL="0">
+        </p:spPr>
+        <p:txBody>
+          <a:bodyPr wrap="square" rtlCol="0" anchor="ctr"/>
+          <a:lstStyle/>
+          <a:p>
+            <a:pPr marL="0" indent="0">
               <a:buNone/>
             </a:pPr>
             <a:endParaRPr lang="en-US" sz="900" dirty="0"/>
@@ -4459,13 +5599,12 @@
             <a:avLst/>
           </a:prstGeom>
           <a:noFill/>
-          <a:ln/>
-        </p:spPr>
-        <p:txBody>
-          <a:bodyPr wrap="square" rtlCol="0" anchor="ctr"/>
-          <a:lstStyle/>
-          <a:p>
-            <a:pPr indent="0" marL="0">
+        </p:spPr>
+        <p:txBody>
+          <a:bodyPr wrap="square" rtlCol="0" anchor="ctr"/>
+          <a:lstStyle/>
+          <a:p>
+            <a:pPr marL="0" indent="0">
               <a:buNone/>
             </a:pPr>
             <a:r>
@@ -4473,9 +5612,9 @@
                 <a:solidFill>
                   <a:srgbClr val="1B5E20"/>
                 </a:solidFill>
-                <a:latin typeface="Microsoft YaHei" pitchFamily="34" charset="0"/>
-                <a:ea typeface="Microsoft YaHei" pitchFamily="34" charset="-122"/>
-                <a:cs typeface="Microsoft YaHei" pitchFamily="34" charset="-120"/>
+                <a:latin typeface="微软雅黑" pitchFamily="34" charset="0"/>
+                <a:ea typeface="微软雅黑" pitchFamily="34" charset="-122"/>
+                <a:cs typeface="微软雅黑" pitchFamily="34" charset="-120"/>
               </a:rPr>
               <a:t>★ Iceberg 演进方向</a:t>
             </a:r>
@@ -4525,13 +5664,12 @@
             <a:avLst/>
           </a:prstGeom>
           <a:noFill/>
-          <a:ln/>
-        </p:spPr>
-        <p:txBody>
-          <a:bodyPr wrap="square" rtlCol="0" anchor="ctr"/>
-          <a:lstStyle/>
-          <a:p>
-            <a:pPr algn="ctr" indent="0" marL="0">
+        </p:spPr>
+        <p:txBody>
+          <a:bodyPr wrap="square" rtlCol="0" anchor="ctr"/>
+          <a:lstStyle/>
+          <a:p>
+            <a:pPr marL="0" indent="0" algn="ctr">
               <a:buNone/>
             </a:pPr>
             <a:r>
@@ -4539,16 +5677,16 @@
                 <a:solidFill>
                   <a:srgbClr val="E65100"/>
                 </a:solidFill>
-                <a:latin typeface="Microsoft YaHei" pitchFamily="34" charset="0"/>
-                <a:ea typeface="Microsoft YaHei" pitchFamily="34" charset="-122"/>
-                <a:cs typeface="Microsoft YaHei" pitchFamily="34" charset="-120"/>
+                <a:latin typeface="微软雅黑" pitchFamily="34" charset="0"/>
+                <a:ea typeface="微软雅黑" pitchFamily="34" charset="-122"/>
+                <a:cs typeface="微软雅黑" pitchFamily="34" charset="-120"/>
               </a:rPr>
               <a:t>计算层 (Kubernetes)</a:t>
             </a:r>
             <a:endParaRPr lang="en-US" sz="1400" dirty="0"/>
           </a:p>
           <a:p>
-            <a:pPr algn="ctr" indent="0" marL="0">
+            <a:pPr marL="0" indent="0" algn="ctr">
               <a:buNone/>
             </a:pPr>
             <a:r>
@@ -4556,9 +5694,9 @@
                 <a:solidFill>
                   <a:srgbClr val="E65100"/>
                 </a:solidFill>
-                <a:latin typeface="Microsoft YaHei" pitchFamily="34" charset="0"/>
-                <a:ea typeface="Microsoft YaHei" pitchFamily="34" charset="-122"/>
-                <a:cs typeface="Microsoft YaHei" pitchFamily="34" charset="-120"/>
+                <a:latin typeface="微软雅黑" pitchFamily="34" charset="0"/>
+                <a:ea typeface="微软雅黑" pitchFamily="34" charset="-122"/>
+                <a:cs typeface="微软雅黑" pitchFamily="34" charset="-120"/>
               </a:rPr>
               <a:t>完全无状态，弹性扩缩</a:t>
             </a:r>
@@ -4581,13 +5719,12 @@
             <a:avLst/>
           </a:prstGeom>
           <a:noFill/>
-          <a:ln/>
-        </p:spPr>
-        <p:txBody>
-          <a:bodyPr wrap="square" rtlCol="0" anchor="ctr"/>
-          <a:lstStyle/>
-          <a:p>
-            <a:pPr indent="0" marL="0">
+        </p:spPr>
+        <p:txBody>
+          <a:bodyPr wrap="square" rtlCol="0" anchor="ctr"/>
+          <a:lstStyle/>
+          <a:p>
+            <a:pPr marL="0" indent="0">
               <a:buNone/>
             </a:pPr>
             <a:r>
@@ -4595,9 +5732,9 @@
                 <a:solidFill>
                   <a:srgbClr val="E65100"/>
                 </a:solidFill>
-                <a:latin typeface="Microsoft YaHei" pitchFamily="34" charset="0"/>
-                <a:ea typeface="Microsoft YaHei" pitchFamily="34" charset="-122"/>
-                <a:cs typeface="Microsoft YaHei" pitchFamily="34" charset="-120"/>
+                <a:latin typeface="微软雅黑" pitchFamily="34" charset="0"/>
+                <a:ea typeface="微软雅黑" pitchFamily="34" charset="-122"/>
+                <a:cs typeface="微软雅黑" pitchFamily="34" charset="-120"/>
               </a:rPr>
               <a:t>Flink on K8s — 实时流处理</a:t>
             </a:r>
@@ -4620,13 +5757,12 @@
             <a:avLst/>
           </a:prstGeom>
           <a:noFill/>
-          <a:ln/>
-        </p:spPr>
-        <p:txBody>
-          <a:bodyPr wrap="square" rtlCol="0" anchor="ctr"/>
-          <a:lstStyle/>
-          <a:p>
-            <a:pPr indent="0" marL="0">
+        </p:spPr>
+        <p:txBody>
+          <a:bodyPr wrap="square" rtlCol="0" anchor="ctr"/>
+          <a:lstStyle/>
+          <a:p>
+            <a:pPr marL="0" indent="0">
               <a:buNone/>
             </a:pPr>
             <a:r>
@@ -4634,9 +5770,9 @@
                 <a:solidFill>
                   <a:srgbClr val="BF360C"/>
                 </a:solidFill>
-                <a:latin typeface="Microsoft YaHei" pitchFamily="34" charset="0"/>
-                <a:ea typeface="Microsoft YaHei" pitchFamily="34" charset="-122"/>
-                <a:cs typeface="Microsoft YaHei" pitchFamily="34" charset="-120"/>
+                <a:latin typeface="微软雅黑" pitchFamily="34" charset="0"/>
+                <a:ea typeface="微软雅黑" pitchFamily="34" charset="-122"/>
+                <a:cs typeface="微软雅黑" pitchFamily="34" charset="-120"/>
               </a:rPr>
               <a:t>  · IoT 清洗 · CDC 同步</a:t>
             </a:r>
@@ -4659,13 +5795,12 @@
             <a:avLst/>
           </a:prstGeom>
           <a:noFill/>
-          <a:ln/>
-        </p:spPr>
-        <p:txBody>
-          <a:bodyPr wrap="square" rtlCol="0" anchor="ctr"/>
-          <a:lstStyle/>
-          <a:p>
-            <a:pPr indent="0" marL="0">
+        </p:spPr>
+        <p:txBody>
+          <a:bodyPr wrap="square" rtlCol="0" anchor="ctr"/>
+          <a:lstStyle/>
+          <a:p>
+            <a:pPr marL="0" indent="0">
               <a:buNone/>
             </a:pPr>
             <a:r>
@@ -4673,9 +5808,9 @@
                 <a:solidFill>
                   <a:srgbClr val="BF360C"/>
                 </a:solidFill>
-                <a:latin typeface="Microsoft YaHei" pitchFamily="34" charset="0"/>
-                <a:ea typeface="Microsoft YaHei" pitchFamily="34" charset="-122"/>
-                <a:cs typeface="Microsoft YaHei" pitchFamily="34" charset="-120"/>
+                <a:latin typeface="微软雅黑" pitchFamily="34" charset="0"/>
+                <a:ea typeface="微软雅黑" pitchFamily="34" charset="-122"/>
+                <a:cs typeface="微软雅黑" pitchFamily="34" charset="-120"/>
               </a:rPr>
               <a:t>  · 实时推荐特征计算</a:t>
             </a:r>
@@ -4698,13 +5833,12 @@
             <a:avLst/>
           </a:prstGeom>
           <a:noFill/>
-          <a:ln/>
-        </p:spPr>
-        <p:txBody>
-          <a:bodyPr wrap="square" rtlCol="0" anchor="ctr"/>
-          <a:lstStyle/>
-          <a:p>
-            <a:pPr indent="0" marL="0">
+        </p:spPr>
+        <p:txBody>
+          <a:bodyPr wrap="square" rtlCol="0" anchor="ctr"/>
+          <a:lstStyle/>
+          <a:p>
+            <a:pPr marL="0" indent="0">
               <a:buNone/>
             </a:pPr>
             <a:r>
@@ -4712,9 +5846,9 @@
                 <a:solidFill>
                   <a:srgbClr val="E65100"/>
                 </a:solidFill>
-                <a:latin typeface="Microsoft YaHei" pitchFamily="34" charset="0"/>
-                <a:ea typeface="Microsoft YaHei" pitchFamily="34" charset="-122"/>
-                <a:cs typeface="Microsoft YaHei" pitchFamily="34" charset="-120"/>
+                <a:latin typeface="微软雅黑" pitchFamily="34" charset="0"/>
+                <a:ea typeface="微软雅黑" pitchFamily="34" charset="-122"/>
+                <a:cs typeface="微软雅黑" pitchFamily="34" charset="-120"/>
               </a:rPr>
               <a:t>Spark on K8s — 批量处理</a:t>
             </a:r>
@@ -4737,13 +5871,12 @@
             <a:avLst/>
           </a:prstGeom>
           <a:noFill/>
-          <a:ln/>
-        </p:spPr>
-        <p:txBody>
-          <a:bodyPr wrap="square" rtlCol="0" anchor="ctr"/>
-          <a:lstStyle/>
-          <a:p>
-            <a:pPr indent="0" marL="0">
+        </p:spPr>
+        <p:txBody>
+          <a:bodyPr wrap="square" rtlCol="0" anchor="ctr"/>
+          <a:lstStyle/>
+          <a:p>
+            <a:pPr marL="0" indent="0">
               <a:buNone/>
             </a:pPr>
             <a:r>
@@ -4751,9 +5884,9 @@
                 <a:solidFill>
                   <a:srgbClr val="BF360C"/>
                 </a:solidFill>
-                <a:latin typeface="Microsoft YaHei" pitchFamily="34" charset="0"/>
-                <a:ea typeface="Microsoft YaHei" pitchFamily="34" charset="-122"/>
-                <a:cs typeface="Microsoft YaHei" pitchFamily="34" charset="-120"/>
+                <a:latin typeface="微软雅黑" pitchFamily="34" charset="0"/>
+                <a:ea typeface="微软雅黑" pitchFamily="34" charset="-122"/>
+                <a:cs typeface="微软雅黑" pitchFamily="34" charset="-120"/>
               </a:rPr>
               <a:t>  · 遥感处理 · 重度 ETL</a:t>
             </a:r>
@@ -4776,13 +5909,12 @@
             <a:avLst/>
           </a:prstGeom>
           <a:noFill/>
-          <a:ln/>
-        </p:spPr>
-        <p:txBody>
-          <a:bodyPr wrap="square" rtlCol="0" anchor="ctr"/>
-          <a:lstStyle/>
-          <a:p>
-            <a:pPr indent="0" marL="0">
+        </p:spPr>
+        <p:txBody>
+          <a:bodyPr wrap="square" rtlCol="0" anchor="ctr"/>
+          <a:lstStyle/>
+          <a:p>
+            <a:pPr marL="0" indent="0">
               <a:buNone/>
             </a:pPr>
             <a:r>
@@ -4790,9 +5922,9 @@
                 <a:solidFill>
                   <a:srgbClr val="BF360C"/>
                 </a:solidFill>
-                <a:latin typeface="Microsoft YaHei" pitchFamily="34" charset="0"/>
-                <a:ea typeface="Microsoft YaHei" pitchFamily="34" charset="-122"/>
-                <a:cs typeface="Microsoft YaHei" pitchFamily="34" charset="-120"/>
+                <a:latin typeface="微软雅黑" pitchFamily="34" charset="0"/>
+                <a:ea typeface="微软雅黑" pitchFamily="34" charset="-122"/>
+                <a:cs typeface="微软雅黑" pitchFamily="34" charset="-120"/>
               </a:rPr>
               <a:t>  · 训练数据集构造</a:t>
             </a:r>
@@ -4815,13 +5947,12 @@
             <a:avLst/>
           </a:prstGeom>
           <a:noFill/>
-          <a:ln/>
-        </p:spPr>
-        <p:txBody>
-          <a:bodyPr wrap="square" rtlCol="0" anchor="ctr"/>
-          <a:lstStyle/>
-          <a:p>
-            <a:pPr indent="0" marL="0">
+        </p:spPr>
+        <p:txBody>
+          <a:bodyPr wrap="square" rtlCol="0" anchor="ctr"/>
+          <a:lstStyle/>
+          <a:p>
+            <a:pPr marL="0" indent="0">
               <a:buNone/>
             </a:pPr>
             <a:endParaRPr lang="en-US" sz="900" dirty="0"/>
@@ -4843,13 +5974,12 @@
             <a:avLst/>
           </a:prstGeom>
           <a:noFill/>
-          <a:ln/>
-        </p:spPr>
-        <p:txBody>
-          <a:bodyPr wrap="square" rtlCol="0" anchor="ctr"/>
-          <a:lstStyle/>
-          <a:p>
-            <a:pPr indent="0" marL="0">
+        </p:spPr>
+        <p:txBody>
+          <a:bodyPr wrap="square" rtlCol="0" anchor="ctr"/>
+          <a:lstStyle/>
+          <a:p>
+            <a:pPr marL="0" indent="0">
               <a:buNone/>
             </a:pPr>
             <a:r>
@@ -4857,9 +5987,9 @@
                 <a:solidFill>
                   <a:srgbClr val="E65100"/>
                 </a:solidFill>
-                <a:latin typeface="Microsoft YaHei" pitchFamily="34" charset="0"/>
-                <a:ea typeface="Microsoft YaHei" pitchFamily="34" charset="-122"/>
-                <a:cs typeface="Microsoft YaHei" pitchFamily="34" charset="-120"/>
+                <a:latin typeface="微软雅黑" pitchFamily="34" charset="0"/>
+                <a:ea typeface="微软雅黑" pitchFamily="34" charset="-122"/>
+                <a:cs typeface="微软雅黑" pitchFamily="34" charset="-120"/>
               </a:rPr>
               <a:t>统一读写 S3 Hive 表</a:t>
             </a:r>
@@ -4884,7 +6014,6 @@
           <a:solidFill>
             <a:srgbClr val="256D4B"/>
           </a:solidFill>
-          <a:ln/>
         </p:spPr>
       </p:sp>
       <p:sp>
@@ -4904,7 +6033,6 @@
           <a:solidFill>
             <a:srgbClr val="256D4B"/>
           </a:solidFill>
-          <a:ln/>
         </p:spPr>
       </p:sp>
       <p:sp>
@@ -4922,13 +6050,12 @@
             <a:avLst/>
           </a:prstGeom>
           <a:noFill/>
-          <a:ln/>
-        </p:spPr>
-        <p:txBody>
-          <a:bodyPr wrap="square" rtlCol="0" anchor="ctr"/>
-          <a:lstStyle/>
-          <a:p>
-            <a:pPr algn="ctr" indent="0" marL="0">
+        </p:spPr>
+        <p:txBody>
+          <a:bodyPr wrap="square" rtlCol="0" anchor="ctr"/>
+          <a:lstStyle/>
+          <a:p>
+            <a:pPr marL="0" indent="0" algn="ctr">
               <a:buNone/>
             </a:pPr>
             <a:r>
@@ -4936,9 +6063,9 @@
                 <a:solidFill>
                   <a:srgbClr val="256D4B"/>
                 </a:solidFill>
-                <a:latin typeface="Microsoft YaHei" pitchFamily="34" charset="0"/>
-                <a:ea typeface="Microsoft YaHei" pitchFamily="34" charset="-122"/>
-                <a:cs typeface="Microsoft YaHei" pitchFamily="34" charset="-120"/>
+                <a:latin typeface="微软雅黑" pitchFamily="34" charset="0"/>
+                <a:ea typeface="微软雅黑" pitchFamily="34" charset="-122"/>
+                <a:cs typeface="微软雅黑" pitchFamily="34" charset="-120"/>
               </a:rPr>
               <a:t>读</a:t>
             </a:r>
@@ -4961,13 +6088,12 @@
             <a:avLst/>
           </a:prstGeom>
           <a:noFill/>
-          <a:ln/>
-        </p:spPr>
-        <p:txBody>
-          <a:bodyPr wrap="square" rtlCol="0" anchor="ctr"/>
-          <a:lstStyle/>
-          <a:p>
-            <a:pPr algn="ctr" indent="0" marL="0">
+        </p:spPr>
+        <p:txBody>
+          <a:bodyPr wrap="square" rtlCol="0" anchor="ctr"/>
+          <a:lstStyle/>
+          <a:p>
+            <a:pPr marL="0" indent="0" algn="ctr">
               <a:buNone/>
             </a:pPr>
             <a:r>
@@ -4975,9 +6101,9 @@
                 <a:solidFill>
                   <a:srgbClr val="256D4B"/>
                 </a:solidFill>
-                <a:latin typeface="Microsoft YaHei" pitchFamily="34" charset="0"/>
-                <a:ea typeface="Microsoft YaHei" pitchFamily="34" charset="-122"/>
-                <a:cs typeface="Microsoft YaHei" pitchFamily="34" charset="-120"/>
+                <a:latin typeface="微软雅黑" pitchFamily="34" charset="0"/>
+                <a:ea typeface="微软雅黑" pitchFamily="34" charset="-122"/>
+                <a:cs typeface="微软雅黑" pitchFamily="34" charset="-120"/>
               </a:rPr>
               <a:t>写</a:t>
             </a:r>
@@ -5002,7 +6128,6 @@
           <a:solidFill>
             <a:srgbClr val="256D4B"/>
           </a:solidFill>
-          <a:ln/>
         </p:spPr>
       </p:sp>
       <p:sp>
@@ -5020,13 +6145,12 @@
             <a:avLst/>
           </a:prstGeom>
           <a:noFill/>
-          <a:ln/>
-        </p:spPr>
-        <p:txBody>
-          <a:bodyPr wrap="square" rtlCol="0" anchor="ctr"/>
-          <a:lstStyle/>
-          <a:p>
-            <a:pPr algn="ctr" indent="0" marL="0">
+        </p:spPr>
+        <p:txBody>
+          <a:bodyPr wrap="square" rtlCol="0" anchor="ctr"/>
+          <a:lstStyle/>
+          <a:p>
+            <a:pPr marL="0" indent="0" algn="ctr">
               <a:buNone/>
             </a:pPr>
             <a:r>
@@ -5034,9 +6158,9 @@
                 <a:solidFill>
                   <a:srgbClr val="FFFFFF"/>
                 </a:solidFill>
-                <a:latin typeface="Arial" pitchFamily="34" charset="0"/>
-                <a:ea typeface="Arial" pitchFamily="34" charset="-122"/>
-                <a:cs typeface="Arial" pitchFamily="34" charset="-120"/>
+                <a:latin typeface="Arial" panose="020B0604020202090204" pitchFamily="34" charset="0"/>
+                <a:ea typeface="Arial" panose="020B0604020202090204" pitchFamily="34" charset="-122"/>
+                <a:cs typeface="Arial" panose="020B0604020202090204" pitchFamily="34" charset="-120"/>
               </a:rPr>
               <a:t>3</a:t>
             </a:r>
@@ -5054,12 +6178,13 @@
 
 <file path=ppt/slides/slide4.xml><?xml version="1.0" encoding="utf-8"?>
 <p:sld xmlns:a="http://schemas.openxmlformats.org/drawingml/2006/main" xmlns:r="http://schemas.openxmlformats.org/officeDocument/2006/relationships" xmlns:p="http://schemas.openxmlformats.org/presentationml/2006/main">
-  <p:cSld name="Slide 4">
+  <p:cSld>
     <p:bg>
       <p:bgPr>
         <a:solidFill>
           <a:srgbClr val="F8FBFC"/>
         </a:solidFill>
+        <a:effectLst/>
       </p:bgPr>
     </p:bg>
     <p:spTree>
@@ -5091,13 +6216,12 @@
             <a:avLst/>
           </a:prstGeom>
           <a:noFill/>
-          <a:ln/>
-        </p:spPr>
-        <p:txBody>
-          <a:bodyPr wrap="square" rtlCol="0" anchor="ctr"/>
-          <a:lstStyle/>
-          <a:p>
-            <a:pPr indent="0" marL="0">
+        </p:spPr>
+        <p:txBody>
+          <a:bodyPr wrap="square" rtlCol="0" anchor="ctr"/>
+          <a:lstStyle/>
+          <a:p>
+            <a:pPr marL="0" indent="0">
               <a:buNone/>
             </a:pPr>
             <a:r>
@@ -5105,9 +6229,9 @@
                 <a:solidFill>
                   <a:srgbClr val="1B3A4B"/>
                 </a:solidFill>
-                <a:latin typeface="Microsoft YaHei" pitchFamily="34" charset="0"/>
-                <a:ea typeface="Microsoft YaHei" pitchFamily="34" charset="-122"/>
-                <a:cs typeface="Microsoft YaHei" pitchFamily="34" charset="-120"/>
+                <a:latin typeface="微软雅黑" pitchFamily="34" charset="0"/>
+                <a:ea typeface="微软雅黑" pitchFamily="34" charset="-122"/>
+                <a:cs typeface="微软雅黑" pitchFamily="34" charset="-120"/>
               </a:rPr>
               <a:t>四大核心数据链路</a:t>
             </a:r>
@@ -5130,13 +6254,12 @@
             <a:avLst/>
           </a:prstGeom>
           <a:noFill/>
-          <a:ln/>
-        </p:spPr>
-        <p:txBody>
-          <a:bodyPr wrap="square" rtlCol="0" anchor="ctr"/>
-          <a:lstStyle/>
-          <a:p>
-            <a:pPr algn="r" indent="0" marL="0">
+        </p:spPr>
+        <p:txBody>
+          <a:bodyPr wrap="square" rtlCol="0" anchor="ctr"/>
+          <a:lstStyle/>
+          <a:p>
+            <a:pPr marL="0" indent="0" algn="r">
               <a:buNone/>
             </a:pPr>
             <a:r>
@@ -5144,9 +6267,9 @@
                 <a:solidFill>
                   <a:srgbClr val="7B1FA2"/>
                 </a:solidFill>
-                <a:latin typeface="Microsoft YaHei" pitchFamily="34" charset="0"/>
-                <a:ea typeface="Microsoft YaHei" pitchFamily="34" charset="-122"/>
-                <a:cs typeface="Microsoft YaHei" pitchFamily="34" charset="-120"/>
+                <a:latin typeface="微软雅黑" pitchFamily="34" charset="0"/>
+                <a:ea typeface="微软雅黑" pitchFamily="34" charset="-122"/>
+                <a:cs typeface="微软雅黑" pitchFamily="34" charset="-120"/>
               </a:rPr>
               <a:t>链路 1 — IoT 实时</a:t>
             </a:r>
@@ -5196,13 +6319,12 @@
             <a:avLst/>
           </a:prstGeom>
           <a:noFill/>
-          <a:ln/>
-        </p:spPr>
-        <p:txBody>
-          <a:bodyPr wrap="square" rtlCol="0" anchor="ctr"/>
-          <a:lstStyle/>
-          <a:p>
-            <a:pPr algn="ctr" indent="0" marL="0">
+        </p:spPr>
+        <p:txBody>
+          <a:bodyPr wrap="square" rtlCol="0" anchor="ctr"/>
+          <a:lstStyle/>
+          <a:p>
+            <a:pPr marL="0" indent="0" algn="ctr">
               <a:buNone/>
             </a:pPr>
             <a:r>
@@ -5210,9 +6332,9 @@
                 <a:solidFill>
                   <a:srgbClr val="7B1FA2"/>
                 </a:solidFill>
-                <a:latin typeface="Microsoft YaHei" pitchFamily="34" charset="0"/>
-                <a:ea typeface="Microsoft YaHei" pitchFamily="34" charset="-122"/>
-                <a:cs typeface="Microsoft YaHei" pitchFamily="34" charset="-120"/>
+                <a:latin typeface="微软雅黑" pitchFamily="34" charset="0"/>
+                <a:ea typeface="微软雅黑" pitchFamily="34" charset="-122"/>
+                <a:cs typeface="微软雅黑" pitchFamily="34" charset="-120"/>
               </a:rPr>
               <a:t>IoT 设备</a:t>
             </a:r>
@@ -5235,13 +6357,12 @@
             <a:avLst/>
           </a:prstGeom>
           <a:noFill/>
-          <a:ln/>
-        </p:spPr>
-        <p:txBody>
-          <a:bodyPr wrap="square" rtlCol="0" anchor="ctr"/>
-          <a:lstStyle/>
-          <a:p>
-            <a:pPr algn="ctr" indent="0" marL="0">
+        </p:spPr>
+        <p:txBody>
+          <a:bodyPr wrap="square" rtlCol="0" anchor="ctr"/>
+          <a:lstStyle/>
+          <a:p>
+            <a:pPr marL="0" indent="0" algn="ctr">
               <a:buNone/>
             </a:pPr>
             <a:r>
@@ -5298,13 +6419,12 @@
             <a:avLst/>
           </a:prstGeom>
           <a:noFill/>
-          <a:ln/>
-        </p:spPr>
-        <p:txBody>
-          <a:bodyPr wrap="square" rtlCol="0" anchor="ctr"/>
-          <a:lstStyle/>
-          <a:p>
-            <a:pPr algn="ctr" indent="0" marL="0">
+        </p:spPr>
+        <p:txBody>
+          <a:bodyPr wrap="square" rtlCol="0" anchor="ctr"/>
+          <a:lstStyle/>
+          <a:p>
+            <a:pPr marL="0" indent="0" algn="ctr">
               <a:buNone/>
             </a:pPr>
             <a:r>
@@ -5312,9 +6432,9 @@
                 <a:solidFill>
                   <a:srgbClr val="7B1FA2"/>
                 </a:solidFill>
-                <a:latin typeface="Microsoft YaHei" pitchFamily="34" charset="0"/>
-                <a:ea typeface="Microsoft YaHei" pitchFamily="34" charset="-122"/>
-                <a:cs typeface="Microsoft YaHei" pitchFamily="34" charset="-120"/>
+                <a:latin typeface="微软雅黑" pitchFamily="34" charset="0"/>
+                <a:ea typeface="微软雅黑" pitchFamily="34" charset="-122"/>
+                <a:cs typeface="微软雅黑" pitchFamily="34" charset="-120"/>
               </a:rPr>
               <a:t>MQTT 网关</a:t>
             </a:r>
@@ -5337,13 +6457,12 @@
             <a:avLst/>
           </a:prstGeom>
           <a:noFill/>
-          <a:ln/>
-        </p:spPr>
-        <p:txBody>
-          <a:bodyPr wrap="square" rtlCol="0" anchor="ctr"/>
-          <a:lstStyle/>
-          <a:p>
-            <a:pPr algn="ctr" indent="0" marL="0">
+        </p:spPr>
+        <p:txBody>
+          <a:bodyPr wrap="square" rtlCol="0" anchor="ctr"/>
+          <a:lstStyle/>
+          <a:p>
+            <a:pPr marL="0" indent="0" algn="ctr">
               <a:buNone/>
             </a:pPr>
             <a:r>
@@ -5400,13 +6519,12 @@
             <a:avLst/>
           </a:prstGeom>
           <a:noFill/>
-          <a:ln/>
-        </p:spPr>
-        <p:txBody>
-          <a:bodyPr wrap="square" rtlCol="0" anchor="ctr"/>
-          <a:lstStyle/>
-          <a:p>
-            <a:pPr algn="ctr" indent="0" marL="0">
+        </p:spPr>
+        <p:txBody>
+          <a:bodyPr wrap="square" rtlCol="0" anchor="ctr"/>
+          <a:lstStyle/>
+          <a:p>
+            <a:pPr marL="0" indent="0" algn="ctr">
               <a:buNone/>
             </a:pPr>
             <a:r>
@@ -5414,9 +6532,9 @@
                 <a:solidFill>
                   <a:srgbClr val="7B1FA2"/>
                 </a:solidFill>
-                <a:latin typeface="Microsoft YaHei" pitchFamily="34" charset="0"/>
-                <a:ea typeface="Microsoft YaHei" pitchFamily="34" charset="-122"/>
-                <a:cs typeface="Microsoft YaHei" pitchFamily="34" charset="-120"/>
+                <a:latin typeface="微软雅黑" pitchFamily="34" charset="0"/>
+                <a:ea typeface="微软雅黑" pitchFamily="34" charset="-122"/>
+                <a:cs typeface="微软雅黑" pitchFamily="34" charset="-120"/>
               </a:rPr>
               <a:t>Kafka</a:t>
             </a:r>
@@ -5439,13 +6557,12 @@
             <a:avLst/>
           </a:prstGeom>
           <a:noFill/>
-          <a:ln/>
-        </p:spPr>
-        <p:txBody>
-          <a:bodyPr wrap="square" rtlCol="0" anchor="ctr"/>
-          <a:lstStyle/>
-          <a:p>
-            <a:pPr algn="ctr" indent="0" marL="0">
+        </p:spPr>
+        <p:txBody>
+          <a:bodyPr wrap="square" rtlCol="0" anchor="ctr"/>
+          <a:lstStyle/>
+          <a:p>
+            <a:pPr marL="0" indent="0" algn="ctr">
               <a:buNone/>
             </a:pPr>
             <a:r>
@@ -5502,13 +6619,12 @@
             <a:avLst/>
           </a:prstGeom>
           <a:noFill/>
-          <a:ln/>
-        </p:spPr>
-        <p:txBody>
-          <a:bodyPr wrap="square" rtlCol="0" anchor="ctr"/>
-          <a:lstStyle/>
-          <a:p>
-            <a:pPr algn="ctr" indent="0" marL="0">
+        </p:spPr>
+        <p:txBody>
+          <a:bodyPr wrap="square" rtlCol="0" anchor="ctr"/>
+          <a:lstStyle/>
+          <a:p>
+            <a:pPr marL="0" indent="0" algn="ctr">
               <a:buNone/>
             </a:pPr>
             <a:r>
@@ -5516,16 +6632,16 @@
                 <a:solidFill>
                   <a:srgbClr val="7B1FA2"/>
                 </a:solidFill>
-                <a:latin typeface="Microsoft YaHei" pitchFamily="34" charset="0"/>
-                <a:ea typeface="Microsoft YaHei" pitchFamily="34" charset="-122"/>
-                <a:cs typeface="Microsoft YaHei" pitchFamily="34" charset="-120"/>
+                <a:latin typeface="微软雅黑" pitchFamily="34" charset="0"/>
+                <a:ea typeface="微软雅黑" pitchFamily="34" charset="-122"/>
+                <a:cs typeface="微软雅黑" pitchFamily="34" charset="-120"/>
               </a:rPr>
               <a:t>Flink</a:t>
             </a:r>
             <a:endParaRPr lang="en-US" sz="800" dirty="0"/>
           </a:p>
           <a:p>
-            <a:pPr algn="ctr" indent="0" marL="0">
+            <a:pPr marL="0" indent="0" algn="ctr">
               <a:buNone/>
             </a:pPr>
             <a:r>
@@ -5533,9 +6649,9 @@
                 <a:solidFill>
                   <a:srgbClr val="7B1FA2"/>
                 </a:solidFill>
-                <a:latin typeface="Microsoft YaHei" pitchFamily="34" charset="0"/>
-                <a:ea typeface="Microsoft YaHei" pitchFamily="34" charset="-122"/>
-                <a:cs typeface="Microsoft YaHei" pitchFamily="34" charset="-120"/>
+                <a:latin typeface="微软雅黑" pitchFamily="34" charset="0"/>
+                <a:ea typeface="微软雅黑" pitchFamily="34" charset="-122"/>
+                <a:cs typeface="微软雅黑" pitchFamily="34" charset="-120"/>
               </a:rPr>
               <a:t>实时清洗</a:t>
             </a:r>
@@ -5558,13 +6674,12 @@
             <a:avLst/>
           </a:prstGeom>
           <a:noFill/>
-          <a:ln/>
-        </p:spPr>
-        <p:txBody>
-          <a:bodyPr wrap="square" rtlCol="0" anchor="ctr"/>
-          <a:lstStyle/>
-          <a:p>
-            <a:pPr algn="ctr" indent="0" marL="0">
+        </p:spPr>
+        <p:txBody>
+          <a:bodyPr wrap="square" rtlCol="0" anchor="ctr"/>
+          <a:lstStyle/>
+          <a:p>
+            <a:pPr marL="0" indent="0" algn="ctr">
               <a:buNone/>
             </a:pPr>
             <a:r>
@@ -5621,13 +6736,12 @@
             <a:avLst/>
           </a:prstGeom>
           <a:noFill/>
-          <a:ln/>
-        </p:spPr>
-        <p:txBody>
-          <a:bodyPr wrap="square" rtlCol="0" anchor="ctr"/>
-          <a:lstStyle/>
-          <a:p>
-            <a:pPr algn="ctr" indent="0" marL="0">
+        </p:spPr>
+        <p:txBody>
+          <a:bodyPr wrap="square" rtlCol="0" anchor="ctr"/>
+          <a:lstStyle/>
+          <a:p>
+            <a:pPr marL="0" indent="0" algn="ctr">
               <a:buNone/>
             </a:pPr>
             <a:r>
@@ -5635,16 +6749,16 @@
                 <a:solidFill>
                   <a:srgbClr val="7B1FA2"/>
                 </a:solidFill>
-                <a:latin typeface="Microsoft YaHei" pitchFamily="34" charset="0"/>
-                <a:ea typeface="Microsoft YaHei" pitchFamily="34" charset="-122"/>
-                <a:cs typeface="Microsoft YaHei" pitchFamily="34" charset="-120"/>
+                <a:latin typeface="微软雅黑" pitchFamily="34" charset="0"/>
+                <a:ea typeface="微软雅黑" pitchFamily="34" charset="-122"/>
+                <a:cs typeface="微软雅黑" pitchFamily="34" charset="-120"/>
               </a:rPr>
               <a:t>Hive IoT</a:t>
             </a:r>
             <a:endParaRPr lang="en-US" sz="800" dirty="0"/>
           </a:p>
           <a:p>
-            <a:pPr algn="ctr" indent="0" marL="0">
+            <a:pPr marL="0" indent="0" algn="ctr">
               <a:buNone/>
             </a:pPr>
             <a:r>
@@ -5652,9 +6766,9 @@
                 <a:solidFill>
                   <a:srgbClr val="7B1FA2"/>
                 </a:solidFill>
-                <a:latin typeface="Microsoft YaHei" pitchFamily="34" charset="0"/>
-                <a:ea typeface="Microsoft YaHei" pitchFamily="34" charset="-122"/>
-                <a:cs typeface="Microsoft YaHei" pitchFamily="34" charset="-120"/>
+                <a:latin typeface="微软雅黑" pitchFamily="34" charset="0"/>
+                <a:ea typeface="微软雅黑" pitchFamily="34" charset="-122"/>
+                <a:cs typeface="微软雅黑" pitchFamily="34" charset="-120"/>
               </a:rPr>
               <a:t>时序表 S3</a:t>
             </a:r>
@@ -5677,13 +6791,12 @@
             <a:avLst/>
           </a:prstGeom>
           <a:noFill/>
-          <a:ln/>
-        </p:spPr>
-        <p:txBody>
-          <a:bodyPr wrap="square" rtlCol="0" anchor="ctr"/>
-          <a:lstStyle/>
-          <a:p>
-            <a:pPr algn="ctr" indent="0" marL="0">
+        </p:spPr>
+        <p:txBody>
+          <a:bodyPr wrap="square" rtlCol="0" anchor="ctr"/>
+          <a:lstStyle/>
+          <a:p>
+            <a:pPr marL="0" indent="0" algn="ctr">
               <a:buNone/>
             </a:pPr>
             <a:r>
@@ -5740,13 +6853,12 @@
             <a:avLst/>
           </a:prstGeom>
           <a:noFill/>
-          <a:ln/>
-        </p:spPr>
-        <p:txBody>
-          <a:bodyPr wrap="square" rtlCol="0" anchor="ctr"/>
-          <a:lstStyle/>
-          <a:p>
-            <a:pPr algn="ctr" indent="0" marL="0">
+        </p:spPr>
+        <p:txBody>
+          <a:bodyPr wrap="square" rtlCol="0" anchor="ctr"/>
+          <a:lstStyle/>
+          <a:p>
+            <a:pPr marL="0" indent="0" algn="ctr">
               <a:buNone/>
             </a:pPr>
             <a:r>
@@ -5754,16 +6866,16 @@
                 <a:solidFill>
                   <a:srgbClr val="7B1FA2"/>
                 </a:solidFill>
-                <a:latin typeface="Microsoft YaHei" pitchFamily="34" charset="0"/>
-                <a:ea typeface="Microsoft YaHei" pitchFamily="34" charset="-122"/>
-                <a:cs typeface="Microsoft YaHei" pitchFamily="34" charset="-120"/>
+                <a:latin typeface="微软雅黑" pitchFamily="34" charset="0"/>
+                <a:ea typeface="微软雅黑" pitchFamily="34" charset="-122"/>
+                <a:cs typeface="微软雅黑" pitchFamily="34" charset="-120"/>
               </a:rPr>
               <a:t>StarRocks</a:t>
             </a:r>
             <a:endParaRPr lang="en-US" sz="800" dirty="0"/>
           </a:p>
           <a:p>
-            <a:pPr algn="ctr" indent="0" marL="0">
+            <a:pPr marL="0" indent="0" algn="ctr">
               <a:buNone/>
             </a:pPr>
             <a:r>
@@ -5771,9 +6883,9 @@
                 <a:solidFill>
                   <a:srgbClr val="7B1FA2"/>
                 </a:solidFill>
-                <a:latin typeface="Microsoft YaHei" pitchFamily="34" charset="0"/>
-                <a:ea typeface="Microsoft YaHei" pitchFamily="34" charset="-122"/>
-                <a:cs typeface="Microsoft YaHei" pitchFamily="34" charset="-120"/>
+                <a:latin typeface="微软雅黑" pitchFamily="34" charset="0"/>
+                <a:ea typeface="微软雅黑" pitchFamily="34" charset="-122"/>
+                <a:cs typeface="微软雅黑" pitchFamily="34" charset="-120"/>
               </a:rPr>
               <a:t>OLAP</a:t>
             </a:r>
@@ -5796,13 +6908,12 @@
             <a:avLst/>
           </a:prstGeom>
           <a:noFill/>
-          <a:ln/>
-        </p:spPr>
-        <p:txBody>
-          <a:bodyPr wrap="square" rtlCol="0" anchor="ctr"/>
-          <a:lstStyle/>
-          <a:p>
-            <a:pPr algn="r" indent="0" marL="0">
+        </p:spPr>
+        <p:txBody>
+          <a:bodyPr wrap="square" rtlCol="0" anchor="ctr"/>
+          <a:lstStyle/>
+          <a:p>
+            <a:pPr marL="0" indent="0" algn="r">
               <a:buNone/>
             </a:pPr>
             <a:r>
@@ -5810,9 +6921,9 @@
                 <a:solidFill>
                   <a:srgbClr val="2E7D32"/>
                 </a:solidFill>
-                <a:latin typeface="Microsoft YaHei" pitchFamily="34" charset="0"/>
-                <a:ea typeface="Microsoft YaHei" pitchFamily="34" charset="-122"/>
-                <a:cs typeface="Microsoft YaHei" pitchFamily="34" charset="-120"/>
+                <a:latin typeface="微软雅黑" pitchFamily="34" charset="0"/>
+                <a:ea typeface="微软雅黑" pitchFamily="34" charset="-122"/>
+                <a:cs typeface="微软雅黑" pitchFamily="34" charset="-120"/>
               </a:rPr>
               <a:t>链路 2 — 遥感批量</a:t>
             </a:r>
@@ -5862,13 +6973,12 @@
             <a:avLst/>
           </a:prstGeom>
           <a:noFill/>
-          <a:ln/>
-        </p:spPr>
-        <p:txBody>
-          <a:bodyPr wrap="square" rtlCol="0" anchor="ctr"/>
-          <a:lstStyle/>
-          <a:p>
-            <a:pPr algn="ctr" indent="0" marL="0">
+        </p:spPr>
+        <p:txBody>
+          <a:bodyPr wrap="square" rtlCol="0" anchor="ctr"/>
+          <a:lstStyle/>
+          <a:p>
+            <a:pPr marL="0" indent="0" algn="ctr">
               <a:buNone/>
             </a:pPr>
             <a:r>
@@ -5876,16 +6986,16 @@
                 <a:solidFill>
                   <a:srgbClr val="2E7D32"/>
                 </a:solidFill>
-                <a:latin typeface="Microsoft YaHei" pitchFamily="34" charset="0"/>
-                <a:ea typeface="Microsoft YaHei" pitchFamily="34" charset="-122"/>
-                <a:cs typeface="Microsoft YaHei" pitchFamily="34" charset="-120"/>
+                <a:latin typeface="微软雅黑" pitchFamily="34" charset="0"/>
+                <a:ea typeface="微软雅黑" pitchFamily="34" charset="-122"/>
+                <a:cs typeface="微软雅黑" pitchFamily="34" charset="-120"/>
               </a:rPr>
               <a:t>遥感文件</a:t>
             </a:r>
             <a:endParaRPr lang="en-US" sz="800" dirty="0"/>
           </a:p>
           <a:p>
-            <a:pPr algn="ctr" indent="0" marL="0">
+            <a:pPr marL="0" indent="0" algn="ctr">
               <a:buNone/>
             </a:pPr>
             <a:r>
@@ -5893,9 +7003,9 @@
                 <a:solidFill>
                   <a:srgbClr val="2E7D32"/>
                 </a:solidFill>
-                <a:latin typeface="Microsoft YaHei" pitchFamily="34" charset="0"/>
-                <a:ea typeface="Microsoft YaHei" pitchFamily="34" charset="-122"/>
-                <a:cs typeface="Microsoft YaHei" pitchFamily="34" charset="-120"/>
+                <a:latin typeface="微软雅黑" pitchFamily="34" charset="0"/>
+                <a:ea typeface="微软雅黑" pitchFamily="34" charset="-122"/>
+                <a:cs typeface="微软雅黑" pitchFamily="34" charset="-120"/>
               </a:rPr>
               <a:t>tiff/nc</a:t>
             </a:r>
@@ -5918,13 +7028,12 @@
             <a:avLst/>
           </a:prstGeom>
           <a:noFill/>
-          <a:ln/>
-        </p:spPr>
-        <p:txBody>
-          <a:bodyPr wrap="square" rtlCol="0" anchor="ctr"/>
-          <a:lstStyle/>
-          <a:p>
-            <a:pPr algn="ctr" indent="0" marL="0">
+        </p:spPr>
+        <p:txBody>
+          <a:bodyPr wrap="square" rtlCol="0" anchor="ctr"/>
+          <a:lstStyle/>
+          <a:p>
+            <a:pPr marL="0" indent="0" algn="ctr">
               <a:buNone/>
             </a:pPr>
             <a:r>
@@ -5981,13 +7090,12 @@
             <a:avLst/>
           </a:prstGeom>
           <a:noFill/>
-          <a:ln/>
-        </p:spPr>
-        <p:txBody>
-          <a:bodyPr wrap="square" rtlCol="0" anchor="ctr"/>
-          <a:lstStyle/>
-          <a:p>
-            <a:pPr algn="ctr" indent="0" marL="0">
+        </p:spPr>
+        <p:txBody>
+          <a:bodyPr wrap="square" rtlCol="0" anchor="ctr"/>
+          <a:lstStyle/>
+          <a:p>
+            <a:pPr marL="0" indent="0" algn="ctr">
               <a:buNone/>
             </a:pPr>
             <a:r>
@@ -5995,16 +7103,16 @@
                 <a:solidFill>
                   <a:srgbClr val="2E7D32"/>
                 </a:solidFill>
-                <a:latin typeface="Microsoft YaHei" pitchFamily="34" charset="0"/>
-                <a:ea typeface="Microsoft YaHei" pitchFamily="34" charset="-122"/>
-                <a:cs typeface="Microsoft YaHei" pitchFamily="34" charset="-120"/>
+                <a:latin typeface="微软雅黑" pitchFamily="34" charset="0"/>
+                <a:ea typeface="微软雅黑" pitchFamily="34" charset="-122"/>
+                <a:cs typeface="微软雅黑" pitchFamily="34" charset="-120"/>
               </a:rPr>
               <a:t>文件接入</a:t>
             </a:r>
             <a:endParaRPr lang="en-US" sz="800" dirty="0"/>
           </a:p>
           <a:p>
-            <a:pPr algn="ctr" indent="0" marL="0">
+            <a:pPr marL="0" indent="0" algn="ctr">
               <a:buNone/>
             </a:pPr>
             <a:r>
@@ -6012,9 +7120,9 @@
                 <a:solidFill>
                   <a:srgbClr val="2E7D32"/>
                 </a:solidFill>
-                <a:latin typeface="Microsoft YaHei" pitchFamily="34" charset="0"/>
-                <a:ea typeface="Microsoft YaHei" pitchFamily="34" charset="-122"/>
-                <a:cs typeface="Microsoft YaHei" pitchFamily="34" charset="-120"/>
+                <a:latin typeface="微软雅黑" pitchFamily="34" charset="0"/>
+                <a:ea typeface="微软雅黑" pitchFamily="34" charset="-122"/>
+                <a:cs typeface="微软雅黑" pitchFamily="34" charset="-120"/>
               </a:rPr>
               <a:t>网关</a:t>
             </a:r>
@@ -6037,13 +7145,12 @@
             <a:avLst/>
           </a:prstGeom>
           <a:noFill/>
-          <a:ln/>
-        </p:spPr>
-        <p:txBody>
-          <a:bodyPr wrap="square" rtlCol="0" anchor="ctr"/>
-          <a:lstStyle/>
-          <a:p>
-            <a:pPr algn="ctr" indent="0" marL="0">
+        </p:spPr>
+        <p:txBody>
+          <a:bodyPr wrap="square" rtlCol="0" anchor="ctr"/>
+          <a:lstStyle/>
+          <a:p>
+            <a:pPr marL="0" indent="0" algn="ctr">
               <a:buNone/>
             </a:pPr>
             <a:r>
@@ -6100,13 +7207,12 @@
             <a:avLst/>
           </a:prstGeom>
           <a:noFill/>
-          <a:ln/>
-        </p:spPr>
-        <p:txBody>
-          <a:bodyPr wrap="square" rtlCol="0" anchor="ctr"/>
-          <a:lstStyle/>
-          <a:p>
-            <a:pPr algn="ctr" indent="0" marL="0">
+        </p:spPr>
+        <p:txBody>
+          <a:bodyPr wrap="square" rtlCol="0" anchor="ctr"/>
+          <a:lstStyle/>
+          <a:p>
+            <a:pPr marL="0" indent="0" algn="ctr">
               <a:buNone/>
             </a:pPr>
             <a:r>
@@ -6114,16 +7220,16 @@
                 <a:solidFill>
                   <a:srgbClr val="2E7D32"/>
                 </a:solidFill>
-                <a:latin typeface="Microsoft YaHei" pitchFamily="34" charset="0"/>
-                <a:ea typeface="Microsoft YaHei" pitchFamily="34" charset="-122"/>
-                <a:cs typeface="Microsoft YaHei" pitchFamily="34" charset="-120"/>
+                <a:latin typeface="微软雅黑" pitchFamily="34" charset="0"/>
+                <a:ea typeface="微软雅黑" pitchFamily="34" charset="-122"/>
+                <a:cs typeface="微软雅黑" pitchFamily="34" charset="-120"/>
               </a:rPr>
               <a:t>S3 原始</a:t>
             </a:r>
             <a:endParaRPr lang="en-US" sz="800" dirty="0"/>
           </a:p>
           <a:p>
-            <a:pPr algn="ctr" indent="0" marL="0">
+            <a:pPr marL="0" indent="0" algn="ctr">
               <a:buNone/>
             </a:pPr>
             <a:r>
@@ -6131,9 +7237,9 @@
                 <a:solidFill>
                   <a:srgbClr val="2E7D32"/>
                 </a:solidFill>
-                <a:latin typeface="Microsoft YaHei" pitchFamily="34" charset="0"/>
-                <a:ea typeface="Microsoft YaHei" pitchFamily="34" charset="-122"/>
-                <a:cs typeface="Microsoft YaHei" pitchFamily="34" charset="-120"/>
+                <a:latin typeface="微软雅黑" pitchFamily="34" charset="0"/>
+                <a:ea typeface="微软雅黑" pitchFamily="34" charset="-122"/>
+                <a:cs typeface="微软雅黑" pitchFamily="34" charset="-120"/>
               </a:rPr>
               <a:t>文件区</a:t>
             </a:r>
@@ -6156,13 +7262,12 @@
             <a:avLst/>
           </a:prstGeom>
           <a:noFill/>
-          <a:ln/>
-        </p:spPr>
-        <p:txBody>
-          <a:bodyPr wrap="square" rtlCol="0" anchor="ctr"/>
-          <a:lstStyle/>
-          <a:p>
-            <a:pPr algn="ctr" indent="0" marL="0">
+        </p:spPr>
+        <p:txBody>
+          <a:bodyPr wrap="square" rtlCol="0" anchor="ctr"/>
+          <a:lstStyle/>
+          <a:p>
+            <a:pPr marL="0" indent="0" algn="ctr">
               <a:buNone/>
             </a:pPr>
             <a:r>
@@ -6219,13 +7324,12 @@
             <a:avLst/>
           </a:prstGeom>
           <a:noFill/>
-          <a:ln/>
-        </p:spPr>
-        <p:txBody>
-          <a:bodyPr wrap="square" rtlCol="0" anchor="ctr"/>
-          <a:lstStyle/>
-          <a:p>
-            <a:pPr algn="ctr" indent="0" marL="0">
+        </p:spPr>
+        <p:txBody>
+          <a:bodyPr wrap="square" rtlCol="0" anchor="ctr"/>
+          <a:lstStyle/>
+          <a:p>
+            <a:pPr marL="0" indent="0" algn="ctr">
               <a:buNone/>
             </a:pPr>
             <a:r>
@@ -6233,16 +7337,16 @@
                 <a:solidFill>
                   <a:srgbClr val="2E7D32"/>
                 </a:solidFill>
-                <a:latin typeface="Microsoft YaHei" pitchFamily="34" charset="0"/>
-                <a:ea typeface="Microsoft YaHei" pitchFamily="34" charset="-122"/>
-                <a:cs typeface="Microsoft YaHei" pitchFamily="34" charset="-120"/>
+                <a:latin typeface="微软雅黑" pitchFamily="34" charset="0"/>
+                <a:ea typeface="微软雅黑" pitchFamily="34" charset="-122"/>
+                <a:cs typeface="微软雅黑" pitchFamily="34" charset="-120"/>
               </a:rPr>
               <a:t>Spark</a:t>
             </a:r>
             <a:endParaRPr lang="en-US" sz="800" dirty="0"/>
           </a:p>
           <a:p>
-            <a:pPr algn="ctr" indent="0" marL="0">
+            <a:pPr marL="0" indent="0" algn="ctr">
               <a:buNone/>
             </a:pPr>
             <a:r>
@@ -6250,9 +7354,9 @@
                 <a:solidFill>
                   <a:srgbClr val="2E7D32"/>
                 </a:solidFill>
-                <a:latin typeface="Microsoft YaHei" pitchFamily="34" charset="0"/>
-                <a:ea typeface="Microsoft YaHei" pitchFamily="34" charset="-122"/>
-                <a:cs typeface="Microsoft YaHei" pitchFamily="34" charset="-120"/>
+                <a:latin typeface="微软雅黑" pitchFamily="34" charset="0"/>
+                <a:ea typeface="微软雅黑" pitchFamily="34" charset="-122"/>
+                <a:cs typeface="微软雅黑" pitchFamily="34" charset="-120"/>
               </a:rPr>
               <a:t>分块解析</a:t>
             </a:r>
@@ -6275,13 +7379,12 @@
             <a:avLst/>
           </a:prstGeom>
           <a:noFill/>
-          <a:ln/>
-        </p:spPr>
-        <p:txBody>
-          <a:bodyPr wrap="square" rtlCol="0" anchor="ctr"/>
-          <a:lstStyle/>
-          <a:p>
-            <a:pPr algn="ctr" indent="0" marL="0">
+        </p:spPr>
+        <p:txBody>
+          <a:bodyPr wrap="square" rtlCol="0" anchor="ctr"/>
+          <a:lstStyle/>
+          <a:p>
+            <a:pPr marL="0" indent="0" algn="ctr">
               <a:buNone/>
             </a:pPr>
             <a:r>
@@ -6338,13 +7441,12 @@
             <a:avLst/>
           </a:prstGeom>
           <a:noFill/>
-          <a:ln/>
-        </p:spPr>
-        <p:txBody>
-          <a:bodyPr wrap="square" rtlCol="0" anchor="ctr"/>
-          <a:lstStyle/>
-          <a:p>
-            <a:pPr algn="ctr" indent="0" marL="0">
+        </p:spPr>
+        <p:txBody>
+          <a:bodyPr wrap="square" rtlCol="0" anchor="ctr"/>
+          <a:lstStyle/>
+          <a:p>
+            <a:pPr marL="0" indent="0" algn="ctr">
               <a:buNone/>
             </a:pPr>
             <a:r>
@@ -6352,16 +7454,16 @@
                 <a:solidFill>
                   <a:srgbClr val="2E7D32"/>
                 </a:solidFill>
-                <a:latin typeface="Microsoft YaHei" pitchFamily="34" charset="0"/>
-                <a:ea typeface="Microsoft YaHei" pitchFamily="34" charset="-122"/>
-                <a:cs typeface="Microsoft YaHei" pitchFamily="34" charset="-120"/>
+                <a:latin typeface="微软雅黑" pitchFamily="34" charset="0"/>
+                <a:ea typeface="微软雅黑" pitchFamily="34" charset="-122"/>
+                <a:cs typeface="微软雅黑" pitchFamily="34" charset="-120"/>
               </a:rPr>
               <a:t>Hive 遥感</a:t>
             </a:r>
             <a:endParaRPr lang="en-US" sz="800" dirty="0"/>
           </a:p>
           <a:p>
-            <a:pPr algn="ctr" indent="0" marL="0">
+            <a:pPr marL="0" indent="0" algn="ctr">
               <a:buNone/>
             </a:pPr>
             <a:r>
@@ -6369,9 +7471,9 @@
                 <a:solidFill>
                   <a:srgbClr val="2E7D32"/>
                 </a:solidFill>
-                <a:latin typeface="Microsoft YaHei" pitchFamily="34" charset="0"/>
-                <a:ea typeface="Microsoft YaHei" pitchFamily="34" charset="-122"/>
-                <a:cs typeface="Microsoft YaHei" pitchFamily="34" charset="-120"/>
+                <a:latin typeface="微软雅黑" pitchFamily="34" charset="0"/>
+                <a:ea typeface="微软雅黑" pitchFamily="34" charset="-122"/>
+                <a:cs typeface="微软雅黑" pitchFamily="34" charset="-120"/>
               </a:rPr>
               <a:t>表 S3</a:t>
             </a:r>
@@ -6394,13 +7496,12 @@
             <a:avLst/>
           </a:prstGeom>
           <a:noFill/>
-          <a:ln/>
-        </p:spPr>
-        <p:txBody>
-          <a:bodyPr wrap="square" rtlCol="0" anchor="ctr"/>
-          <a:lstStyle/>
-          <a:p>
-            <a:pPr algn="ctr" indent="0" marL="0">
+        </p:spPr>
+        <p:txBody>
+          <a:bodyPr wrap="square" rtlCol="0" anchor="ctr"/>
+          <a:lstStyle/>
+          <a:p>
+            <a:pPr marL="0" indent="0" algn="ctr">
               <a:buNone/>
             </a:pPr>
             <a:r>
@@ -6457,13 +7558,12 @@
             <a:avLst/>
           </a:prstGeom>
           <a:noFill/>
-          <a:ln/>
-        </p:spPr>
-        <p:txBody>
-          <a:bodyPr wrap="square" rtlCol="0" anchor="ctr"/>
-          <a:lstStyle/>
-          <a:p>
-            <a:pPr algn="ctr" indent="0" marL="0">
+        </p:spPr>
+        <p:txBody>
+          <a:bodyPr wrap="square" rtlCol="0" anchor="ctr"/>
+          <a:lstStyle/>
+          <a:p>
+            <a:pPr marL="0" indent="0" algn="ctr">
               <a:buNone/>
             </a:pPr>
             <a:r>
@@ -6471,16 +7571,16 @@
                 <a:solidFill>
                   <a:srgbClr val="2E7D32"/>
                 </a:solidFill>
-                <a:latin typeface="Microsoft YaHei" pitchFamily="34" charset="0"/>
-                <a:ea typeface="Microsoft YaHei" pitchFamily="34" charset="-122"/>
-                <a:cs typeface="Microsoft YaHei" pitchFamily="34" charset="-120"/>
+                <a:latin typeface="微软雅黑" pitchFamily="34" charset="0"/>
+                <a:ea typeface="微软雅黑" pitchFamily="34" charset="-122"/>
+                <a:cs typeface="微软雅黑" pitchFamily="34" charset="-120"/>
               </a:rPr>
               <a:t>模型</a:t>
             </a:r>
             <a:endParaRPr lang="en-US" sz="800" dirty="0"/>
           </a:p>
           <a:p>
-            <a:pPr algn="ctr" indent="0" marL="0">
+            <a:pPr marL="0" indent="0" algn="ctr">
               <a:buNone/>
             </a:pPr>
             <a:r>
@@ -6488,9 +7588,9 @@
                 <a:solidFill>
                   <a:srgbClr val="2E7D32"/>
                 </a:solidFill>
-                <a:latin typeface="Microsoft YaHei" pitchFamily="34" charset="0"/>
-                <a:ea typeface="Microsoft YaHei" pitchFamily="34" charset="-122"/>
-                <a:cs typeface="Microsoft YaHei" pitchFamily="34" charset="-120"/>
+                <a:latin typeface="微软雅黑" pitchFamily="34" charset="0"/>
+                <a:ea typeface="微软雅黑" pitchFamily="34" charset="-122"/>
+                <a:cs typeface="微软雅黑" pitchFamily="34" charset="-120"/>
               </a:rPr>
               <a:t>训练</a:t>
             </a:r>
@@ -6513,13 +7613,12 @@
             <a:avLst/>
           </a:prstGeom>
           <a:noFill/>
-          <a:ln/>
-        </p:spPr>
-        <p:txBody>
-          <a:bodyPr wrap="square" rtlCol="0" anchor="ctr"/>
-          <a:lstStyle/>
-          <a:p>
-            <a:pPr algn="r" indent="0" marL="0">
+        </p:spPr>
+        <p:txBody>
+          <a:bodyPr wrap="square" rtlCol="0" anchor="ctr"/>
+          <a:lstStyle/>
+          <a:p>
+            <a:pPr marL="0" indent="0" algn="r">
               <a:buNone/>
             </a:pPr>
             <a:r>
@@ -6527,9 +7626,9 @@
                 <a:solidFill>
                   <a:srgbClr val="1565C0"/>
                 </a:solidFill>
-                <a:latin typeface="Microsoft YaHei" pitchFamily="34" charset="0"/>
-                <a:ea typeface="Microsoft YaHei" pitchFamily="34" charset="-122"/>
-                <a:cs typeface="Microsoft YaHei" pitchFamily="34" charset="-120"/>
+                <a:latin typeface="微软雅黑" pitchFamily="34" charset="0"/>
+                <a:ea typeface="微软雅黑" pitchFamily="34" charset="-122"/>
+                <a:cs typeface="微软雅黑" pitchFamily="34" charset="-120"/>
               </a:rPr>
               <a:t>链路 3 — CDC 实时</a:t>
             </a:r>
@@ -6579,13 +7678,12 @@
             <a:avLst/>
           </a:prstGeom>
           <a:noFill/>
-          <a:ln/>
-        </p:spPr>
-        <p:txBody>
-          <a:bodyPr wrap="square" rtlCol="0" anchor="ctr"/>
-          <a:lstStyle/>
-          <a:p>
-            <a:pPr algn="ctr" indent="0" marL="0">
+        </p:spPr>
+        <p:txBody>
+          <a:bodyPr wrap="square" rtlCol="0" anchor="ctr"/>
+          <a:lstStyle/>
+          <a:p>
+            <a:pPr marL="0" indent="0" algn="ctr">
               <a:buNone/>
             </a:pPr>
             <a:r>
@@ -6593,16 +7691,16 @@
                 <a:solidFill>
                   <a:srgbClr val="1565C0"/>
                 </a:solidFill>
-                <a:latin typeface="Microsoft YaHei" pitchFamily="34" charset="0"/>
-                <a:ea typeface="Microsoft YaHei" pitchFamily="34" charset="-122"/>
-                <a:cs typeface="Microsoft YaHei" pitchFamily="34" charset="-120"/>
+                <a:latin typeface="微软雅黑" pitchFamily="34" charset="0"/>
+                <a:ea typeface="微软雅黑" pitchFamily="34" charset="-122"/>
+                <a:cs typeface="微软雅黑" pitchFamily="34" charset="-120"/>
               </a:rPr>
               <a:t>MySQL</a:t>
             </a:r>
             <a:endParaRPr lang="en-US" sz="800" dirty="0"/>
           </a:p>
           <a:p>
-            <a:pPr algn="ctr" indent="0" marL="0">
+            <a:pPr marL="0" indent="0" algn="ctr">
               <a:buNone/>
             </a:pPr>
             <a:r>
@@ -6610,9 +7708,9 @@
                 <a:solidFill>
                   <a:srgbClr val="1565C0"/>
                 </a:solidFill>
-                <a:latin typeface="Microsoft YaHei" pitchFamily="34" charset="0"/>
-                <a:ea typeface="Microsoft YaHei" pitchFamily="34" charset="-122"/>
-                <a:cs typeface="Microsoft YaHei" pitchFamily="34" charset="-120"/>
+                <a:latin typeface="微软雅黑" pitchFamily="34" charset="0"/>
+                <a:ea typeface="微软雅黑" pitchFamily="34" charset="-122"/>
+                <a:cs typeface="微软雅黑" pitchFamily="34" charset="-120"/>
               </a:rPr>
               <a:t>PG</a:t>
             </a:r>
@@ -6635,13 +7733,12 @@
             <a:avLst/>
           </a:prstGeom>
           <a:noFill/>
-          <a:ln/>
-        </p:spPr>
-        <p:txBody>
-          <a:bodyPr wrap="square" rtlCol="0" anchor="ctr"/>
-          <a:lstStyle/>
-          <a:p>
-            <a:pPr algn="ctr" indent="0" marL="0">
+        </p:spPr>
+        <p:txBody>
+          <a:bodyPr wrap="square" rtlCol="0" anchor="ctr"/>
+          <a:lstStyle/>
+          <a:p>
+            <a:pPr marL="0" indent="0" algn="ctr">
               <a:buNone/>
             </a:pPr>
             <a:r>
@@ -6698,13 +7795,12 @@
             <a:avLst/>
           </a:prstGeom>
           <a:noFill/>
-          <a:ln/>
-        </p:spPr>
-        <p:txBody>
-          <a:bodyPr wrap="square" rtlCol="0" anchor="ctr"/>
-          <a:lstStyle/>
-          <a:p>
-            <a:pPr algn="ctr" indent="0" marL="0">
+        </p:spPr>
+        <p:txBody>
+          <a:bodyPr wrap="square" rtlCol="0" anchor="ctr"/>
+          <a:lstStyle/>
+          <a:p>
+            <a:pPr marL="0" indent="0" algn="ctr">
               <a:buNone/>
             </a:pPr>
             <a:r>
@@ -6712,16 +7808,16 @@
                 <a:solidFill>
                   <a:srgbClr val="1565C0"/>
                 </a:solidFill>
-                <a:latin typeface="Microsoft YaHei" pitchFamily="34" charset="0"/>
-                <a:ea typeface="Microsoft YaHei" pitchFamily="34" charset="-122"/>
-                <a:cs typeface="Microsoft YaHei" pitchFamily="34" charset="-120"/>
+                <a:latin typeface="微软雅黑" pitchFamily="34" charset="0"/>
+                <a:ea typeface="微软雅黑" pitchFamily="34" charset="-122"/>
+                <a:cs typeface="微软雅黑" pitchFamily="34" charset="-120"/>
               </a:rPr>
               <a:t>Flink</a:t>
             </a:r>
             <a:endParaRPr lang="en-US" sz="800" dirty="0"/>
           </a:p>
           <a:p>
-            <a:pPr algn="ctr" indent="0" marL="0">
+            <a:pPr marL="0" indent="0" algn="ctr">
               <a:buNone/>
             </a:pPr>
             <a:r>
@@ -6729,9 +7825,9 @@
                 <a:solidFill>
                   <a:srgbClr val="1565C0"/>
                 </a:solidFill>
-                <a:latin typeface="Microsoft YaHei" pitchFamily="34" charset="0"/>
-                <a:ea typeface="Microsoft YaHei" pitchFamily="34" charset="-122"/>
-                <a:cs typeface="Microsoft YaHei" pitchFamily="34" charset="-120"/>
+                <a:latin typeface="微软雅黑" pitchFamily="34" charset="0"/>
+                <a:ea typeface="微软雅黑" pitchFamily="34" charset="-122"/>
+                <a:cs typeface="微软雅黑" pitchFamily="34" charset="-120"/>
               </a:rPr>
               <a:t>CDC</a:t>
             </a:r>
@@ -6754,13 +7850,12 @@
             <a:avLst/>
           </a:prstGeom>
           <a:noFill/>
-          <a:ln/>
-        </p:spPr>
-        <p:txBody>
-          <a:bodyPr wrap="square" rtlCol="0" anchor="ctr"/>
-          <a:lstStyle/>
-          <a:p>
-            <a:pPr algn="ctr" indent="0" marL="0">
+        </p:spPr>
+        <p:txBody>
+          <a:bodyPr wrap="square" rtlCol="0" anchor="ctr"/>
+          <a:lstStyle/>
+          <a:p>
+            <a:pPr marL="0" indent="0" algn="ctr">
               <a:buNone/>
             </a:pPr>
             <a:r>
@@ -6817,13 +7912,12 @@
             <a:avLst/>
           </a:prstGeom>
           <a:noFill/>
-          <a:ln/>
-        </p:spPr>
-        <p:txBody>
-          <a:bodyPr wrap="square" rtlCol="0" anchor="ctr"/>
-          <a:lstStyle/>
-          <a:p>
-            <a:pPr algn="ctr" indent="0" marL="0">
+        </p:spPr>
+        <p:txBody>
+          <a:bodyPr wrap="square" rtlCol="0" anchor="ctr"/>
+          <a:lstStyle/>
+          <a:p>
+            <a:pPr marL="0" indent="0" algn="ctr">
               <a:buNone/>
             </a:pPr>
             <a:r>
@@ -6831,9 +7925,9 @@
                 <a:solidFill>
                   <a:srgbClr val="1565C0"/>
                 </a:solidFill>
-                <a:latin typeface="Microsoft YaHei" pitchFamily="34" charset="0"/>
-                <a:ea typeface="Microsoft YaHei" pitchFamily="34" charset="-122"/>
-                <a:cs typeface="Microsoft YaHei" pitchFamily="34" charset="-120"/>
+                <a:latin typeface="微软雅黑" pitchFamily="34" charset="0"/>
+                <a:ea typeface="微软雅黑" pitchFamily="34" charset="-122"/>
+                <a:cs typeface="微软雅黑" pitchFamily="34" charset="-120"/>
               </a:rPr>
               <a:t>Kafka</a:t>
             </a:r>
@@ -6856,13 +7950,12 @@
             <a:avLst/>
           </a:prstGeom>
           <a:noFill/>
-          <a:ln/>
-        </p:spPr>
-        <p:txBody>
-          <a:bodyPr wrap="square" rtlCol="0" anchor="ctr"/>
-          <a:lstStyle/>
-          <a:p>
-            <a:pPr algn="ctr" indent="0" marL="0">
+        </p:spPr>
+        <p:txBody>
+          <a:bodyPr wrap="square" rtlCol="0" anchor="ctr"/>
+          <a:lstStyle/>
+          <a:p>
+            <a:pPr marL="0" indent="0" algn="ctr">
               <a:buNone/>
             </a:pPr>
             <a:r>
@@ -6919,13 +8012,12 @@
             <a:avLst/>
           </a:prstGeom>
           <a:noFill/>
-          <a:ln/>
-        </p:spPr>
-        <p:txBody>
-          <a:bodyPr wrap="square" rtlCol="0" anchor="ctr"/>
-          <a:lstStyle/>
-          <a:p>
-            <a:pPr algn="ctr" indent="0" marL="0">
+        </p:spPr>
+        <p:txBody>
+          <a:bodyPr wrap="square" rtlCol="0" anchor="ctr"/>
+          <a:lstStyle/>
+          <a:p>
+            <a:pPr marL="0" indent="0" algn="ctr">
               <a:buNone/>
             </a:pPr>
             <a:r>
@@ -6933,16 +8025,16 @@
                 <a:solidFill>
                   <a:srgbClr val="1565C0"/>
                 </a:solidFill>
-                <a:latin typeface="Microsoft YaHei" pitchFamily="34" charset="0"/>
-                <a:ea typeface="Microsoft YaHei" pitchFamily="34" charset="-122"/>
-                <a:cs typeface="Microsoft YaHei" pitchFamily="34" charset="-120"/>
+                <a:latin typeface="微软雅黑" pitchFamily="34" charset="0"/>
+                <a:ea typeface="微软雅黑" pitchFamily="34" charset="-122"/>
+                <a:cs typeface="微软雅黑" pitchFamily="34" charset="-120"/>
               </a:rPr>
               <a:t>Flink</a:t>
             </a:r>
             <a:endParaRPr lang="en-US" sz="800" dirty="0"/>
           </a:p>
           <a:p>
-            <a:pPr algn="ctr" indent="0" marL="0">
+            <a:pPr marL="0" indent="0" algn="ctr">
               <a:buNone/>
             </a:pPr>
             <a:r>
@@ -6950,9 +8042,9 @@
                 <a:solidFill>
                   <a:srgbClr val="1565C0"/>
                 </a:solidFill>
-                <a:latin typeface="Microsoft YaHei" pitchFamily="34" charset="0"/>
-                <a:ea typeface="Microsoft YaHei" pitchFamily="34" charset="-122"/>
-                <a:cs typeface="Microsoft YaHei" pitchFamily="34" charset="-120"/>
+                <a:latin typeface="微软雅黑" pitchFamily="34" charset="0"/>
+                <a:ea typeface="微软雅黑" pitchFamily="34" charset="-122"/>
+                <a:cs typeface="微软雅黑" pitchFamily="34" charset="-120"/>
               </a:rPr>
               <a:t>转换写入</a:t>
             </a:r>
@@ -6975,13 +8067,12 @@
             <a:avLst/>
           </a:prstGeom>
           <a:noFill/>
-          <a:ln/>
-        </p:spPr>
-        <p:txBody>
-          <a:bodyPr wrap="square" rtlCol="0" anchor="ctr"/>
-          <a:lstStyle/>
-          <a:p>
-            <a:pPr algn="ctr" indent="0" marL="0">
+        </p:spPr>
+        <p:txBody>
+          <a:bodyPr wrap="square" rtlCol="0" anchor="ctr"/>
+          <a:lstStyle/>
+          <a:p>
+            <a:pPr marL="0" indent="0" algn="ctr">
               <a:buNone/>
             </a:pPr>
             <a:r>
@@ -7038,13 +8129,12 @@
             <a:avLst/>
           </a:prstGeom>
           <a:noFill/>
-          <a:ln/>
-        </p:spPr>
-        <p:txBody>
-          <a:bodyPr wrap="square" rtlCol="0" anchor="ctr"/>
-          <a:lstStyle/>
-          <a:p>
-            <a:pPr algn="ctr" indent="0" marL="0">
+        </p:spPr>
+        <p:txBody>
+          <a:bodyPr wrap="square" rtlCol="0" anchor="ctr"/>
+          <a:lstStyle/>
+          <a:p>
+            <a:pPr marL="0" indent="0" algn="ctr">
               <a:buNone/>
             </a:pPr>
             <a:r>
@@ -7052,16 +8142,16 @@
                 <a:solidFill>
                   <a:srgbClr val="1565C0"/>
                 </a:solidFill>
-                <a:latin typeface="Microsoft YaHei" pitchFamily="34" charset="0"/>
-                <a:ea typeface="Microsoft YaHei" pitchFamily="34" charset="-122"/>
-                <a:cs typeface="Microsoft YaHei" pitchFamily="34" charset="-120"/>
+                <a:latin typeface="微软雅黑" pitchFamily="34" charset="0"/>
+                <a:ea typeface="微软雅黑" pitchFamily="34" charset="-122"/>
+                <a:cs typeface="微软雅黑" pitchFamily="34" charset="-120"/>
               </a:rPr>
               <a:t>Hive 业务</a:t>
             </a:r>
             <a:endParaRPr lang="en-US" sz="800" dirty="0"/>
           </a:p>
           <a:p>
-            <a:pPr algn="ctr" indent="0" marL="0">
+            <a:pPr marL="0" indent="0" algn="ctr">
               <a:buNone/>
             </a:pPr>
             <a:r>
@@ -7069,9 +8159,9 @@
                 <a:solidFill>
                   <a:srgbClr val="1565C0"/>
                 </a:solidFill>
-                <a:latin typeface="Microsoft YaHei" pitchFamily="34" charset="0"/>
-                <a:ea typeface="Microsoft YaHei" pitchFamily="34" charset="-122"/>
-                <a:cs typeface="Microsoft YaHei" pitchFamily="34" charset="-120"/>
+                <a:latin typeface="微软雅黑" pitchFamily="34" charset="0"/>
+                <a:ea typeface="微软雅黑" pitchFamily="34" charset="-122"/>
+                <a:cs typeface="微软雅黑" pitchFamily="34" charset="-120"/>
               </a:rPr>
               <a:t>表 S3</a:t>
             </a:r>
@@ -7094,13 +8184,12 @@
             <a:avLst/>
           </a:prstGeom>
           <a:noFill/>
-          <a:ln/>
-        </p:spPr>
-        <p:txBody>
-          <a:bodyPr wrap="square" rtlCol="0" anchor="ctr"/>
-          <a:lstStyle/>
-          <a:p>
-            <a:pPr algn="ctr" indent="0" marL="0">
+        </p:spPr>
+        <p:txBody>
+          <a:bodyPr wrap="square" rtlCol="0" anchor="ctr"/>
+          <a:lstStyle/>
+          <a:p>
+            <a:pPr marL="0" indent="0" algn="ctr">
               <a:buNone/>
             </a:pPr>
             <a:r>
@@ -7157,13 +8246,12 @@
             <a:avLst/>
           </a:prstGeom>
           <a:noFill/>
-          <a:ln/>
-        </p:spPr>
-        <p:txBody>
-          <a:bodyPr wrap="square" rtlCol="0" anchor="ctr"/>
-          <a:lstStyle/>
-          <a:p>
-            <a:pPr algn="ctr" indent="0" marL="0">
+        </p:spPr>
+        <p:txBody>
+          <a:bodyPr wrap="square" rtlCol="0" anchor="ctr"/>
+          <a:lstStyle/>
+          <a:p>
+            <a:pPr marL="0" indent="0" algn="ctr">
               <a:buNone/>
             </a:pPr>
             <a:r>
@@ -7171,16 +8259,16 @@
                 <a:solidFill>
                   <a:srgbClr val="1565C0"/>
                 </a:solidFill>
-                <a:latin typeface="Microsoft YaHei" pitchFamily="34" charset="0"/>
-                <a:ea typeface="Microsoft YaHei" pitchFamily="34" charset="-122"/>
-                <a:cs typeface="Microsoft YaHei" pitchFamily="34" charset="-120"/>
+                <a:latin typeface="微软雅黑" pitchFamily="34" charset="0"/>
+                <a:ea typeface="微软雅黑" pitchFamily="34" charset="-122"/>
+                <a:cs typeface="微软雅黑" pitchFamily="34" charset="-120"/>
               </a:rPr>
               <a:t>BI</a:t>
             </a:r>
             <a:endParaRPr lang="en-US" sz="800" dirty="0"/>
           </a:p>
           <a:p>
-            <a:pPr algn="ctr" indent="0" marL="0">
+            <a:pPr marL="0" indent="0" algn="ctr">
               <a:buNone/>
             </a:pPr>
             <a:r>
@@ -7188,9 +8276,9 @@
                 <a:solidFill>
                   <a:srgbClr val="1565C0"/>
                 </a:solidFill>
-                <a:latin typeface="Microsoft YaHei" pitchFamily="34" charset="0"/>
-                <a:ea typeface="Microsoft YaHei" pitchFamily="34" charset="-122"/>
-                <a:cs typeface="Microsoft YaHei" pitchFamily="34" charset="-120"/>
+                <a:latin typeface="微软雅黑" pitchFamily="34" charset="0"/>
+                <a:ea typeface="微软雅黑" pitchFamily="34" charset="-122"/>
+                <a:cs typeface="微软雅黑" pitchFamily="34" charset="-120"/>
               </a:rPr>
               <a:t>看板</a:t>
             </a:r>
@@ -7213,13 +8301,12 @@
             <a:avLst/>
           </a:prstGeom>
           <a:noFill/>
-          <a:ln/>
-        </p:spPr>
-        <p:txBody>
-          <a:bodyPr wrap="square" rtlCol="0" anchor="ctr"/>
-          <a:lstStyle/>
-          <a:p>
-            <a:pPr algn="r" indent="0" marL="0">
+        </p:spPr>
+        <p:txBody>
+          <a:bodyPr wrap="square" rtlCol="0" anchor="ctr"/>
+          <a:lstStyle/>
+          <a:p>
+            <a:pPr marL="0" indent="0" algn="r">
               <a:buNone/>
             </a:pPr>
             <a:r>
@@ -7227,9 +8314,9 @@
                 <a:solidFill>
                   <a:srgbClr val="E65100"/>
                 </a:solidFill>
-                <a:latin typeface="Microsoft YaHei" pitchFamily="34" charset="0"/>
-                <a:ea typeface="Microsoft YaHei" pitchFamily="34" charset="-122"/>
-                <a:cs typeface="Microsoft YaHei" pitchFamily="34" charset="-120"/>
+                <a:latin typeface="微软雅黑" pitchFamily="34" charset="0"/>
+                <a:ea typeface="微软雅黑" pitchFamily="34" charset="-122"/>
+                <a:cs typeface="微软雅黑" pitchFamily="34" charset="-120"/>
               </a:rPr>
               <a:t>链路 4 — AI 训练构造</a:t>
             </a:r>
@@ -7279,13 +8366,12 @@
             <a:avLst/>
           </a:prstGeom>
           <a:noFill/>
-          <a:ln/>
-        </p:spPr>
-        <p:txBody>
-          <a:bodyPr wrap="square" rtlCol="0" anchor="ctr"/>
-          <a:lstStyle/>
-          <a:p>
-            <a:pPr algn="ctr" indent="0" marL="0">
+        </p:spPr>
+        <p:txBody>
+          <a:bodyPr wrap="square" rtlCol="0" anchor="ctr"/>
+          <a:lstStyle/>
+          <a:p>
+            <a:pPr marL="0" indent="0" algn="ctr">
               <a:buNone/>
             </a:pPr>
             <a:r>
@@ -7293,16 +8379,16 @@
                 <a:solidFill>
                   <a:srgbClr val="E65100"/>
                 </a:solidFill>
-                <a:latin typeface="Microsoft YaHei" pitchFamily="34" charset="0"/>
-                <a:ea typeface="Microsoft YaHei" pitchFamily="34" charset="-122"/>
-                <a:cs typeface="Microsoft YaHei" pitchFamily="34" charset="-120"/>
+                <a:latin typeface="微软雅黑" pitchFamily="34" charset="0"/>
+                <a:ea typeface="微软雅黑" pitchFamily="34" charset="-122"/>
+                <a:cs typeface="微软雅黑" pitchFamily="34" charset="-120"/>
               </a:rPr>
               <a:t>Hive</a:t>
             </a:r>
             <a:endParaRPr lang="en-US" sz="800" dirty="0"/>
           </a:p>
           <a:p>
-            <a:pPr algn="ctr" indent="0" marL="0">
+            <a:pPr marL="0" indent="0" algn="ctr">
               <a:buNone/>
             </a:pPr>
             <a:r>
@@ -7310,9 +8396,9 @@
                 <a:solidFill>
                   <a:srgbClr val="E65100"/>
                 </a:solidFill>
-                <a:latin typeface="Microsoft YaHei" pitchFamily="34" charset="0"/>
-                <a:ea typeface="Microsoft YaHei" pitchFamily="34" charset="-122"/>
-                <a:cs typeface="Microsoft YaHei" pitchFamily="34" charset="-120"/>
+                <a:latin typeface="微软雅黑" pitchFamily="34" charset="0"/>
+                <a:ea typeface="微软雅黑" pitchFamily="34" charset="-122"/>
+                <a:cs typeface="微软雅黑" pitchFamily="34" charset="-120"/>
               </a:rPr>
               <a:t>业务表</a:t>
             </a:r>
@@ -7335,13 +8421,12 @@
             <a:avLst/>
           </a:prstGeom>
           <a:noFill/>
-          <a:ln/>
-        </p:spPr>
-        <p:txBody>
-          <a:bodyPr wrap="square" rtlCol="0" anchor="ctr"/>
-          <a:lstStyle/>
-          <a:p>
-            <a:pPr algn="ctr" indent="0" marL="0">
+        </p:spPr>
+        <p:txBody>
+          <a:bodyPr wrap="square" rtlCol="0" anchor="ctr"/>
+          <a:lstStyle/>
+          <a:p>
+            <a:pPr marL="0" indent="0" algn="ctr">
               <a:buNone/>
             </a:pPr>
             <a:r>
@@ -7398,13 +8483,12 @@
             <a:avLst/>
           </a:prstGeom>
           <a:noFill/>
-          <a:ln/>
-        </p:spPr>
-        <p:txBody>
-          <a:bodyPr wrap="square" rtlCol="0" anchor="ctr"/>
-          <a:lstStyle/>
-          <a:p>
-            <a:pPr algn="ctr" indent="0" marL="0">
+        </p:spPr>
+        <p:txBody>
+          <a:bodyPr wrap="square" rtlCol="0" anchor="ctr"/>
+          <a:lstStyle/>
+          <a:p>
+            <a:pPr marL="0" indent="0" algn="ctr">
               <a:buNone/>
             </a:pPr>
             <a:r>
@@ -7412,16 +8496,16 @@
                 <a:solidFill>
                   <a:srgbClr val="E65100"/>
                 </a:solidFill>
-                <a:latin typeface="Microsoft YaHei" pitchFamily="34" charset="0"/>
-                <a:ea typeface="Microsoft YaHei" pitchFamily="34" charset="-122"/>
-                <a:cs typeface="Microsoft YaHei" pitchFamily="34" charset="-120"/>
+                <a:latin typeface="微软雅黑" pitchFamily="34" charset="0"/>
+                <a:ea typeface="微软雅黑" pitchFamily="34" charset="-122"/>
+                <a:cs typeface="微软雅黑" pitchFamily="34" charset="-120"/>
               </a:rPr>
               <a:t>Spark</a:t>
             </a:r>
             <a:endParaRPr lang="en-US" sz="800" dirty="0"/>
           </a:p>
           <a:p>
-            <a:pPr algn="ctr" indent="0" marL="0">
+            <a:pPr marL="0" indent="0" algn="ctr">
               <a:buNone/>
             </a:pPr>
             <a:r>
@@ -7429,9 +8513,9 @@
                 <a:solidFill>
                   <a:srgbClr val="E65100"/>
                 </a:solidFill>
-                <a:latin typeface="Microsoft YaHei" pitchFamily="34" charset="0"/>
-                <a:ea typeface="Microsoft YaHei" pitchFamily="34" charset="-122"/>
-                <a:cs typeface="Microsoft YaHei" pitchFamily="34" charset="-120"/>
+                <a:latin typeface="微软雅黑" pitchFamily="34" charset="0"/>
+                <a:ea typeface="微软雅黑" pitchFamily="34" charset="-122"/>
+                <a:cs typeface="微软雅黑" pitchFamily="34" charset="-120"/>
               </a:rPr>
               <a:t>聚合采样</a:t>
             </a:r>
@@ -7454,13 +8538,12 @@
             <a:avLst/>
           </a:prstGeom>
           <a:noFill/>
-          <a:ln/>
-        </p:spPr>
-        <p:txBody>
-          <a:bodyPr wrap="square" rtlCol="0" anchor="ctr"/>
-          <a:lstStyle/>
-          <a:p>
-            <a:pPr algn="ctr" indent="0" marL="0">
+        </p:spPr>
+        <p:txBody>
+          <a:bodyPr wrap="square" rtlCol="0" anchor="ctr"/>
+          <a:lstStyle/>
+          <a:p>
+            <a:pPr marL="0" indent="0" algn="ctr">
               <a:buNone/>
             </a:pPr>
             <a:r>
@@ -7517,13 +8600,12 @@
             <a:avLst/>
           </a:prstGeom>
           <a:noFill/>
-          <a:ln/>
-        </p:spPr>
-        <p:txBody>
-          <a:bodyPr wrap="square" rtlCol="0" anchor="ctr"/>
-          <a:lstStyle/>
-          <a:p>
-            <a:pPr algn="ctr" indent="0" marL="0">
+        </p:spPr>
+        <p:txBody>
+          <a:bodyPr wrap="square" rtlCol="0" anchor="ctr"/>
+          <a:lstStyle/>
+          <a:p>
+            <a:pPr marL="0" indent="0" algn="ctr">
               <a:buNone/>
             </a:pPr>
             <a:r>
@@ -7531,16 +8613,16 @@
                 <a:solidFill>
                   <a:srgbClr val="E65100"/>
                 </a:solidFill>
-                <a:latin typeface="Microsoft YaHei" pitchFamily="34" charset="0"/>
-                <a:ea typeface="Microsoft YaHei" pitchFamily="34" charset="-122"/>
-                <a:cs typeface="Microsoft YaHei" pitchFamily="34" charset="-120"/>
+                <a:latin typeface="微软雅黑" pitchFamily="34" charset="0"/>
+                <a:ea typeface="微软雅黑" pitchFamily="34" charset="-122"/>
+                <a:cs typeface="微软雅黑" pitchFamily="34" charset="-120"/>
               </a:rPr>
               <a:t>训练</a:t>
             </a:r>
             <a:endParaRPr lang="en-US" sz="800" dirty="0"/>
           </a:p>
           <a:p>
-            <a:pPr algn="ctr" indent="0" marL="0">
+            <a:pPr marL="0" indent="0" algn="ctr">
               <a:buNone/>
             </a:pPr>
             <a:r>
@@ -7548,9 +8630,9 @@
                 <a:solidFill>
                   <a:srgbClr val="E65100"/>
                 </a:solidFill>
-                <a:latin typeface="Microsoft YaHei" pitchFamily="34" charset="0"/>
-                <a:ea typeface="Microsoft YaHei" pitchFamily="34" charset="-122"/>
-                <a:cs typeface="Microsoft YaHei" pitchFamily="34" charset="-120"/>
+                <a:latin typeface="微软雅黑" pitchFamily="34" charset="0"/>
+                <a:ea typeface="微软雅黑" pitchFamily="34" charset="-122"/>
+                <a:cs typeface="微软雅黑" pitchFamily="34" charset="-120"/>
               </a:rPr>
               <a:t>数据集</a:t>
             </a:r>
@@ -7573,13 +8655,12 @@
             <a:avLst/>
           </a:prstGeom>
           <a:noFill/>
-          <a:ln/>
-        </p:spPr>
-        <p:txBody>
-          <a:bodyPr wrap="square" rtlCol="0" anchor="ctr"/>
-          <a:lstStyle/>
-          <a:p>
-            <a:pPr algn="ctr" indent="0" marL="0">
+        </p:spPr>
+        <p:txBody>
+          <a:bodyPr wrap="square" rtlCol="0" anchor="ctr"/>
+          <a:lstStyle/>
+          <a:p>
+            <a:pPr marL="0" indent="0" algn="ctr">
               <a:buNone/>
             </a:pPr>
             <a:r>
@@ -7636,13 +8717,12 @@
             <a:avLst/>
           </a:prstGeom>
           <a:noFill/>
-          <a:ln/>
-        </p:spPr>
-        <p:txBody>
-          <a:bodyPr wrap="square" rtlCol="0" anchor="ctr"/>
-          <a:lstStyle/>
-          <a:p>
-            <a:pPr algn="ctr" indent="0" marL="0">
+        </p:spPr>
+        <p:txBody>
+          <a:bodyPr wrap="square" rtlCol="0" anchor="ctr"/>
+          <a:lstStyle/>
+          <a:p>
+            <a:pPr marL="0" indent="0" algn="ctr">
               <a:buNone/>
             </a:pPr>
             <a:r>
@@ -7650,16 +8730,16 @@
                 <a:solidFill>
                   <a:srgbClr val="E65100"/>
                 </a:solidFill>
-                <a:latin typeface="Microsoft YaHei" pitchFamily="34" charset="0"/>
-                <a:ea typeface="Microsoft YaHei" pitchFamily="34" charset="-122"/>
-                <a:cs typeface="Microsoft YaHei" pitchFamily="34" charset="-120"/>
+                <a:latin typeface="微软雅黑" pitchFamily="34" charset="0"/>
+                <a:ea typeface="微软雅黑" pitchFamily="34" charset="-122"/>
+                <a:cs typeface="微软雅黑" pitchFamily="34" charset="-120"/>
               </a:rPr>
               <a:t>S3</a:t>
             </a:r>
             <a:endParaRPr lang="en-US" sz="800" dirty="0"/>
           </a:p>
           <a:p>
-            <a:pPr algn="ctr" indent="0" marL="0">
+            <a:pPr marL="0" indent="0" algn="ctr">
               <a:buNone/>
             </a:pPr>
             <a:r>
@@ -7667,9 +8747,9 @@
                 <a:solidFill>
                   <a:srgbClr val="E65100"/>
                 </a:solidFill>
-                <a:latin typeface="Microsoft YaHei" pitchFamily="34" charset="0"/>
-                <a:ea typeface="Microsoft YaHei" pitchFamily="34" charset="-122"/>
-                <a:cs typeface="Microsoft YaHei" pitchFamily="34" charset="-120"/>
+                <a:latin typeface="微软雅黑" pitchFamily="34" charset="0"/>
+                <a:ea typeface="微软雅黑" pitchFamily="34" charset="-122"/>
+                <a:cs typeface="微软雅黑" pitchFamily="34" charset="-120"/>
               </a:rPr>
               <a:t>文件区</a:t>
             </a:r>
@@ -7692,13 +8772,12 @@
             <a:avLst/>
           </a:prstGeom>
           <a:noFill/>
-          <a:ln/>
-        </p:spPr>
-        <p:txBody>
-          <a:bodyPr wrap="square" rtlCol="0" anchor="ctr"/>
-          <a:lstStyle/>
-          <a:p>
-            <a:pPr algn="ctr" indent="0" marL="0">
+        </p:spPr>
+        <p:txBody>
+          <a:bodyPr wrap="square" rtlCol="0" anchor="ctr"/>
+          <a:lstStyle/>
+          <a:p>
+            <a:pPr marL="0" indent="0" algn="ctr">
               <a:buNone/>
             </a:pPr>
             <a:r>
@@ -7755,13 +8834,12 @@
             <a:avLst/>
           </a:prstGeom>
           <a:noFill/>
-          <a:ln/>
-        </p:spPr>
-        <p:txBody>
-          <a:bodyPr wrap="square" rtlCol="0" anchor="ctr"/>
-          <a:lstStyle/>
-          <a:p>
-            <a:pPr algn="ctr" indent="0" marL="0">
+        </p:spPr>
+        <p:txBody>
+          <a:bodyPr wrap="square" rtlCol="0" anchor="ctr"/>
+          <a:lstStyle/>
+          <a:p>
+            <a:pPr marL="0" indent="0" algn="ctr">
               <a:buNone/>
             </a:pPr>
             <a:r>
@@ -7769,16 +8847,16 @@
                 <a:solidFill>
                   <a:srgbClr val="E65100"/>
                 </a:solidFill>
-                <a:latin typeface="Microsoft YaHei" pitchFamily="34" charset="0"/>
-                <a:ea typeface="Microsoft YaHei" pitchFamily="34" charset="-122"/>
-                <a:cs typeface="Microsoft YaHei" pitchFamily="34" charset="-120"/>
+                <a:latin typeface="微软雅黑" pitchFamily="34" charset="0"/>
+                <a:ea typeface="微软雅黑" pitchFamily="34" charset="-122"/>
+                <a:cs typeface="微软雅黑" pitchFamily="34" charset="-120"/>
               </a:rPr>
               <a:t>Alluxio</a:t>
             </a:r>
             <a:endParaRPr lang="en-US" sz="800" dirty="0"/>
           </a:p>
           <a:p>
-            <a:pPr algn="ctr" indent="0" marL="0">
+            <a:pPr marL="0" indent="0" algn="ctr">
               <a:buNone/>
             </a:pPr>
             <a:r>
@@ -7786,9 +8864,9 @@
                 <a:solidFill>
                   <a:srgbClr val="E65100"/>
                 </a:solidFill>
-                <a:latin typeface="Microsoft YaHei" pitchFamily="34" charset="0"/>
-                <a:ea typeface="Microsoft YaHei" pitchFamily="34" charset="-122"/>
-                <a:cs typeface="Microsoft YaHei" pitchFamily="34" charset="-120"/>
+                <a:latin typeface="微软雅黑" pitchFamily="34" charset="0"/>
+                <a:ea typeface="微软雅黑" pitchFamily="34" charset="-122"/>
+                <a:cs typeface="微软雅黑" pitchFamily="34" charset="-120"/>
               </a:rPr>
               <a:t>预热</a:t>
             </a:r>
@@ -7811,13 +8889,12 @@
             <a:avLst/>
           </a:prstGeom>
           <a:noFill/>
-          <a:ln/>
-        </p:spPr>
-        <p:txBody>
-          <a:bodyPr wrap="square" rtlCol="0" anchor="ctr"/>
-          <a:lstStyle/>
-          <a:p>
-            <a:pPr algn="ctr" indent="0" marL="0">
+        </p:spPr>
+        <p:txBody>
+          <a:bodyPr wrap="square" rtlCol="0" anchor="ctr"/>
+          <a:lstStyle/>
+          <a:p>
+            <a:pPr marL="0" indent="0" algn="ctr">
               <a:buNone/>
             </a:pPr>
             <a:r>
@@ -7874,13 +8951,12 @@
             <a:avLst/>
           </a:prstGeom>
           <a:noFill/>
-          <a:ln/>
-        </p:spPr>
-        <p:txBody>
-          <a:bodyPr wrap="square" rtlCol="0" anchor="ctr"/>
-          <a:lstStyle/>
-          <a:p>
-            <a:pPr algn="ctr" indent="0" marL="0">
+        </p:spPr>
+        <p:txBody>
+          <a:bodyPr wrap="square" rtlCol="0" anchor="ctr"/>
+          <a:lstStyle/>
+          <a:p>
+            <a:pPr marL="0" indent="0" algn="ctr">
               <a:buNone/>
             </a:pPr>
             <a:r>
@@ -7888,16 +8964,16 @@
                 <a:solidFill>
                   <a:srgbClr val="E65100"/>
                 </a:solidFill>
-                <a:latin typeface="Microsoft YaHei" pitchFamily="34" charset="0"/>
-                <a:ea typeface="Microsoft YaHei" pitchFamily="34" charset="-122"/>
-                <a:cs typeface="Microsoft YaHei" pitchFamily="34" charset="-120"/>
+                <a:latin typeface="微软雅黑" pitchFamily="34" charset="0"/>
+                <a:ea typeface="微软雅黑" pitchFamily="34" charset="-122"/>
+                <a:cs typeface="微软雅黑" pitchFamily="34" charset="-120"/>
               </a:rPr>
               <a:t>GPU</a:t>
             </a:r>
             <a:endParaRPr lang="en-US" sz="800" dirty="0"/>
           </a:p>
           <a:p>
-            <a:pPr algn="ctr" indent="0" marL="0">
+            <a:pPr marL="0" indent="0" algn="ctr">
               <a:buNone/>
             </a:pPr>
             <a:r>
@@ -7905,9 +8981,9 @@
                 <a:solidFill>
                   <a:srgbClr val="E65100"/>
                 </a:solidFill>
-                <a:latin typeface="Microsoft YaHei" pitchFamily="34" charset="0"/>
-                <a:ea typeface="Microsoft YaHei" pitchFamily="34" charset="-122"/>
-                <a:cs typeface="Microsoft YaHei" pitchFamily="34" charset="-120"/>
+                <a:latin typeface="微软雅黑" pitchFamily="34" charset="0"/>
+                <a:ea typeface="微软雅黑" pitchFamily="34" charset="-122"/>
+                <a:cs typeface="微软雅黑" pitchFamily="34" charset="-120"/>
               </a:rPr>
               <a:t>集群</a:t>
             </a:r>
@@ -7932,7 +9008,6 @@
           <a:solidFill>
             <a:srgbClr val="256D4B"/>
           </a:solidFill>
-          <a:ln/>
         </p:spPr>
       </p:sp>
       <p:sp>
@@ -7950,13 +9025,12 @@
             <a:avLst/>
           </a:prstGeom>
           <a:noFill/>
-          <a:ln/>
-        </p:spPr>
-        <p:txBody>
-          <a:bodyPr wrap="square" rtlCol="0" anchor="ctr"/>
-          <a:lstStyle/>
-          <a:p>
-            <a:pPr algn="ctr" indent="0" marL="0">
+        </p:spPr>
+        <p:txBody>
+          <a:bodyPr wrap="square" rtlCol="0" anchor="ctr"/>
+          <a:lstStyle/>
+          <a:p>
+            <a:pPr marL="0" indent="0" algn="ctr">
               <a:buNone/>
             </a:pPr>
             <a:r>
@@ -7964,9 +9038,9 @@
                 <a:solidFill>
                   <a:srgbClr val="FFFFFF"/>
                 </a:solidFill>
-                <a:latin typeface="Arial" pitchFamily="34" charset="0"/>
-                <a:ea typeface="Arial" pitchFamily="34" charset="-122"/>
-                <a:cs typeface="Arial" pitchFamily="34" charset="-120"/>
+                <a:latin typeface="Arial" panose="020B0604020202090204" pitchFamily="34" charset="0"/>
+                <a:ea typeface="Arial" panose="020B0604020202090204" pitchFamily="34" charset="-122"/>
+                <a:cs typeface="Arial" panose="020B0604020202090204" pitchFamily="34" charset="-120"/>
               </a:rPr>
               <a:t>4</a:t>
             </a:r>
@@ -7984,12 +9058,13 @@
 
 <file path=ppt/slides/slide5.xml><?xml version="1.0" encoding="utf-8"?>
 <p:sld xmlns:a="http://schemas.openxmlformats.org/drawingml/2006/main" xmlns:r="http://schemas.openxmlformats.org/officeDocument/2006/relationships" xmlns:p="http://schemas.openxmlformats.org/presentationml/2006/main">
-  <p:cSld name="Slide 5">
+  <p:cSld>
     <p:bg>
       <p:bgPr>
         <a:solidFill>
           <a:srgbClr val="F8FBFC"/>
         </a:solidFill>
+        <a:effectLst/>
       </p:bgPr>
     </p:bg>
     <p:spTree>
@@ -8021,13 +9096,12 @@
             <a:avLst/>
           </a:prstGeom>
           <a:noFill/>
-          <a:ln/>
-        </p:spPr>
-        <p:txBody>
-          <a:bodyPr wrap="square" rtlCol="0" anchor="ctr"/>
-          <a:lstStyle/>
-          <a:p>
-            <a:pPr indent="0" marL="0">
+        </p:spPr>
+        <p:txBody>
+          <a:bodyPr wrap="square" rtlCol="0" anchor="ctr"/>
+          <a:lstStyle/>
+          <a:p>
+            <a:pPr marL="0" indent="0">
               <a:buNone/>
             </a:pPr>
             <a:r>
@@ -8035,9 +9109,9 @@
                 <a:solidFill>
                   <a:srgbClr val="1B3A4B"/>
                 </a:solidFill>
-                <a:latin typeface="Microsoft YaHei" pitchFamily="34" charset="0"/>
-                <a:ea typeface="Microsoft YaHei" pitchFamily="34" charset="-122"/>
-                <a:cs typeface="Microsoft YaHei" pitchFamily="34" charset="-120"/>
+                <a:latin typeface="微软雅黑" pitchFamily="34" charset="0"/>
+                <a:ea typeface="微软雅黑" pitchFamily="34" charset="-122"/>
+                <a:cs typeface="微软雅黑" pitchFamily="34" charset="-120"/>
               </a:rPr>
               <a:t>技术栈总览 &amp; 演进路线</a:t>
             </a:r>
@@ -8087,13 +9161,12 @@
             <a:avLst/>
           </a:prstGeom>
           <a:noFill/>
-          <a:ln/>
-        </p:spPr>
-        <p:txBody>
-          <a:bodyPr wrap="square" rtlCol="0" anchor="ctr"/>
-          <a:lstStyle/>
-          <a:p>
-            <a:pPr indent="0" marL="0">
+        </p:spPr>
+        <p:txBody>
+          <a:bodyPr wrap="square" rtlCol="0" anchor="ctr"/>
+          <a:lstStyle/>
+          <a:p>
+            <a:pPr marL="0" indent="0">
               <a:buNone/>
             </a:pPr>
             <a:r>
@@ -8101,9 +9174,9 @@
                 <a:solidFill>
                   <a:srgbClr val="1B3A4B"/>
                 </a:solidFill>
-                <a:latin typeface="Microsoft YaHei" pitchFamily="34" charset="0"/>
-                <a:ea typeface="Microsoft YaHei" pitchFamily="34" charset="-122"/>
-                <a:cs typeface="Microsoft YaHei" pitchFamily="34" charset="-120"/>
+                <a:latin typeface="微软雅黑" pitchFamily="34" charset="0"/>
+                <a:ea typeface="微软雅黑" pitchFamily="34" charset="-122"/>
+                <a:cs typeface="微软雅黑" pitchFamily="34" charset="-120"/>
               </a:rPr>
               <a:t>当前技术栈</a:t>
             </a:r>
@@ -8126,13 +9199,12 @@
             <a:avLst/>
           </a:prstGeom>
           <a:noFill/>
-          <a:ln/>
         </p:spPr>
         <p:txBody>
           <a:bodyPr wrap="square" rtlCol="0" anchor="t"/>
           <a:lstStyle/>
           <a:p>
-            <a:pPr algn="r" indent="0" marL="0">
+            <a:pPr marL="0" indent="0" algn="r">
               <a:buNone/>
             </a:pPr>
             <a:r>
@@ -8140,9 +9212,9 @@
                 <a:solidFill>
                   <a:srgbClr val="256D4B"/>
                 </a:solidFill>
-                <a:latin typeface="Microsoft YaHei" pitchFamily="34" charset="0"/>
-                <a:ea typeface="Microsoft YaHei" pitchFamily="34" charset="-122"/>
-                <a:cs typeface="Microsoft YaHei" pitchFamily="34" charset="-120"/>
+                <a:latin typeface="微软雅黑" pitchFamily="34" charset="0"/>
+                <a:ea typeface="微软雅黑" pitchFamily="34" charset="-122"/>
+                <a:cs typeface="微软雅黑" pitchFamily="34" charset="-120"/>
               </a:rPr>
               <a:t>接入</a:t>
             </a:r>
@@ -8165,13 +9237,12 @@
             <a:avLst/>
           </a:prstGeom>
           <a:noFill/>
-          <a:ln/>
         </p:spPr>
         <p:txBody>
           <a:bodyPr wrap="square" rtlCol="0" anchor="t"/>
           <a:lstStyle/>
           <a:p>
-            <a:pPr indent="0" marL="0">
+            <a:pPr marL="0" indent="0">
               <a:buNone/>
             </a:pPr>
             <a:r>
@@ -8179,9 +9250,9 @@
                 <a:solidFill>
                   <a:srgbClr val="37474F"/>
                 </a:solidFill>
-                <a:latin typeface="Microsoft YaHei" pitchFamily="34" charset="0"/>
-                <a:ea typeface="Microsoft YaHei" pitchFamily="34" charset="-122"/>
-                <a:cs typeface="Microsoft YaHei" pitchFamily="34" charset="-120"/>
+                <a:latin typeface="微软雅黑" pitchFamily="34" charset="0"/>
+                <a:ea typeface="微软雅黑" pitchFamily="34" charset="-122"/>
+                <a:cs typeface="微软雅黑" pitchFamily="34" charset="-120"/>
               </a:rPr>
               <a:t>Kafka · Flink CDC · Filebeat · MQTT 网关</a:t>
             </a:r>
@@ -8204,13 +9275,12 @@
             <a:avLst/>
           </a:prstGeom>
           <a:noFill/>
-          <a:ln/>
         </p:spPr>
         <p:txBody>
           <a:bodyPr wrap="square" rtlCol="0" anchor="t"/>
           <a:lstStyle/>
           <a:p>
-            <a:pPr algn="r" indent="0" marL="0">
+            <a:pPr marL="0" indent="0" algn="r">
               <a:buNone/>
             </a:pPr>
             <a:r>
@@ -8218,9 +9288,9 @@
                 <a:solidFill>
                   <a:srgbClr val="256D4B"/>
                 </a:solidFill>
-                <a:latin typeface="Microsoft YaHei" pitchFamily="34" charset="0"/>
-                <a:ea typeface="Microsoft YaHei" pitchFamily="34" charset="-122"/>
-                <a:cs typeface="Microsoft YaHei" pitchFamily="34" charset="-120"/>
+                <a:latin typeface="微软雅黑" pitchFamily="34" charset="0"/>
+                <a:ea typeface="微软雅黑" pitchFamily="34" charset="-122"/>
+                <a:cs typeface="微软雅黑" pitchFamily="34" charset="-120"/>
               </a:rPr>
               <a:t>存储</a:t>
             </a:r>
@@ -8243,13 +9313,12 @@
             <a:avLst/>
           </a:prstGeom>
           <a:noFill/>
-          <a:ln/>
         </p:spPr>
         <p:txBody>
           <a:bodyPr wrap="square" rtlCol="0" anchor="t"/>
           <a:lstStyle/>
           <a:p>
-            <a:pPr indent="0" marL="0">
+            <a:pPr marL="0" indent="0">
               <a:buNone/>
             </a:pPr>
             <a:r>
@@ -8257,9 +9326,9 @@
                 <a:solidFill>
                   <a:srgbClr val="37474F"/>
                 </a:solidFill>
-                <a:latin typeface="Microsoft YaHei" pitchFamily="34" charset="0"/>
-                <a:ea typeface="Microsoft YaHei" pitchFamily="34" charset="-122"/>
-                <a:cs typeface="Microsoft YaHei" pitchFamily="34" charset="-120"/>
+                <a:latin typeface="微软雅黑" pitchFamily="34" charset="0"/>
+                <a:ea typeface="微软雅黑" pitchFamily="34" charset="-122"/>
+                <a:cs typeface="微软雅黑" pitchFamily="34" charset="-120"/>
               </a:rPr>
               <a:t>S3/MinIO · Hive Metastore · Hive (Parquet/ORC)</a:t>
             </a:r>
@@ -8282,13 +9351,12 @@
             <a:avLst/>
           </a:prstGeom>
           <a:noFill/>
-          <a:ln/>
         </p:spPr>
         <p:txBody>
           <a:bodyPr wrap="square" rtlCol="0" anchor="t"/>
           <a:lstStyle/>
           <a:p>
-            <a:pPr algn="r" indent="0" marL="0">
+            <a:pPr marL="0" indent="0" algn="r">
               <a:buNone/>
             </a:pPr>
             <a:r>
@@ -8296,9 +9364,9 @@
                 <a:solidFill>
                   <a:srgbClr val="256D4B"/>
                 </a:solidFill>
-                <a:latin typeface="Microsoft YaHei" pitchFamily="34" charset="0"/>
-                <a:ea typeface="Microsoft YaHei" pitchFamily="34" charset="-122"/>
-                <a:cs typeface="Microsoft YaHei" pitchFamily="34" charset="-120"/>
+                <a:latin typeface="微软雅黑" pitchFamily="34" charset="0"/>
+                <a:ea typeface="微软雅黑" pitchFamily="34" charset="-122"/>
+                <a:cs typeface="微软雅黑" pitchFamily="34" charset="-120"/>
               </a:rPr>
               <a:t>计算</a:t>
             </a:r>
@@ -8321,13 +9389,12 @@
             <a:avLst/>
           </a:prstGeom>
           <a:noFill/>
-          <a:ln/>
         </p:spPr>
         <p:txBody>
           <a:bodyPr wrap="square" rtlCol="0" anchor="t"/>
           <a:lstStyle/>
           <a:p>
-            <a:pPr indent="0" marL="0">
+            <a:pPr marL="0" indent="0">
               <a:buNone/>
             </a:pPr>
             <a:r>
@@ -8335,9 +9402,9 @@
                 <a:solidFill>
                   <a:srgbClr val="37474F"/>
                 </a:solidFill>
-                <a:latin typeface="Microsoft YaHei" pitchFamily="34" charset="0"/>
-                <a:ea typeface="Microsoft YaHei" pitchFamily="34" charset="-122"/>
-                <a:cs typeface="Microsoft YaHei" pitchFamily="34" charset="-120"/>
+                <a:latin typeface="微软雅黑" pitchFamily="34" charset="0"/>
+                <a:ea typeface="微软雅黑" pitchFamily="34" charset="-122"/>
+                <a:cs typeface="微软雅黑" pitchFamily="34" charset="-120"/>
               </a:rPr>
               <a:t>Flink on K8s · Spark on K8s</a:t>
             </a:r>
@@ -8360,13 +9427,12 @@
             <a:avLst/>
           </a:prstGeom>
           <a:noFill/>
-          <a:ln/>
         </p:spPr>
         <p:txBody>
           <a:bodyPr wrap="square" rtlCol="0" anchor="t"/>
           <a:lstStyle/>
           <a:p>
-            <a:pPr algn="r" indent="0" marL="0">
+            <a:pPr marL="0" indent="0" algn="r">
               <a:buNone/>
             </a:pPr>
             <a:r>
@@ -8374,9 +9440,9 @@
                 <a:solidFill>
                   <a:srgbClr val="256D4B"/>
                 </a:solidFill>
-                <a:latin typeface="Microsoft YaHei" pitchFamily="34" charset="0"/>
-                <a:ea typeface="Microsoft YaHei" pitchFamily="34" charset="-122"/>
-                <a:cs typeface="Microsoft YaHei" pitchFamily="34" charset="-120"/>
+                <a:latin typeface="微软雅黑" pitchFamily="34" charset="0"/>
+                <a:ea typeface="微软雅黑" pitchFamily="34" charset="-122"/>
+                <a:cs typeface="微软雅黑" pitchFamily="34" charset="-120"/>
               </a:rPr>
               <a:t>服务</a:t>
             </a:r>
@@ -8399,13 +9465,12 @@
             <a:avLst/>
           </a:prstGeom>
           <a:noFill/>
-          <a:ln/>
         </p:spPr>
         <p:txBody>
           <a:bodyPr wrap="square" rtlCol="0" anchor="t"/>
           <a:lstStyle/>
           <a:p>
-            <a:pPr indent="0" marL="0">
+            <a:pPr marL="0" indent="0">
               <a:buNone/>
             </a:pPr>
             <a:r>
@@ -8413,9 +9478,9 @@
                 <a:solidFill>
                   <a:srgbClr val="37474F"/>
                 </a:solidFill>
-                <a:latin typeface="Microsoft YaHei" pitchFamily="34" charset="0"/>
-                <a:ea typeface="Microsoft YaHei" pitchFamily="34" charset="-122"/>
-                <a:cs typeface="Microsoft YaHei" pitchFamily="34" charset="-120"/>
+                <a:latin typeface="微软雅黑" pitchFamily="34" charset="0"/>
+                <a:ea typeface="微软雅黑" pitchFamily="34" charset="-122"/>
+                <a:cs typeface="微软雅黑" pitchFamily="34" charset="-120"/>
               </a:rPr>
               <a:t>StarRocks/Doris · Presto/Trino · Superset</a:t>
             </a:r>
@@ -8438,13 +9503,12 @@
             <a:avLst/>
           </a:prstGeom>
           <a:noFill/>
-          <a:ln/>
         </p:spPr>
         <p:txBody>
           <a:bodyPr wrap="square" rtlCol="0" anchor="t"/>
           <a:lstStyle/>
           <a:p>
-            <a:pPr algn="r" indent="0" marL="0">
+            <a:pPr marL="0" indent="0" algn="r">
               <a:buNone/>
             </a:pPr>
             <a:r>
@@ -8452,9 +9516,9 @@
                 <a:solidFill>
                   <a:srgbClr val="256D4B"/>
                 </a:solidFill>
-                <a:latin typeface="Microsoft YaHei" pitchFamily="34" charset="0"/>
-                <a:ea typeface="Microsoft YaHei" pitchFamily="34" charset="-122"/>
-                <a:cs typeface="Microsoft YaHei" pitchFamily="34" charset="-120"/>
+                <a:latin typeface="微软雅黑" pitchFamily="34" charset="0"/>
+                <a:ea typeface="微软雅黑" pitchFamily="34" charset="-122"/>
+                <a:cs typeface="微软雅黑" pitchFamily="34" charset="-120"/>
               </a:rPr>
               <a:t>AI 桥</a:t>
             </a:r>
@@ -8477,13 +9541,12 @@
             <a:avLst/>
           </a:prstGeom>
           <a:noFill/>
-          <a:ln/>
         </p:spPr>
         <p:txBody>
           <a:bodyPr wrap="square" rtlCol="0" anchor="t"/>
           <a:lstStyle/>
           <a:p>
-            <a:pPr indent="0" marL="0">
+            <a:pPr marL="0" indent="0">
               <a:buNone/>
             </a:pPr>
             <a:r>
@@ -8491,9 +9554,9 @@
                 <a:solidFill>
                   <a:srgbClr val="37474F"/>
                 </a:solidFill>
-                <a:latin typeface="Microsoft YaHei" pitchFamily="34" charset="0"/>
-                <a:ea typeface="Microsoft YaHei" pitchFamily="34" charset="-122"/>
-                <a:cs typeface="Microsoft YaHei" pitchFamily="34" charset="-120"/>
+                <a:latin typeface="微软雅黑" pitchFamily="34" charset="0"/>
+                <a:ea typeface="微软雅黑" pitchFamily="34" charset="-122"/>
+                <a:cs typeface="微软雅黑" pitchFamily="34" charset="-120"/>
               </a:rPr>
               <a:t>Spark 训练构造 · Alluxio · (Feast 未来引入)</a:t>
             </a:r>
@@ -8516,13 +9579,12 @@
             <a:avLst/>
           </a:prstGeom>
           <a:noFill/>
-          <a:ln/>
         </p:spPr>
         <p:txBody>
           <a:bodyPr wrap="square" rtlCol="0" anchor="t"/>
           <a:lstStyle/>
           <a:p>
-            <a:pPr algn="r" indent="0" marL="0">
+            <a:pPr marL="0" indent="0" algn="r">
               <a:buNone/>
             </a:pPr>
             <a:r>
@@ -8530,9 +9592,9 @@
                 <a:solidFill>
                   <a:srgbClr val="256D4B"/>
                 </a:solidFill>
-                <a:latin typeface="Microsoft YaHei" pitchFamily="34" charset="0"/>
-                <a:ea typeface="Microsoft YaHei" pitchFamily="34" charset="-122"/>
-                <a:cs typeface="Microsoft YaHei" pitchFamily="34" charset="-120"/>
+                <a:latin typeface="微软雅黑" pitchFamily="34" charset="0"/>
+                <a:ea typeface="微软雅黑" pitchFamily="34" charset="-122"/>
+                <a:cs typeface="微软雅黑" pitchFamily="34" charset="-120"/>
               </a:rPr>
               <a:t>治理</a:t>
             </a:r>
@@ -8555,13 +9617,12 @@
             <a:avLst/>
           </a:prstGeom>
           <a:noFill/>
-          <a:ln/>
         </p:spPr>
         <p:txBody>
           <a:bodyPr wrap="square" rtlCol="0" anchor="t"/>
           <a:lstStyle/>
           <a:p>
-            <a:pPr indent="0" marL="0">
+            <a:pPr marL="0" indent="0">
               <a:buNone/>
             </a:pPr>
             <a:r>
@@ -8569,9 +9630,9 @@
                 <a:solidFill>
                   <a:srgbClr val="37474F"/>
                 </a:solidFill>
-                <a:latin typeface="Microsoft YaHei" pitchFamily="34" charset="0"/>
-                <a:ea typeface="Microsoft YaHei" pitchFamily="34" charset="-122"/>
-                <a:cs typeface="Microsoft YaHei" pitchFamily="34" charset="-120"/>
+                <a:latin typeface="微软雅黑" pitchFamily="34" charset="0"/>
+                <a:ea typeface="微软雅黑" pitchFamily="34" charset="-122"/>
+                <a:cs typeface="微软雅黑" pitchFamily="34" charset="-120"/>
               </a:rPr>
               <a:t>Airflow · Data Catalog · 血缘 · 质量监控</a:t>
             </a:r>
@@ -8621,13 +9682,12 @@
             <a:avLst/>
           </a:prstGeom>
           <a:noFill/>
-          <a:ln/>
-        </p:spPr>
-        <p:txBody>
-          <a:bodyPr wrap="square" rtlCol="0" anchor="ctr"/>
-          <a:lstStyle/>
-          <a:p>
-            <a:pPr indent="0" marL="0">
+        </p:spPr>
+        <p:txBody>
+          <a:bodyPr wrap="square" rtlCol="0" anchor="ctr"/>
+          <a:lstStyle/>
+          <a:p>
+            <a:pPr marL="0" indent="0">
               <a:buNone/>
             </a:pPr>
             <a:r>
@@ -8635,9 +9695,9 @@
                 <a:solidFill>
                   <a:srgbClr val="1B3A4B"/>
                 </a:solidFill>
-                <a:latin typeface="Microsoft YaHei" pitchFamily="34" charset="0"/>
-                <a:ea typeface="Microsoft YaHei" pitchFamily="34" charset="-122"/>
-                <a:cs typeface="Microsoft YaHei" pitchFamily="34" charset="-120"/>
+                <a:latin typeface="微软雅黑" pitchFamily="34" charset="0"/>
+                <a:ea typeface="微软雅黑" pitchFamily="34" charset="-122"/>
+                <a:cs typeface="微软雅黑" pitchFamily="34" charset="-120"/>
               </a:rPr>
               <a:t>演进路线</a:t>
             </a:r>
@@ -8687,13 +9747,12 @@
             <a:avLst/>
           </a:prstGeom>
           <a:noFill/>
-          <a:ln/>
-        </p:spPr>
-        <p:txBody>
-          <a:bodyPr wrap="square" rtlCol="0" anchor="ctr"/>
-          <a:lstStyle/>
-          <a:p>
-            <a:pPr indent="0" marL="0">
+        </p:spPr>
+        <p:txBody>
+          <a:bodyPr wrap="square" rtlCol="0" anchor="ctr"/>
+          <a:lstStyle/>
+          <a:p>
+            <a:pPr marL="0" indent="0">
               <a:buNone/>
             </a:pPr>
             <a:r>
@@ -8701,9 +9760,9 @@
                 <a:solidFill>
                   <a:srgbClr val="1B3A4B"/>
                 </a:solidFill>
-                <a:latin typeface="Microsoft YaHei" pitchFamily="34" charset="0"/>
-                <a:ea typeface="Microsoft YaHei" pitchFamily="34" charset="-122"/>
-                <a:cs typeface="Microsoft YaHei" pitchFamily="34" charset="-120"/>
+                <a:latin typeface="微软雅黑" pitchFamily="34" charset="0"/>
+                <a:ea typeface="微软雅黑" pitchFamily="34" charset="-122"/>
+                <a:cs typeface="微软雅黑" pitchFamily="34" charset="-120"/>
               </a:rPr>
               <a:t>Phase 1 — 当前</a:t>
             </a:r>
@@ -8726,13 +9785,12 @@
             <a:avLst/>
           </a:prstGeom>
           <a:noFill/>
-          <a:ln/>
-        </p:spPr>
-        <p:txBody>
-          <a:bodyPr wrap="square" rtlCol="0" anchor="ctr"/>
-          <a:lstStyle/>
-          <a:p>
-            <a:pPr indent="0" marL="0">
+        </p:spPr>
+        <p:txBody>
+          <a:bodyPr wrap="square" rtlCol="0" anchor="ctr"/>
+          <a:lstStyle/>
+          <a:p>
+            <a:pPr marL="0" indent="0">
               <a:buNone/>
             </a:pPr>
             <a:r>
@@ -8740,9 +9798,9 @@
                 <a:solidFill>
                   <a:srgbClr val="546E7A"/>
                 </a:solidFill>
-                <a:latin typeface="Microsoft YaHei" pitchFamily="34" charset="0"/>
-                <a:ea typeface="Microsoft YaHei" pitchFamily="34" charset="-122"/>
-                <a:cs typeface="Microsoft YaHei" pitchFamily="34" charset="-120"/>
+                <a:latin typeface="微软雅黑" pitchFamily="34" charset="0"/>
+                <a:ea typeface="微软雅黑" pitchFamily="34" charset="-122"/>
+                <a:cs typeface="微软雅黑" pitchFamily="34" charset="-120"/>
               </a:rPr>
               <a:t>Hive 表格式落地 · 存算分离上线</a:t>
             </a:r>
@@ -8792,13 +9850,12 @@
             <a:avLst/>
           </a:prstGeom>
           <a:noFill/>
-          <a:ln/>
-        </p:spPr>
-        <p:txBody>
-          <a:bodyPr wrap="square" rtlCol="0" anchor="ctr"/>
-          <a:lstStyle/>
-          <a:p>
-            <a:pPr indent="0" marL="0">
+        </p:spPr>
+        <p:txBody>
+          <a:bodyPr wrap="square" rtlCol="0" anchor="ctr"/>
+          <a:lstStyle/>
+          <a:p>
+            <a:pPr marL="0" indent="0">
               <a:buNone/>
             </a:pPr>
             <a:r>
@@ -8806,9 +9863,9 @@
                 <a:solidFill>
                   <a:srgbClr val="1B3A4B"/>
                 </a:solidFill>
-                <a:latin typeface="Microsoft YaHei" pitchFamily="34" charset="0"/>
-                <a:ea typeface="Microsoft YaHei" pitchFamily="34" charset="-122"/>
-                <a:cs typeface="Microsoft YaHei" pitchFamily="34" charset="-120"/>
+                <a:latin typeface="微软雅黑" pitchFamily="34" charset="0"/>
+                <a:ea typeface="微软雅黑" pitchFamily="34" charset="-122"/>
+                <a:cs typeface="微软雅黑" pitchFamily="34" charset="-120"/>
               </a:rPr>
               <a:t>Phase 2 — 升级</a:t>
             </a:r>
@@ -8831,13 +9888,12 @@
             <a:avLst/>
           </a:prstGeom>
           <a:noFill/>
-          <a:ln/>
-        </p:spPr>
-        <p:txBody>
-          <a:bodyPr wrap="square" rtlCol="0" anchor="ctr"/>
-          <a:lstStyle/>
-          <a:p>
-            <a:pPr indent="0" marL="0">
+        </p:spPr>
+        <p:txBody>
+          <a:bodyPr wrap="square" rtlCol="0" anchor="ctr"/>
+          <a:lstStyle/>
+          <a:p>
+            <a:pPr marL="0" indent="0">
               <a:buNone/>
             </a:pPr>
             <a:r>
@@ -8845,9 +9901,9 @@
                 <a:solidFill>
                   <a:srgbClr val="546E7A"/>
                 </a:solidFill>
-                <a:latin typeface="Microsoft YaHei" pitchFamily="34" charset="0"/>
-                <a:ea typeface="Microsoft YaHei" pitchFamily="34" charset="-122"/>
-                <a:cs typeface="Microsoft YaHei" pitchFamily="34" charset="-120"/>
+                <a:latin typeface="微软雅黑" pitchFamily="34" charset="0"/>
+                <a:ea typeface="微软雅黑" pitchFamily="34" charset="-122"/>
+                <a:cs typeface="微软雅黑" pitchFamily="34" charset="-120"/>
               </a:rPr>
               <a:t>Hive → Iceberg · ACID/Time Travel</a:t>
             </a:r>
@@ -8897,13 +9953,12 @@
             <a:avLst/>
           </a:prstGeom>
           <a:noFill/>
-          <a:ln/>
-        </p:spPr>
-        <p:txBody>
-          <a:bodyPr wrap="square" rtlCol="0" anchor="ctr"/>
-          <a:lstStyle/>
-          <a:p>
-            <a:pPr indent="0" marL="0">
+        </p:spPr>
+        <p:txBody>
+          <a:bodyPr wrap="square" rtlCol="0" anchor="ctr"/>
+          <a:lstStyle/>
+          <a:p>
+            <a:pPr marL="0" indent="0">
               <a:buNone/>
             </a:pPr>
             <a:r>
@@ -8911,9 +9966,9 @@
                 <a:solidFill>
                   <a:srgbClr val="1B3A4B"/>
                 </a:solidFill>
-                <a:latin typeface="Microsoft YaHei" pitchFamily="34" charset="0"/>
-                <a:ea typeface="Microsoft YaHei" pitchFamily="34" charset="-122"/>
-                <a:cs typeface="Microsoft YaHei" pitchFamily="34" charset="-120"/>
+                <a:latin typeface="微软雅黑" pitchFamily="34" charset="0"/>
+                <a:ea typeface="微软雅黑" pitchFamily="34" charset="-122"/>
+                <a:cs typeface="微软雅黑" pitchFamily="34" charset="-120"/>
               </a:rPr>
               <a:t>Phase 3 — 深化</a:t>
             </a:r>
@@ -8936,13 +9991,12 @@
             <a:avLst/>
           </a:prstGeom>
           <a:noFill/>
-          <a:ln/>
-        </p:spPr>
-        <p:txBody>
-          <a:bodyPr wrap="square" rtlCol="0" anchor="ctr"/>
-          <a:lstStyle/>
-          <a:p>
-            <a:pPr indent="0" marL="0">
+        </p:spPr>
+        <p:txBody>
+          <a:bodyPr wrap="square" rtlCol="0" anchor="ctr"/>
+          <a:lstStyle/>
+          <a:p>
+            <a:pPr marL="0" indent="0">
               <a:buNone/>
             </a:pPr>
             <a:r>
@@ -8950,9 +10004,9 @@
                 <a:solidFill>
                   <a:srgbClr val="546E7A"/>
                 </a:solidFill>
-                <a:latin typeface="Microsoft YaHei" pitchFamily="34" charset="0"/>
-                <a:ea typeface="Microsoft YaHei" pitchFamily="34" charset="-122"/>
-                <a:cs typeface="Microsoft YaHei" pitchFamily="34" charset="-120"/>
+                <a:latin typeface="微软雅黑" pitchFamily="34" charset="0"/>
+                <a:ea typeface="微软雅黑" pitchFamily="34" charset="-122"/>
+                <a:cs typeface="微软雅黑" pitchFamily="34" charset="-120"/>
               </a:rPr>
               <a:t>Feature Store (Feast) · 数据质量平台</a:t>
             </a:r>
@@ -9002,13 +10056,12 @@
             <a:avLst/>
           </a:prstGeom>
           <a:noFill/>
-          <a:ln/>
-        </p:spPr>
-        <p:txBody>
-          <a:bodyPr wrap="square" rtlCol="0" anchor="ctr"/>
-          <a:lstStyle/>
-          <a:p>
-            <a:pPr indent="0" marL="0">
+        </p:spPr>
+        <p:txBody>
+          <a:bodyPr wrap="square" rtlCol="0" anchor="ctr"/>
+          <a:lstStyle/>
+          <a:p>
+            <a:pPr marL="0" indent="0">
               <a:buNone/>
             </a:pPr>
             <a:r>
@@ -9016,9 +10069,9 @@
                 <a:solidFill>
                   <a:srgbClr val="1B3A4B"/>
                 </a:solidFill>
-                <a:latin typeface="Microsoft YaHei" pitchFamily="34" charset="0"/>
-                <a:ea typeface="Microsoft YaHei" pitchFamily="34" charset="-122"/>
-                <a:cs typeface="Microsoft YaHei" pitchFamily="34" charset="-120"/>
+                <a:latin typeface="微软雅黑" pitchFamily="34" charset="0"/>
+                <a:ea typeface="微软雅黑" pitchFamily="34" charset="-122"/>
+                <a:cs typeface="微软雅黑" pitchFamily="34" charset="-120"/>
               </a:rPr>
               <a:t>Phase 4 — 优化</a:t>
             </a:r>
@@ -9041,13 +10094,12 @@
             <a:avLst/>
           </a:prstGeom>
           <a:noFill/>
-          <a:ln/>
-        </p:spPr>
-        <p:txBody>
-          <a:bodyPr wrap="square" rtlCol="0" anchor="ctr"/>
-          <a:lstStyle/>
-          <a:p>
-            <a:pPr indent="0" marL="0">
+        </p:spPr>
+        <p:txBody>
+          <a:bodyPr wrap="square" rtlCol="0" anchor="ctr"/>
+          <a:lstStyle/>
+          <a:p>
+            <a:pPr marL="0" indent="0">
               <a:buNone/>
             </a:pPr>
             <a:r>
@@ -9055,9 +10107,9 @@
                 <a:solidFill>
                   <a:srgbClr val="546E7A"/>
                 </a:solidFill>
-                <a:latin typeface="Microsoft YaHei" pitchFamily="34" charset="0"/>
-                <a:ea typeface="Microsoft YaHei" pitchFamily="34" charset="-122"/>
-                <a:cs typeface="Microsoft YaHei" pitchFamily="34" charset="-120"/>
+                <a:latin typeface="微软雅黑" pitchFamily="34" charset="0"/>
+                <a:ea typeface="微软雅黑" pitchFamily="34" charset="-122"/>
+                <a:cs typeface="微软雅黑" pitchFamily="34" charset="-120"/>
               </a:rPr>
               <a:t>流批一体深化 · Flink 批处理扩展</a:t>
             </a:r>
@@ -9082,7 +10134,6 @@
           <a:solidFill>
             <a:srgbClr val="256D4B"/>
           </a:solidFill>
-          <a:ln/>
         </p:spPr>
       </p:sp>
       <p:sp>
@@ -9100,13 +10151,12 @@
             <a:avLst/>
           </a:prstGeom>
           <a:noFill/>
-          <a:ln/>
-        </p:spPr>
-        <p:txBody>
-          <a:bodyPr wrap="square" rtlCol="0" anchor="ctr"/>
-          <a:lstStyle/>
-          <a:p>
-            <a:pPr algn="ctr" indent="0" marL="0">
+        </p:spPr>
+        <p:txBody>
+          <a:bodyPr wrap="square" rtlCol="0" anchor="ctr"/>
+          <a:lstStyle/>
+          <a:p>
+            <a:pPr marL="0" indent="0" algn="ctr">
               <a:buNone/>
             </a:pPr>
             <a:r>
@@ -9114,9 +10164,9 @@
                 <a:solidFill>
                   <a:srgbClr val="FFFFFF"/>
                 </a:solidFill>
-                <a:latin typeface="Arial" pitchFamily="34" charset="0"/>
-                <a:ea typeface="Arial" pitchFamily="34" charset="-122"/>
-                <a:cs typeface="Arial" pitchFamily="34" charset="-120"/>
+                <a:latin typeface="Arial" panose="020B0604020202090204" pitchFamily="34" charset="0"/>
+                <a:ea typeface="Arial" panose="020B0604020202090204" pitchFamily="34" charset="-122"/>
+                <a:cs typeface="Arial" panose="020B0604020202090204" pitchFamily="34" charset="-120"/>
               </a:rPr>
               <a:t>5</a:t>
             </a:r>
@@ -9130,6 +10180,708 @@
     <a:masterClrMapping/>
   </p:clrMapOvr>
 </p:sld>
+</file>
+
+<file path=ppt/slides/slide6.xml><?xml version="1.0" encoding="utf-8"?>
+<p:sld xmlns:a="http://schemas.openxmlformats.org/drawingml/2006/main" xmlns:r="http://schemas.openxmlformats.org/officeDocument/2006/relationships" xmlns:p="http://schemas.openxmlformats.org/presentationml/2006/main">
+  <p:cSld>
+    <p:spTree>
+      <p:nvGrpSpPr>
+        <p:cNvPr id="1" name=""/>
+        <p:cNvGrpSpPr/>
+        <p:nvPr/>
+      </p:nvGrpSpPr>
+      <p:grpSpPr/>
+      <p:pic>
+        <p:nvPicPr>
+          <p:cNvPr id="2" name="图片 1"/>
+          <p:cNvPicPr>
+            <a:picLocks noChangeAspect="1"/>
+          </p:cNvPicPr>
+          <p:nvPr/>
+        </p:nvPicPr>
+        <p:blipFill>
+          <a:blip r:embed="rId1"/>
+          <a:stretch>
+            <a:fillRect/>
+          </a:stretch>
+        </p:blipFill>
+        <p:spPr>
+          <a:xfrm>
+            <a:off x="1106805" y="1045210"/>
+            <a:ext cx="7601585" cy="3348355"/>
+          </a:xfrm>
+          <a:prstGeom prst="rect">
+            <a:avLst/>
+          </a:prstGeom>
+        </p:spPr>
+      </p:pic>
+    </p:spTree>
+  </p:cSld>
+  <p:clrMapOvr>
+    <a:masterClrMapping/>
+  </p:clrMapOvr>
+</p:sld>
+</file>
+
+<file path=ppt/slides/slide7.xml><?xml version="1.0" encoding="utf-8"?>
+<p:sld xmlns:a="http://schemas.openxmlformats.org/drawingml/2006/main" xmlns:r="http://schemas.openxmlformats.org/officeDocument/2006/relationships" xmlns:p="http://schemas.openxmlformats.org/presentationml/2006/main">
+  <p:cSld>
+    <p:spTree>
+      <p:nvGrpSpPr>
+        <p:cNvPr id="1" name=""/>
+        <p:cNvGrpSpPr/>
+        <p:nvPr/>
+      </p:nvGrpSpPr>
+      <p:grpSpPr/>
+      <p:pic>
+        <p:nvPicPr>
+          <p:cNvPr id="3" name="图片 2" descr="/Users/vw/Library/Containers/com.kingsoft.wpsoffice.mac/Data/tmp/picturecompress_20260719182038/output_1.pngoutput_1"/>
+          <p:cNvPicPr>
+            <a:picLocks noChangeAspect="1"/>
+          </p:cNvPicPr>
+          <p:nvPr/>
+        </p:nvPicPr>
+        <p:blipFill>
+          <a:blip r:embed="rId1"/>
+          <a:stretch>
+            <a:fillRect/>
+          </a:stretch>
+        </p:blipFill>
+        <p:spPr>
+          <a:xfrm>
+            <a:off x="0" y="249555"/>
+            <a:ext cx="9144000" cy="4643755"/>
+          </a:xfrm>
+          <a:prstGeom prst="rect">
+            <a:avLst/>
+          </a:prstGeom>
+        </p:spPr>
+      </p:pic>
+    </p:spTree>
+  </p:cSld>
+  <p:clrMapOvr>
+    <a:masterClrMapping/>
+  </p:clrMapOvr>
+</p:sld>
+</file>
+
+<file path=ppt/slides/slide8.xml><?xml version="1.0" encoding="utf-8"?>
+<p:sld xmlns:a="http://schemas.openxmlformats.org/drawingml/2006/main" xmlns:r="http://schemas.openxmlformats.org/officeDocument/2006/relationships" xmlns:p="http://schemas.openxmlformats.org/presentationml/2006/main">
+  <p:cSld>
+    <p:spTree>
+      <p:nvGrpSpPr>
+        <p:cNvPr id="1" name=""/>
+        <p:cNvGrpSpPr/>
+        <p:nvPr/>
+      </p:nvGrpSpPr>
+      <p:grpSpPr/>
+      <p:pic>
+        <p:nvPicPr>
+          <p:cNvPr id="2" name="图片 1"/>
+          <p:cNvPicPr>
+            <a:picLocks noChangeAspect="1"/>
+          </p:cNvPicPr>
+          <p:nvPr/>
+        </p:nvPicPr>
+        <p:blipFill>
+          <a:blip r:embed="rId1"/>
+          <a:stretch>
+            <a:fillRect/>
+          </a:stretch>
+        </p:blipFill>
+        <p:spPr>
+          <a:xfrm>
+            <a:off x="641350" y="0"/>
+            <a:ext cx="7860665" cy="5143500"/>
+          </a:xfrm>
+          <a:prstGeom prst="rect">
+            <a:avLst/>
+          </a:prstGeom>
+        </p:spPr>
+      </p:pic>
+    </p:spTree>
+  </p:cSld>
+  <p:clrMapOvr>
+    <a:masterClrMapping/>
+  </p:clrMapOvr>
+</p:sld>
+</file>
+
+<file path=ppt/slides/slide9.xml><?xml version="1.0" encoding="utf-8"?>
+<p:sld xmlns:a="http://schemas.openxmlformats.org/drawingml/2006/main" xmlns:r="http://schemas.openxmlformats.org/officeDocument/2006/relationships" xmlns:p="http://schemas.openxmlformats.org/presentationml/2006/main">
+  <p:cSld>
+    <p:spTree>
+      <p:nvGrpSpPr>
+        <p:cNvPr id="1" name=""/>
+        <p:cNvGrpSpPr/>
+        <p:nvPr/>
+      </p:nvGrpSpPr>
+      <p:grpSpPr/>
+    </p:spTree>
+  </p:cSld>
+  <p:clrMapOvr>
+    <a:masterClrMapping/>
+  </p:clrMapOvr>
+</p:sld>
+</file>
+
+<file path=ppt/tags/tag1.xml><?xml version="1.0" encoding="utf-8"?>
+<p:tagLst xmlns:p="http://schemas.openxmlformats.org/presentationml/2006/main">
+  <p:tag name="KSO_WM_UNIT_HIGHLIGHT" val="0"/>
+  <p:tag name="KSO_WM_UNIT_COMPATIBLE" val="0"/>
+  <p:tag name="KSO_WM_UNIT_DIAGRAM_ISNUMVISUAL" val="0"/>
+  <p:tag name="KSO_WM_UNIT_DIAGRAM_ISREFERUNIT" val="0"/>
+  <p:tag name="KSO_WM_UNIT_ID" val="_1*a*1"/>
+  <p:tag name="KSO_WM_UNIT_LAYERLEVEL" val="1"/>
+  <p:tag name="KSO_WM_TAG_VERSION" val="3.0"/>
+  <p:tag name="KSO_WM_BEAUTIFY_FLAG" val="#wm#"/>
+  <p:tag name="KSO_WM_UNIT_ISCONTENTSTITLE" val="0"/>
+  <p:tag name="KSO_WM_UNIT_ISNUMDGMTITLE" val="0"/>
+  <p:tag name="KSO_WM_UNIT_PRESET_TEXT" val="单击此处编辑母版标题样式"/>
+  <p:tag name="KSO_WM_UNIT_NOCLEAR" val="0"/>
+  <p:tag name="KSO_WM_UNIT_VALUE" val="20"/>
+  <p:tag name="KSO_WM_UNIT_TYPE" val="a"/>
+  <p:tag name="KSO_WM_UNIT_INDEX" val="1"/>
+</p:tagLst>
+</file>
+
+<file path=ppt/tags/tag10.xml><?xml version="1.0" encoding="utf-8"?>
+<p:tagLst xmlns:p="http://schemas.openxmlformats.org/presentationml/2006/main">
+  <p:tag name="KSO_WM_UNIT_SUBTYPE" val="a"/>
+  <p:tag name="KSO_WM_UNIT_NOCLEAR" val="0"/>
+  <p:tag name="KSO_WM_UNIT_HIGHLIGHT" val="0"/>
+  <p:tag name="KSO_WM_UNIT_COMPATIBLE" val="0"/>
+  <p:tag name="KSO_WM_UNIT_DIAGRAM_ISNUMVISUAL" val="0"/>
+  <p:tag name="KSO_WM_UNIT_DIAGRAM_ISREFERUNIT" val="0"/>
+  <p:tag name="KSO_WM_DIAGRAM_GROUP_CODE" val="l1-1"/>
+  <p:tag name="KSO_WM_UNIT_TYPE" val="l_h_f"/>
+  <p:tag name="KSO_WM_UNIT_INDEX" val="1_2_1"/>
+  <p:tag name="KSO_WM_UNIT_ID" val="diagram20235161_3*l_h_f*1_2_1"/>
+  <p:tag name="KSO_WM_TEMPLATE_CATEGORY" val="diagram"/>
+  <p:tag name="KSO_WM_TEMPLATE_INDEX" val="20235161"/>
+  <p:tag name="KSO_WM_UNIT_LAYERLEVEL" val="1_1_1"/>
+  <p:tag name="KSO_WM_TAG_VERSION" val="3.0"/>
+  <p:tag name="KSO_WM_UNIT_VALUE" val="160"/>
+  <p:tag name="KSO_WM_DIAGRAM_MAX_ITEMCNT" val="4"/>
+  <p:tag name="KSO_WM_DIAGRAM_MIN_ITEMCNT" val="2"/>
+  <p:tag name="KSO_WM_DIAGRAM_VIRTUALLY_FRAME" val="{&quot;height&quot;:389,&quot;left&quot;:-65.24374626099593,&quot;top&quot;:35.90003937007877,&quot;width&quot;:850.4500122070312}"/>
+  <p:tag name="KSO_WM_DIAGRAM_COLOR_MATCH_VALUE" val="{&quot;shape&quot;:{&quot;fill&quot;:{&quot;type&quot;:0},&quot;glow&quot;:{&quot;colorType&quot;:0},&quot;line&quot;:{&quot;type&quot;:0},&quot;shadow&quot;:{&quot;colorType&quot;:0},&quot;threeD&quot;:{&quot;curvedSurface&quot;:{&quot;brightness&quot;:0,&quot;colorType&quot;:2,&quot;rgb&quot;:&quot;#000000&quot;},&quot;depth&quot;:{&quot;colorType&quot;:0}}},&quot;text&quot;:{&quot;fill&quot;:{&quot;solid&quot;:{&quot;brightness&quot;:0.15000000596046448,&quot;colorType&quot;:1,&quot;foreColorIndex&quot;:13,&quot;transparency&quot;:0},&quot;type&quot;:1},&quot;glow&quot;:{&quot;colorType&quot;:0},&quot;line&quot;:{&quot;type&quot;:0},&quot;shadow&quot;:{&quot;colorType&quot;:0},&quot;threeD&quot;:{&quot;curvedSurface&quot;:{&quot;brightness&quot;:0,&quot;colorType&quot;:2,&quot;rgb&quot;:&quot;#000000&quot;},&quot;depth&quot;:{&quot;colorType&quot;:0}}}}"/>
+  <p:tag name="KSO_WM_UNIT_TEXT_LAYER_COUNT" val="1"/>
+  <p:tag name="KSO_WM_BEAUTIFY_FLAG" val="#wm#"/>
+  <p:tag name="KSO_WM_DIAGRAM_VERSION" val="3"/>
+  <p:tag name="KSO_WM_DIAGRAM_COLOR_TRICK" val="1"/>
+  <p:tag name="KSO_WM_DIAGRAM_COLOR_TEXT_CAN_REMOVE" val="n"/>
+  <p:tag name="KSO_WM_UNIT_PRESET_TEXT" val="单击此处添加文本具体内容，简明扼要地阐述您的观点。根据需要可酌情增减文字，以便观者准确地理解您传达的思想。单击此处添加文本具体内容，简明扼要地阐述您的观点。根据需要可酌情增减文字。单击此处添加文本具体内容，简明扼要地阐述您的观点"/>
+  <p:tag name="KSO_WM_UNIT_TEXT_FILL_FORE_SCHEMECOLOR_INDEX" val="1"/>
+  <p:tag name="KSO_WM_UNIT_TEXT_FILL_TYPE" val="1"/>
+  <p:tag name="KSO_WM_UNIT_TEXT_TYPE" val="1"/>
+  <p:tag name="KSO_WM_UNIT_USESOURCEFORMAT_APPLY" val="0"/>
+</p:tagLst>
+</file>
+
+<file path=ppt/tags/tag11.xml><?xml version="1.0" encoding="utf-8"?>
+<p:tagLst xmlns:p="http://schemas.openxmlformats.org/presentationml/2006/main">
+  <p:tag name="KSO_WM_UNIT_HIGHLIGHT" val="0"/>
+  <p:tag name="KSO_WM_UNIT_COMPATIBLE" val="0"/>
+  <p:tag name="KSO_WM_UNIT_DIAGRAM_ISNUMVISUAL" val="0"/>
+  <p:tag name="KSO_WM_UNIT_DIAGRAM_ISREFERUNIT" val="0"/>
+  <p:tag name="KSO_WM_DIAGRAM_GROUP_CODE" val="l1-1"/>
+  <p:tag name="KSO_WM_UNIT_ID" val="diagram20235161_3*l_h_i*1_2_1"/>
+  <p:tag name="KSO_WM_TEMPLATE_CATEGORY" val="diagram"/>
+  <p:tag name="KSO_WM_TEMPLATE_INDEX" val="20235161"/>
+  <p:tag name="KSO_WM_UNIT_LAYERLEVEL" val="1_1_1"/>
+  <p:tag name="KSO_WM_TAG_VERSION" val="3.0"/>
+  <p:tag name="KSO_WM_BEAUTIFY_FLAG" val="#wm#"/>
+  <p:tag name="KSO_WM_UNIT_TYPE" val="l_h_i"/>
+  <p:tag name="KSO_WM_UNIT_INDEX" val="1_2_1"/>
+  <p:tag name="KSO_WM_DIAGRAM_VERSION" val="3"/>
+  <p:tag name="KSO_WM_DIAGRAM_COLOR_TRICK" val="1"/>
+  <p:tag name="KSO_WM_DIAGRAM_COLOR_TEXT_CAN_REMOVE" val="n"/>
+  <p:tag name="KSO_WM_UNIT_FILL_TYPE" val="3"/>
+  <p:tag name="KSO_WM_DIAGRAM_MAX_ITEMCNT" val="4"/>
+  <p:tag name="KSO_WM_DIAGRAM_MIN_ITEMCNT" val="2"/>
+  <p:tag name="KSO_WM_DIAGRAM_VIRTUALLY_FRAME" val="{&quot;height&quot;:389,&quot;left&quot;:-65.24374626099593,&quot;top&quot;:35.90003937007877,&quot;width&quot;:850.4500122070312}"/>
+  <p:tag name="KSO_WM_DIAGRAM_COLOR_MATCH_VALUE" val="{&quot;shape&quot;:{&quot;fill&quot;:{&quot;gradient&quot;:[{&quot;brightness&quot;:0.6000000238418579,&quot;colorType&quot;:1,&quot;foreColorIndex&quot;:5,&quot;pos&quot;:0,&quot;transparency&quot;:0},{&quot;brightness&quot;:0,&quot;colorType&quot;:1,&quot;foreColorIndex&quot;:5,&quot;pos&quot;:1,&quot;transparency&quot;:0}],&quot;type&quot;:3},&quot;glow&quot;:{&quot;colorType&quot;:0},&quot;line&quot;:{&quot;type&quot;:0},&quot;shadow&quot;:{&quot;brightness&quot;:-0.25,&quot;colorType&quot;:1,&quot;foreColorIndex&quot;:5,&quot;transparency&quot;:0.8500000238418579},&quot;threeD&quot;:{&quot;curvedSurface&quot;:{&quot;brightness&quot;:0,&quot;colorType&quot;:2,&quot;rgb&quot;:&quot;#000000&quot;},&quot;depth&quot;:{&quot;colorType&quot;:0}}},&quot;text&quot;:{&quot;fill&quot;:{&quot;solid&quot;:{&quot;brightness&quot;:0,&quot;colorType&quot;:1,&quot;foreColorIndex&quot;:2,&quot;transparency&quot;:0},&quot;type&quot;:1},&quot;glow&quot;:{&quot;colorType&quot;:0},&quot;line&quot;:{&quot;type&quot;:0},&quot;shadow&quot;:{&quot;colorType&quot;:0},&quot;threeD&quot;:{&quot;curvedSurface&quot;:{&quot;brightness&quot;:0,&quot;colorType&quot;:2,&quot;rgb&quot;:&quot;#000000&quot;},&quot;depth&quot;:{&quot;colorType&quot;:0}}}}"/>
+  <p:tag name="KSO_WM_UNIT_SHADOW_SCHEMECOLOR_INDEX" val="5"/>
+  <p:tag name="KSO_WM_UNIT_TEXT_FILL_FORE_SCHEMECOLOR_INDEX" val="2"/>
+  <p:tag name="KSO_WM_UNIT_TEXT_FILL_TYPE" val="1"/>
+  <p:tag name="KSO_WM_UNIT_USESOURCEFORMAT_APPLY" val="0"/>
+</p:tagLst>
+</file>
+
+<file path=ppt/tags/tag12.xml><?xml version="1.0" encoding="utf-8"?>
+<p:tagLst xmlns:p="http://schemas.openxmlformats.org/presentationml/2006/main">
+  <p:tag name="KSO_WM_UNIT_HIGHLIGHT" val="0"/>
+  <p:tag name="KSO_WM_UNIT_COMPATIBLE" val="0"/>
+  <p:tag name="KSO_WM_UNIT_DIAGRAM_ISNUMVISUAL" val="0"/>
+  <p:tag name="KSO_WM_UNIT_DIAGRAM_ISREFERUNIT" val="0"/>
+  <p:tag name="KSO_WM_DIAGRAM_GROUP_CODE" val="l1-1"/>
+  <p:tag name="KSO_WM_UNIT_ID" val="diagram20235161_3*l_h_i*1_3_2"/>
+  <p:tag name="KSO_WM_TEMPLATE_CATEGORY" val="diagram"/>
+  <p:tag name="KSO_WM_TEMPLATE_INDEX" val="20235161"/>
+  <p:tag name="KSO_WM_UNIT_LAYERLEVEL" val="1_1_1"/>
+  <p:tag name="KSO_WM_TAG_VERSION" val="3.0"/>
+  <p:tag name="KSO_WM_BEAUTIFY_FLAG" val="#wm#"/>
+  <p:tag name="KSO_WM_UNIT_TYPE" val="l_h_i"/>
+  <p:tag name="KSO_WM_UNIT_INDEX" val="1_3_2"/>
+  <p:tag name="KSO_WM_DIAGRAM_VERSION" val="3"/>
+  <p:tag name="KSO_WM_DIAGRAM_COLOR_TRICK" val="1"/>
+  <p:tag name="KSO_WM_DIAGRAM_COLOR_TEXT_CAN_REMOVE" val="n"/>
+  <p:tag name="KSO_WM_UNIT_LINE_FORE_SCHEMECOLOR_INDEX" val="5"/>
+  <p:tag name="KSO_WM_DIAGRAM_MAX_ITEMCNT" val="4"/>
+  <p:tag name="KSO_WM_DIAGRAM_MIN_ITEMCNT" val="2"/>
+  <p:tag name="KSO_WM_DIAGRAM_VIRTUALLY_FRAME" val="{&quot;height&quot;:389,&quot;left&quot;:-65.24374626099593,&quot;top&quot;:35.90003937007877,&quot;width&quot;:850.4500122070312}"/>
+  <p:tag name="KSO_WM_DIAGRAM_COLOR_MATCH_VALUE" val="{&quot;shape&quot;:{&quot;fill&quot;:{&quot;type&quot;:0},&quot;glow&quot;:{&quot;colorType&quot;:0},&quot;line&quot;:{&quot;solidLine&quot;:{&quot;brightness&quot;:0.6000000238418579,&quot;colorType&quot;:1,&quot;foreColorIndex&quot;:5,&quot;transparency&quot;:0.6000000238418579},&quot;type&quot;:1},&quot;shadow&quot;:{&quot;colorType&quot;:0},&quot;threeD&quot;:{&quot;curvedSurface&quot;:{&quot;brightness&quot;:0,&quot;colorType&quot;:2,&quot;rgb&quot;:&quot;#000000&quot;},&quot;depth&quot;:{&quot;colorType&quot;:0}}},&quot;text&quot;:{&quot;fill&quot;:{},&quot;glow&quot;:{},&quot;line&quot;:{},&quot;shadow&quot;:{},&quot;threeD&quot;:{}}}"/>
+  <p:tag name="KSO_WM_UNIT_LINE_FILL_TYPE" val="2"/>
+  <p:tag name="KSO_WM_UNIT_USESOURCEFORMAT_APPLY" val="0"/>
+</p:tagLst>
+</file>
+
+<file path=ppt/tags/tag13.xml><?xml version="1.0" encoding="utf-8"?>
+<p:tagLst xmlns:p="http://schemas.openxmlformats.org/presentationml/2006/main">
+  <p:tag name="KSO_WM_UNIT_SUBTYPE" val="a"/>
+  <p:tag name="KSO_WM_UNIT_NOCLEAR" val="0"/>
+  <p:tag name="KSO_WM_UNIT_HIGHLIGHT" val="0"/>
+  <p:tag name="KSO_WM_UNIT_COMPATIBLE" val="0"/>
+  <p:tag name="KSO_WM_UNIT_DIAGRAM_ISNUMVISUAL" val="0"/>
+  <p:tag name="KSO_WM_UNIT_DIAGRAM_ISREFERUNIT" val="0"/>
+  <p:tag name="KSO_WM_DIAGRAM_GROUP_CODE" val="l1-1"/>
+  <p:tag name="KSO_WM_UNIT_TYPE" val="l_h_f"/>
+  <p:tag name="KSO_WM_UNIT_INDEX" val="1_3_1"/>
+  <p:tag name="KSO_WM_UNIT_ID" val="diagram20235161_3*l_h_f*1_3_1"/>
+  <p:tag name="KSO_WM_TEMPLATE_CATEGORY" val="diagram"/>
+  <p:tag name="KSO_WM_TEMPLATE_INDEX" val="20235161"/>
+  <p:tag name="KSO_WM_UNIT_LAYERLEVEL" val="1_1_1"/>
+  <p:tag name="KSO_WM_TAG_VERSION" val="3.0"/>
+  <p:tag name="KSO_WM_UNIT_VALUE" val="160"/>
+  <p:tag name="KSO_WM_DIAGRAM_MAX_ITEMCNT" val="4"/>
+  <p:tag name="KSO_WM_DIAGRAM_MIN_ITEMCNT" val="2"/>
+  <p:tag name="KSO_WM_DIAGRAM_VIRTUALLY_FRAME" val="{&quot;height&quot;:389,&quot;left&quot;:-65.24374626099593,&quot;top&quot;:35.90003937007877,&quot;width&quot;:850.4500122070312}"/>
+  <p:tag name="KSO_WM_DIAGRAM_COLOR_MATCH_VALUE" val="{&quot;shape&quot;:{&quot;fill&quot;:{&quot;type&quot;:0},&quot;glow&quot;:{&quot;colorType&quot;:0},&quot;line&quot;:{&quot;type&quot;:0},&quot;shadow&quot;:{&quot;colorType&quot;:0},&quot;threeD&quot;:{&quot;curvedSurface&quot;:{&quot;brightness&quot;:0,&quot;colorType&quot;:2,&quot;rgb&quot;:&quot;#000000&quot;},&quot;depth&quot;:{&quot;colorType&quot;:0}}},&quot;text&quot;:{&quot;fill&quot;:{&quot;solid&quot;:{&quot;brightness&quot;:0.15000000596046448,&quot;colorType&quot;:1,&quot;foreColorIndex&quot;:13,&quot;transparency&quot;:0},&quot;type&quot;:1},&quot;glow&quot;:{&quot;colorType&quot;:0},&quot;line&quot;:{&quot;type&quot;:0},&quot;shadow&quot;:{&quot;colorType&quot;:0},&quot;threeD&quot;:{&quot;curvedSurface&quot;:{&quot;brightness&quot;:0,&quot;colorType&quot;:2,&quot;rgb&quot;:&quot;#000000&quot;},&quot;depth&quot;:{&quot;colorType&quot;:0}}}}"/>
+  <p:tag name="KSO_WM_UNIT_TEXT_LAYER_COUNT" val="1"/>
+  <p:tag name="KSO_WM_BEAUTIFY_FLAG" val="#wm#"/>
+  <p:tag name="KSO_WM_DIAGRAM_VERSION" val="3"/>
+  <p:tag name="KSO_WM_DIAGRAM_COLOR_TRICK" val="1"/>
+  <p:tag name="KSO_WM_DIAGRAM_COLOR_TEXT_CAN_REMOVE" val="n"/>
+  <p:tag name="KSO_WM_UNIT_PRESET_TEXT" val="单击此处添加文本具体内容，简明扼要地阐述您的观点。根据需要可酌情增减文字，以便观者准确地理解您传达的思想。单击此处添加文本具体内容，简明扼要地阐述您的观点。根据需要可酌情增减文字。单击此处添加文本具体内容，简明扼要地阐述您的观点"/>
+  <p:tag name="KSO_WM_UNIT_TEXT_FILL_FORE_SCHEMECOLOR_INDEX" val="1"/>
+  <p:tag name="KSO_WM_UNIT_TEXT_FILL_TYPE" val="1"/>
+  <p:tag name="KSO_WM_UNIT_TEXT_TYPE" val="1"/>
+  <p:tag name="KSO_WM_UNIT_USESOURCEFORMAT_APPLY" val="0"/>
+</p:tagLst>
+</file>
+
+<file path=ppt/tags/tag14.xml><?xml version="1.0" encoding="utf-8"?>
+<p:tagLst xmlns:p="http://schemas.openxmlformats.org/presentationml/2006/main">
+  <p:tag name="KSO_WM_UNIT_HIGHLIGHT" val="0"/>
+  <p:tag name="KSO_WM_UNIT_COMPATIBLE" val="0"/>
+  <p:tag name="KSO_WM_UNIT_DIAGRAM_ISNUMVISUAL" val="0"/>
+  <p:tag name="KSO_WM_UNIT_DIAGRAM_ISREFERUNIT" val="0"/>
+  <p:tag name="KSO_WM_DIAGRAM_GROUP_CODE" val="l1-1"/>
+  <p:tag name="KSO_WM_UNIT_ID" val="diagram20235161_3*l_h_i*1_3_1"/>
+  <p:tag name="KSO_WM_TEMPLATE_CATEGORY" val="diagram"/>
+  <p:tag name="KSO_WM_TEMPLATE_INDEX" val="20235161"/>
+  <p:tag name="KSO_WM_UNIT_LAYERLEVEL" val="1_1_1"/>
+  <p:tag name="KSO_WM_TAG_VERSION" val="3.0"/>
+  <p:tag name="KSO_WM_BEAUTIFY_FLAG" val="#wm#"/>
+  <p:tag name="KSO_WM_UNIT_TYPE" val="l_h_i"/>
+  <p:tag name="KSO_WM_UNIT_INDEX" val="1_3_1"/>
+  <p:tag name="KSO_WM_DIAGRAM_VERSION" val="3"/>
+  <p:tag name="KSO_WM_DIAGRAM_COLOR_TRICK" val="1"/>
+  <p:tag name="KSO_WM_DIAGRAM_COLOR_TEXT_CAN_REMOVE" val="n"/>
+  <p:tag name="KSO_WM_UNIT_FILL_TYPE" val="3"/>
+  <p:tag name="KSO_WM_DIAGRAM_MAX_ITEMCNT" val="4"/>
+  <p:tag name="KSO_WM_DIAGRAM_MIN_ITEMCNT" val="2"/>
+  <p:tag name="KSO_WM_DIAGRAM_VIRTUALLY_FRAME" val="{&quot;height&quot;:389,&quot;left&quot;:-65.24374626099593,&quot;top&quot;:35.90003937007877,&quot;width&quot;:850.4500122070312}"/>
+  <p:tag name="KSO_WM_DIAGRAM_COLOR_MATCH_VALUE" val="{&quot;shape&quot;:{&quot;fill&quot;:{&quot;gradient&quot;:[{&quot;brightness&quot;:0.6000000238418579,&quot;colorType&quot;:1,&quot;foreColorIndex&quot;:5,&quot;pos&quot;:0,&quot;transparency&quot;:0},{&quot;brightness&quot;:0,&quot;colorType&quot;:1,&quot;foreColorIndex&quot;:5,&quot;pos&quot;:1,&quot;transparency&quot;:0}],&quot;type&quot;:3},&quot;glow&quot;:{&quot;colorType&quot;:0},&quot;line&quot;:{&quot;type&quot;:0},&quot;shadow&quot;:{&quot;brightness&quot;:-0.25,&quot;colorType&quot;:1,&quot;foreColorIndex&quot;:5,&quot;transparency&quot;:0.8500000238418579},&quot;threeD&quot;:{&quot;curvedSurface&quot;:{&quot;brightness&quot;:0,&quot;colorType&quot;:2,&quot;rgb&quot;:&quot;#000000&quot;},&quot;depth&quot;:{&quot;colorType&quot;:0}}},&quot;text&quot;:{&quot;fill&quot;:{&quot;solid&quot;:{&quot;brightness&quot;:0,&quot;colorType&quot;:1,&quot;foreColorIndex&quot;:2,&quot;transparency&quot;:0},&quot;type&quot;:1},&quot;glow&quot;:{&quot;colorType&quot;:0},&quot;line&quot;:{&quot;type&quot;:0},&quot;shadow&quot;:{&quot;colorType&quot;:0},&quot;threeD&quot;:{&quot;curvedSurface&quot;:{&quot;brightness&quot;:0,&quot;colorType&quot;:2,&quot;rgb&quot;:&quot;#000000&quot;},&quot;depth&quot;:{&quot;colorType&quot;:0}}}}"/>
+  <p:tag name="KSO_WM_UNIT_SHADOW_SCHEMECOLOR_INDEX" val="5"/>
+  <p:tag name="KSO_WM_UNIT_TEXT_FILL_FORE_SCHEMECOLOR_INDEX" val="2"/>
+  <p:tag name="KSO_WM_UNIT_TEXT_FILL_TYPE" val="1"/>
+  <p:tag name="KSO_WM_UNIT_USESOURCEFORMAT_APPLY" val="0"/>
+</p:tagLst>
+</file>
+
+<file path=ppt/tags/tag15.xml><?xml version="1.0" encoding="utf-8"?>
+<p:tagLst xmlns:p="http://schemas.openxmlformats.org/presentationml/2006/main">
+  <p:tag name="KSO_WM_UNIT_HIGHLIGHT" val="0"/>
+  <p:tag name="KSO_WM_UNIT_COMPATIBLE" val="0"/>
+  <p:tag name="KSO_WM_UNIT_DIAGRAM_ISNUMVISUAL" val="0"/>
+  <p:tag name="KSO_WM_UNIT_DIAGRAM_ISREFERUNIT" val="0"/>
+  <p:tag name="KSO_WM_DIAGRAM_GROUP_CODE" val="l1-1"/>
+  <p:tag name="KSO_WM_UNIT_ID" val="diagram20235161_3*l_h_i*1_4_2"/>
+  <p:tag name="KSO_WM_TEMPLATE_CATEGORY" val="diagram"/>
+  <p:tag name="KSO_WM_TEMPLATE_INDEX" val="20235161"/>
+  <p:tag name="KSO_WM_UNIT_LAYERLEVEL" val="1_1_1"/>
+  <p:tag name="KSO_WM_TAG_VERSION" val="3.0"/>
+  <p:tag name="KSO_WM_BEAUTIFY_FLAG" val="#wm#"/>
+  <p:tag name="KSO_WM_UNIT_TYPE" val="l_h_i"/>
+  <p:tag name="KSO_WM_UNIT_INDEX" val="1_4_2"/>
+  <p:tag name="KSO_WM_DIAGRAM_VERSION" val="3"/>
+  <p:tag name="KSO_WM_DIAGRAM_COLOR_TRICK" val="1"/>
+  <p:tag name="KSO_WM_DIAGRAM_COLOR_TEXT_CAN_REMOVE" val="n"/>
+  <p:tag name="KSO_WM_UNIT_LINE_FORE_SCHEMECOLOR_INDEX" val="5"/>
+  <p:tag name="KSO_WM_DIAGRAM_MAX_ITEMCNT" val="4"/>
+  <p:tag name="KSO_WM_DIAGRAM_MIN_ITEMCNT" val="2"/>
+  <p:tag name="KSO_WM_DIAGRAM_VIRTUALLY_FRAME" val="{&quot;height&quot;:389,&quot;left&quot;:-65.24374626099593,&quot;top&quot;:35.90003937007877,&quot;width&quot;:850.4500122070312}"/>
+  <p:tag name="KSO_WM_DIAGRAM_COLOR_MATCH_VALUE" val="{&quot;shape&quot;:{&quot;fill&quot;:{&quot;type&quot;:0},&quot;glow&quot;:{&quot;colorType&quot;:0},&quot;line&quot;:{&quot;solidLine&quot;:{&quot;brightness&quot;:0.6000000238418579,&quot;colorType&quot;:1,&quot;foreColorIndex&quot;:5,&quot;transparency&quot;:0.6000000238418579},&quot;type&quot;:1},&quot;shadow&quot;:{&quot;colorType&quot;:0},&quot;threeD&quot;:{&quot;curvedSurface&quot;:{&quot;brightness&quot;:0,&quot;colorType&quot;:2,&quot;rgb&quot;:&quot;#000000&quot;},&quot;depth&quot;:{&quot;colorType&quot;:0}}},&quot;text&quot;:{&quot;fill&quot;:{},&quot;glow&quot;:{},&quot;line&quot;:{},&quot;shadow&quot;:{},&quot;threeD&quot;:{}}}"/>
+  <p:tag name="KSO_WM_UNIT_LINE_FILL_TYPE" val="2"/>
+  <p:tag name="KSO_WM_UNIT_USESOURCEFORMAT_APPLY" val="0"/>
+</p:tagLst>
+</file>
+
+<file path=ppt/tags/tag16.xml><?xml version="1.0" encoding="utf-8"?>
+<p:tagLst xmlns:p="http://schemas.openxmlformats.org/presentationml/2006/main">
+  <p:tag name="KSO_WM_UNIT_SUBTYPE" val="a"/>
+  <p:tag name="KSO_WM_UNIT_NOCLEAR" val="0"/>
+  <p:tag name="KSO_WM_UNIT_HIGHLIGHT" val="0"/>
+  <p:tag name="KSO_WM_UNIT_COMPATIBLE" val="0"/>
+  <p:tag name="KSO_WM_UNIT_DIAGRAM_ISNUMVISUAL" val="0"/>
+  <p:tag name="KSO_WM_UNIT_DIAGRAM_ISREFERUNIT" val="0"/>
+  <p:tag name="KSO_WM_DIAGRAM_GROUP_CODE" val="l1-1"/>
+  <p:tag name="KSO_WM_UNIT_TYPE" val="l_h_f"/>
+  <p:tag name="KSO_WM_UNIT_INDEX" val="1_4_1"/>
+  <p:tag name="KSO_WM_UNIT_ID" val="diagram20235161_3*l_h_f*1_4_1"/>
+  <p:tag name="KSO_WM_TEMPLATE_CATEGORY" val="diagram"/>
+  <p:tag name="KSO_WM_TEMPLATE_INDEX" val="20235161"/>
+  <p:tag name="KSO_WM_UNIT_LAYERLEVEL" val="1_1_1"/>
+  <p:tag name="KSO_WM_TAG_VERSION" val="3.0"/>
+  <p:tag name="KSO_WM_UNIT_VALUE" val="160"/>
+  <p:tag name="KSO_WM_DIAGRAM_MAX_ITEMCNT" val="4"/>
+  <p:tag name="KSO_WM_DIAGRAM_MIN_ITEMCNT" val="2"/>
+  <p:tag name="KSO_WM_DIAGRAM_VIRTUALLY_FRAME" val="{&quot;height&quot;:389,&quot;left&quot;:-65.24374626099593,&quot;top&quot;:35.90003937007877,&quot;width&quot;:850.4500122070312}"/>
+  <p:tag name="KSO_WM_DIAGRAM_COLOR_MATCH_VALUE" val="{&quot;shape&quot;:{&quot;fill&quot;:{&quot;type&quot;:0},&quot;glow&quot;:{&quot;colorType&quot;:0},&quot;line&quot;:{&quot;type&quot;:0},&quot;shadow&quot;:{&quot;colorType&quot;:0},&quot;threeD&quot;:{&quot;curvedSurface&quot;:{&quot;brightness&quot;:0,&quot;colorType&quot;:2,&quot;rgb&quot;:&quot;#000000&quot;},&quot;depth&quot;:{&quot;colorType&quot;:0}}},&quot;text&quot;:{&quot;fill&quot;:{&quot;solid&quot;:{&quot;brightness&quot;:0.15000000596046448,&quot;colorType&quot;:1,&quot;foreColorIndex&quot;:13,&quot;transparency&quot;:0},&quot;type&quot;:1},&quot;glow&quot;:{&quot;colorType&quot;:0},&quot;line&quot;:{&quot;type&quot;:0},&quot;shadow&quot;:{&quot;colorType&quot;:0},&quot;threeD&quot;:{&quot;curvedSurface&quot;:{&quot;brightness&quot;:0,&quot;colorType&quot;:2,&quot;rgb&quot;:&quot;#000000&quot;},&quot;depth&quot;:{&quot;colorType&quot;:0}}}}"/>
+  <p:tag name="KSO_WM_UNIT_TEXT_LAYER_COUNT" val="1"/>
+  <p:tag name="KSO_WM_BEAUTIFY_FLAG" val="#wm#"/>
+  <p:tag name="KSO_WM_DIAGRAM_VERSION" val="3"/>
+  <p:tag name="KSO_WM_DIAGRAM_COLOR_TRICK" val="1"/>
+  <p:tag name="KSO_WM_DIAGRAM_COLOR_TEXT_CAN_REMOVE" val="n"/>
+  <p:tag name="KSO_WM_UNIT_PRESET_TEXT" val="单击此处添加文本具体内容，简明扼要地阐述您的观点。根据需要可酌情增减文字，以便观者准确地理解您传达的思想。单击此处添加文本具体内容，简明扼要地阐述您的观点。根据需要可酌情增减文字。单击此处添加文本具体内容，简明扼要地阐述您的观点"/>
+  <p:tag name="KSO_WM_UNIT_TEXT_FILL_FORE_SCHEMECOLOR_INDEX" val="1"/>
+  <p:tag name="KSO_WM_UNIT_TEXT_FILL_TYPE" val="1"/>
+  <p:tag name="KSO_WM_UNIT_TEXT_TYPE" val="1"/>
+  <p:tag name="KSO_WM_UNIT_USESOURCEFORMAT_APPLY" val="0"/>
+</p:tagLst>
+</file>
+
+<file path=ppt/tags/tag17.xml><?xml version="1.0" encoding="utf-8"?>
+<p:tagLst xmlns:p="http://schemas.openxmlformats.org/presentationml/2006/main">
+  <p:tag name="KSO_WM_UNIT_HIGHLIGHT" val="0"/>
+  <p:tag name="KSO_WM_UNIT_COMPATIBLE" val="0"/>
+  <p:tag name="KSO_WM_UNIT_DIAGRAM_ISNUMVISUAL" val="0"/>
+  <p:tag name="KSO_WM_UNIT_DIAGRAM_ISREFERUNIT" val="0"/>
+  <p:tag name="KSO_WM_DIAGRAM_GROUP_CODE" val="l1-1"/>
+  <p:tag name="KSO_WM_UNIT_ID" val="diagram20235161_3*l_h_i*1_4_1"/>
+  <p:tag name="KSO_WM_TEMPLATE_CATEGORY" val="diagram"/>
+  <p:tag name="KSO_WM_TEMPLATE_INDEX" val="20235161"/>
+  <p:tag name="KSO_WM_UNIT_LAYERLEVEL" val="1_1_1"/>
+  <p:tag name="KSO_WM_TAG_VERSION" val="3.0"/>
+  <p:tag name="KSO_WM_BEAUTIFY_FLAG" val="#wm#"/>
+  <p:tag name="KSO_WM_UNIT_TYPE" val="l_h_i"/>
+  <p:tag name="KSO_WM_UNIT_INDEX" val="1_4_1"/>
+  <p:tag name="KSO_WM_DIAGRAM_VERSION" val="3"/>
+  <p:tag name="KSO_WM_DIAGRAM_COLOR_TRICK" val="1"/>
+  <p:tag name="KSO_WM_DIAGRAM_COLOR_TEXT_CAN_REMOVE" val="n"/>
+  <p:tag name="KSO_WM_UNIT_FILL_TYPE" val="3"/>
+  <p:tag name="KSO_WM_DIAGRAM_MAX_ITEMCNT" val="4"/>
+  <p:tag name="KSO_WM_DIAGRAM_MIN_ITEMCNT" val="2"/>
+  <p:tag name="KSO_WM_DIAGRAM_VIRTUALLY_FRAME" val="{&quot;height&quot;:389,&quot;left&quot;:-65.24374626099593,&quot;top&quot;:35.90003937007877,&quot;width&quot;:850.4500122070312}"/>
+  <p:tag name="KSO_WM_DIAGRAM_COLOR_MATCH_VALUE" val="{&quot;shape&quot;:{&quot;fill&quot;:{&quot;gradient&quot;:[{&quot;brightness&quot;:0.6000000238418579,&quot;colorType&quot;:1,&quot;foreColorIndex&quot;:5,&quot;pos&quot;:0,&quot;transparency&quot;:0},{&quot;brightness&quot;:0,&quot;colorType&quot;:1,&quot;foreColorIndex&quot;:5,&quot;pos&quot;:1,&quot;transparency&quot;:0}],&quot;type&quot;:3},&quot;glow&quot;:{&quot;colorType&quot;:0},&quot;line&quot;:{&quot;type&quot;:0},&quot;shadow&quot;:{&quot;brightness&quot;:-0.25,&quot;colorType&quot;:1,&quot;foreColorIndex&quot;:5,&quot;transparency&quot;:0.8500000238418579},&quot;threeD&quot;:{&quot;curvedSurface&quot;:{&quot;brightness&quot;:0,&quot;colorType&quot;:2,&quot;rgb&quot;:&quot;#000000&quot;},&quot;depth&quot;:{&quot;colorType&quot;:0}}},&quot;text&quot;:{&quot;fill&quot;:{&quot;solid&quot;:{&quot;brightness&quot;:0,&quot;colorType&quot;:1,&quot;foreColorIndex&quot;:2,&quot;transparency&quot;:0},&quot;type&quot;:1},&quot;glow&quot;:{&quot;colorType&quot;:0},&quot;line&quot;:{&quot;type&quot;:0},&quot;shadow&quot;:{&quot;colorType&quot;:0},&quot;threeD&quot;:{&quot;curvedSurface&quot;:{&quot;brightness&quot;:0,&quot;colorType&quot;:2,&quot;rgb&quot;:&quot;#000000&quot;},&quot;depth&quot;:{&quot;colorType&quot;:0}}}}"/>
+  <p:tag name="KSO_WM_UNIT_SHADOW_SCHEMECOLOR_INDEX" val="5"/>
+  <p:tag name="KSO_WM_UNIT_TEXT_FILL_FORE_SCHEMECOLOR_INDEX" val="2"/>
+  <p:tag name="KSO_WM_UNIT_TEXT_FILL_TYPE" val="1"/>
+  <p:tag name="KSO_WM_UNIT_USESOURCEFORMAT_APPLY" val="0"/>
+</p:tagLst>
+</file>
+
+<file path=ppt/tags/tag18.xml><?xml version="1.0" encoding="utf-8"?>
+<p:tagLst xmlns:p="http://schemas.openxmlformats.org/presentationml/2006/main">
+  <p:tag name="KSO_WM_UNIT_HIGHLIGHT" val="0"/>
+  <p:tag name="KSO_WM_UNIT_COMPATIBLE" val="0"/>
+  <p:tag name="KSO_WM_UNIT_DIAGRAM_ISNUMVISUAL" val="0"/>
+  <p:tag name="KSO_WM_UNIT_DIAGRAM_ISREFERUNIT" val="0"/>
+  <p:tag name="KSO_WM_DIAGRAM_GROUP_CODE" val="l1-1"/>
+  <p:tag name="KSO_WM_UNIT_ID" val="diagram20235161_3*l_h_x*1_2_1"/>
+  <p:tag name="KSO_WM_TEMPLATE_CATEGORY" val="diagram"/>
+  <p:tag name="KSO_WM_TEMPLATE_INDEX" val="20235161"/>
+  <p:tag name="KSO_WM_UNIT_LAYERLEVEL" val="1_1_1"/>
+  <p:tag name="KSO_WM_TAG_VERSION" val="3.0"/>
+  <p:tag name="KSO_WM_BEAUTIFY_FLAG" val="#wm#"/>
+  <p:tag name="KSO_WM_UNIT_VALUE" val="59*59"/>
+  <p:tag name="KSO_WM_UNIT_TYPE" val="l_h_x"/>
+  <p:tag name="KSO_WM_UNIT_INDEX" val="1_2_1"/>
+  <p:tag name="KSO_WM_DIAGRAM_VERSION" val="3"/>
+  <p:tag name="KSO_WM_DIAGRAM_COLOR_TRICK" val="1"/>
+  <p:tag name="KSO_WM_DIAGRAM_COLOR_TEXT_CAN_REMOVE" val="n"/>
+  <p:tag name="KSO_WM_DIAGRAM_MAX_ITEMCNT" val="4"/>
+  <p:tag name="KSO_WM_DIAGRAM_MIN_ITEMCNT" val="2"/>
+  <p:tag name="KSO_WM_DIAGRAM_VIRTUALLY_FRAME" val="{&quot;height&quot;:389,&quot;left&quot;:-65.24374626099593,&quot;top&quot;:35.90003937007877,&quot;width&quot;:850.4500122070312}"/>
+  <p:tag name="KSO_WM_DIAGRAM_COLOR_MATCH_VALUE" val="{&quot;shape&quot;:{&quot;fill&quot;:{&quot;solid&quot;:{&quot;brightness&quot;:0,&quot;colorType&quot;:2,&quot;rgb&quot;:&quot;#ffffff&quot;,&quot;transparency&quot;:0},&quot;type&quot;:1},&quot;glow&quot;:{&quot;colorType&quot;:0},&quot;line&quot;:{&quot;type&quot;:0},&quot;shadow&quot;:{&quot;colorType&quot;:0},&quot;threeD&quot;:{&quot;curvedSurface&quot;:{&quot;brightness&quot;:0,&quot;colorType&quot;:2,&quot;rgb&quot;:&quot;#000000&quot;},&quot;depth&quot;:{&quot;colorType&quot;:0}}},&quot;text&quot;:{&quot;fill&quot;:{},&quot;glow&quot;:{},&quot;line&quot;:{},&quot;shadow&quot;:{},&quot;threeD&quot;:{}}}"/>
+  <p:tag name="KSO_WM_UNIT_USESOURCEFORMAT_APPLY" val="0"/>
+</p:tagLst>
+</file>
+
+<file path=ppt/tags/tag19.xml><?xml version="1.0" encoding="utf-8"?>
+<p:tagLst xmlns:p="http://schemas.openxmlformats.org/presentationml/2006/main">
+  <p:tag name="KSO_WM_UNIT_HIGHLIGHT" val="0"/>
+  <p:tag name="KSO_WM_UNIT_COMPATIBLE" val="0"/>
+  <p:tag name="KSO_WM_UNIT_DIAGRAM_ISNUMVISUAL" val="0"/>
+  <p:tag name="KSO_WM_UNIT_DIAGRAM_ISREFERUNIT" val="0"/>
+  <p:tag name="KSO_WM_DIAGRAM_GROUP_CODE" val="l1-1"/>
+  <p:tag name="KSO_WM_UNIT_ID" val="diagram20235161_3*l_h_x*1_3_1"/>
+  <p:tag name="KSO_WM_TEMPLATE_CATEGORY" val="diagram"/>
+  <p:tag name="KSO_WM_TEMPLATE_INDEX" val="20235161"/>
+  <p:tag name="KSO_WM_UNIT_LAYERLEVEL" val="1_1_1"/>
+  <p:tag name="KSO_WM_TAG_VERSION" val="3.0"/>
+  <p:tag name="KSO_WM_BEAUTIFY_FLAG" val="#wm#"/>
+  <p:tag name="KSO_WM_UNIT_VALUE" val="59*59"/>
+  <p:tag name="KSO_WM_UNIT_TYPE" val="l_h_x"/>
+  <p:tag name="KSO_WM_UNIT_INDEX" val="1_3_1"/>
+  <p:tag name="KSO_WM_DIAGRAM_VERSION" val="3"/>
+  <p:tag name="KSO_WM_DIAGRAM_COLOR_TRICK" val="1"/>
+  <p:tag name="KSO_WM_DIAGRAM_COLOR_TEXT_CAN_REMOVE" val="n"/>
+  <p:tag name="KSO_WM_DIAGRAM_MAX_ITEMCNT" val="4"/>
+  <p:tag name="KSO_WM_DIAGRAM_MIN_ITEMCNT" val="2"/>
+  <p:tag name="KSO_WM_DIAGRAM_VIRTUALLY_FRAME" val="{&quot;height&quot;:389,&quot;left&quot;:-65.24374626099593,&quot;top&quot;:35.90003937007877,&quot;width&quot;:850.4500122070312}"/>
+  <p:tag name="KSO_WM_DIAGRAM_COLOR_MATCH_VALUE" val="{&quot;shape&quot;:{&quot;fill&quot;:{&quot;solid&quot;:{&quot;brightness&quot;:0,&quot;colorType&quot;:2,&quot;rgb&quot;:&quot;#ffffff&quot;,&quot;transparency&quot;:0},&quot;type&quot;:1},&quot;glow&quot;:{&quot;colorType&quot;:0},&quot;line&quot;:{&quot;type&quot;:0},&quot;shadow&quot;:{&quot;colorType&quot;:0},&quot;threeD&quot;:{&quot;curvedSurface&quot;:{&quot;brightness&quot;:0,&quot;colorType&quot;:2,&quot;rgb&quot;:&quot;#000000&quot;},&quot;depth&quot;:{&quot;colorType&quot;:0}}},&quot;text&quot;:{&quot;fill&quot;:{},&quot;glow&quot;:{},&quot;line&quot;:{},&quot;shadow&quot;:{},&quot;threeD&quot;:{}}}"/>
+  <p:tag name="KSO_WM_UNIT_USESOURCEFORMAT_APPLY" val="0"/>
+</p:tagLst>
+</file>
+
+<file path=ppt/tags/tag2.xml><?xml version="1.0" encoding="utf-8"?>
+<p:tagLst xmlns:p="http://schemas.openxmlformats.org/presentationml/2006/main">
+  <p:tag name="KSO_WM_UNIT_HIGHLIGHT" val="0"/>
+  <p:tag name="KSO_WM_UNIT_COMPATIBLE" val="0"/>
+  <p:tag name="KSO_WM_UNIT_DIAGRAM_ISNUMVISUAL" val="0"/>
+  <p:tag name="KSO_WM_UNIT_DIAGRAM_ISREFERUNIT" val="0"/>
+  <p:tag name="KSO_WM_UNIT_ID" val="_1**"/>
+  <p:tag name="KSO_WM_UNIT_LAYERLEVEL" val="1"/>
+  <p:tag name="KSO_WM_TAG_VERSION" val="3.0"/>
+  <p:tag name="KSO_WM_BEAUTIFY_FLAG" val="#wm#"/>
+</p:tagLst>
+</file>
+
+<file path=ppt/tags/tag20.xml><?xml version="1.0" encoding="utf-8"?>
+<p:tagLst xmlns:p="http://schemas.openxmlformats.org/presentationml/2006/main">
+  <p:tag name="KSO_WM_UNIT_HIGHLIGHT" val="0"/>
+  <p:tag name="KSO_WM_UNIT_COMPATIBLE" val="0"/>
+  <p:tag name="KSO_WM_UNIT_DIAGRAM_ISNUMVISUAL" val="0"/>
+  <p:tag name="KSO_WM_UNIT_DIAGRAM_ISREFERUNIT" val="0"/>
+  <p:tag name="KSO_WM_DIAGRAM_GROUP_CODE" val="l1-1"/>
+  <p:tag name="KSO_WM_UNIT_ID" val="diagram20235161_3*l_h_x*1_4_1"/>
+  <p:tag name="KSO_WM_TEMPLATE_CATEGORY" val="diagram"/>
+  <p:tag name="KSO_WM_TEMPLATE_INDEX" val="20235161"/>
+  <p:tag name="KSO_WM_UNIT_LAYERLEVEL" val="1_1_1"/>
+  <p:tag name="KSO_WM_TAG_VERSION" val="3.0"/>
+  <p:tag name="KSO_WM_BEAUTIFY_FLAG" val="#wm#"/>
+  <p:tag name="KSO_WM_UNIT_VALUE" val="60*60"/>
+  <p:tag name="KSO_WM_UNIT_TYPE" val="l_h_x"/>
+  <p:tag name="KSO_WM_UNIT_INDEX" val="1_4_1"/>
+  <p:tag name="KSO_WM_DIAGRAM_VERSION" val="3"/>
+  <p:tag name="KSO_WM_DIAGRAM_COLOR_TRICK" val="1"/>
+  <p:tag name="KSO_WM_DIAGRAM_COLOR_TEXT_CAN_REMOVE" val="n"/>
+  <p:tag name="KSO_WM_DIAGRAM_MAX_ITEMCNT" val="4"/>
+  <p:tag name="KSO_WM_DIAGRAM_MIN_ITEMCNT" val="2"/>
+  <p:tag name="KSO_WM_DIAGRAM_VIRTUALLY_FRAME" val="{&quot;height&quot;:389,&quot;left&quot;:-65.24374626099593,&quot;top&quot;:35.90003937007877,&quot;width&quot;:850.4500122070312}"/>
+  <p:tag name="KSO_WM_DIAGRAM_COLOR_MATCH_VALUE" val="{&quot;shape&quot;:{&quot;fill&quot;:{&quot;solid&quot;:{&quot;brightness&quot;:0,&quot;colorType&quot;:2,&quot;rgb&quot;:&quot;#ffffff&quot;,&quot;transparency&quot;:0},&quot;type&quot;:1},&quot;glow&quot;:{&quot;colorType&quot;:0},&quot;line&quot;:{&quot;type&quot;:0},&quot;shadow&quot;:{&quot;colorType&quot;:0},&quot;threeD&quot;:{&quot;curvedSurface&quot;:{&quot;brightness&quot;:0,&quot;colorType&quot;:2,&quot;rgb&quot;:&quot;#000000&quot;},&quot;depth&quot;:{&quot;colorType&quot;:0}}},&quot;text&quot;:{&quot;fill&quot;:{},&quot;glow&quot;:{},&quot;line&quot;:{},&quot;shadow&quot;:{},&quot;threeD&quot;:{}}}"/>
+  <p:tag name="KSO_WM_UNIT_USESOURCEFORMAT_APPLY" val="0"/>
+</p:tagLst>
+</file>
+
+<file path=ppt/tags/tag21.xml><?xml version="1.0" encoding="utf-8"?>
+<p:tagLst xmlns:p="http://schemas.openxmlformats.org/presentationml/2006/main">
+  <p:tag name="KSO_WM_SLIDE_ID" val="diagram20235161_3"/>
+  <p:tag name="KSO_WM_TEMPLATE_SUBCATEGORY" val="0"/>
+  <p:tag name="KSO_WM_TEMPLATE_MASTER_TYPE" val="0"/>
+  <p:tag name="KSO_WM_TEMPLATE_COLOR_TYPE" val="0"/>
+  <p:tag name="KSO_WM_SLIDE_ITEM_CNT" val="4"/>
+  <p:tag name="KSO_WM_SLIDE_INDEX" val="3"/>
+  <p:tag name="KSO_WM_TAG_VERSION" val="3.0"/>
+  <p:tag name="KSO_WM_BEAUTIFY_FLAG" val="#wm#"/>
+  <p:tag name="KSO_WM_TEMPLATE_CATEGORY" val="diagram"/>
+  <p:tag name="KSO_WM_TEMPLATE_INDEX" val="20235161"/>
+  <p:tag name="KSO_WM_SLIDE_TYPE" val="text"/>
+  <p:tag name="KSO_WM_SLIDE_SUBTYPE" val="diag"/>
+  <p:tag name="KSO_WM_SLIDE_SIZE" val="850.35*389"/>
+  <p:tag name="KSO_WM_SLIDE_POSITION" val="54.8*112.7"/>
+  <p:tag name="KSO_WM_SLIDE_LAYOUT" val="a_l"/>
+  <p:tag name="KSO_WM_SLIDE_LAYOUT_CNT" val="1_1"/>
+  <p:tag name="KSO_WM_SPECIAL_SOURCE" val="bdnull"/>
+  <p:tag name="KSO_WM_DIAGRAM_GROUP_CODE" val="l1-1"/>
+  <p:tag name="KSO_WM_SLIDE_DIAGTYPE" val="l"/>
+</p:tagLst>
+</file>
+
+<file path=ppt/tags/tag3.xml><?xml version="1.0" encoding="utf-8"?>
+<p:tagLst xmlns:p="http://schemas.openxmlformats.org/presentationml/2006/main">
+  <p:tag name="KSO_WM_UNIT_HIGHLIGHT" val="0"/>
+  <p:tag name="KSO_WM_UNIT_COMPATIBLE" val="0"/>
+  <p:tag name="KSO_WM_UNIT_DIAGRAM_ISNUMVISUAL" val="0"/>
+  <p:tag name="KSO_WM_UNIT_DIAGRAM_ISREFERUNIT" val="0"/>
+  <p:tag name="KSO_WM_UNIT_ID" val="_1**"/>
+  <p:tag name="KSO_WM_UNIT_LAYERLEVEL" val="1"/>
+  <p:tag name="KSO_WM_TAG_VERSION" val="3.0"/>
+  <p:tag name="KSO_WM_BEAUTIFY_FLAG" val="#wm#"/>
+</p:tagLst>
+</file>
+
+<file path=ppt/tags/tag4.xml><?xml version="1.0" encoding="utf-8"?>
+<p:tagLst xmlns:p="http://schemas.openxmlformats.org/presentationml/2006/main">
+  <p:tag name="KSO_WM_UNIT_HIGHLIGHT" val="0"/>
+  <p:tag name="KSO_WM_UNIT_COMPATIBLE" val="0"/>
+  <p:tag name="KSO_WM_UNIT_DIAGRAM_ISNUMVISUAL" val="0"/>
+  <p:tag name="KSO_WM_UNIT_DIAGRAM_ISREFERUNIT" val="0"/>
+  <p:tag name="KSO_WM_UNIT_ID" val="_1**"/>
+  <p:tag name="KSO_WM_UNIT_LAYERLEVEL" val="1"/>
+  <p:tag name="KSO_WM_TAG_VERSION" val="3.0"/>
+  <p:tag name="KSO_WM_BEAUTIFY_FLAG" val="#wm#"/>
+</p:tagLst>
+</file>
+
+<file path=ppt/tags/tag5.xml><?xml version="1.0" encoding="utf-8"?>
+<p:tagLst xmlns:p="http://schemas.openxmlformats.org/presentationml/2006/main">
+  <p:tag name="KSO_WM_UNIT_ISCONTENTSTITLE" val="0"/>
+  <p:tag name="KSO_WM_UNIT_ISNUMDGMTITLE" val="0"/>
+  <p:tag name="KSO_WM_UNIT_NOCLEAR" val="0"/>
+  <p:tag name="KSO_WM_UNIT_VALUE" val="30"/>
+  <p:tag name="KSO_WM_UNIT_HIGHLIGHT" val="0"/>
+  <p:tag name="KSO_WM_UNIT_COMPATIBLE" val="0"/>
+  <p:tag name="KSO_WM_UNIT_DIAGRAM_ISNUMVISUAL" val="0"/>
+  <p:tag name="KSO_WM_UNIT_DIAGRAM_ISREFERUNIT" val="0"/>
+  <p:tag name="KSO_WM_UNIT_TYPE" val="a"/>
+  <p:tag name="KSO_WM_UNIT_INDEX" val="1"/>
+  <p:tag name="KSO_WM_UNIT_ID" val="diagram20235161_3*a*1"/>
+  <p:tag name="KSO_WM_TEMPLATE_CATEGORY" val="diagram"/>
+  <p:tag name="KSO_WM_TEMPLATE_INDEX" val="20235161"/>
+  <p:tag name="KSO_WM_UNIT_LAYERLEVEL" val="1"/>
+  <p:tag name="KSO_WM_TAG_VERSION" val="3.0"/>
+  <p:tag name="KSO_WM_BEAUTIFY_FLAG" val="#wm#"/>
+  <p:tag name="KSO_WM_DIAGRAM_GROUP_CODE" val="l1-1"/>
+  <p:tag name="KSO_WM_UNIT_PRESET_TEXT" val="单击此处添加标题"/>
+  <p:tag name="KSO_WM_UNIT_TEXT_TYPE" val="1"/>
+  <p:tag name="KSO_WM_UNIT_TEXT_FILL_FORE_SCHEMECOLOR_INDEX" val="13"/>
+  <p:tag name="KSO_WM_UNIT_TEXT_FILL_TYPE" val="1"/>
+  <p:tag name="KSO_WM_UNIT_USESOURCEFORMAT_APPLY" val="0"/>
+</p:tagLst>
+</file>
+
+<file path=ppt/tags/tag6.xml><?xml version="1.0" encoding="utf-8"?>
+<p:tagLst xmlns:p="http://schemas.openxmlformats.org/presentationml/2006/main">
+  <p:tag name="KSO_WM_UNIT_SUBTYPE" val="a"/>
+  <p:tag name="KSO_WM_UNIT_NOCLEAR" val="0"/>
+  <p:tag name="KSO_WM_UNIT_HIGHLIGHT" val="0"/>
+  <p:tag name="KSO_WM_UNIT_COMPATIBLE" val="0"/>
+  <p:tag name="KSO_WM_UNIT_DIAGRAM_ISNUMVISUAL" val="0"/>
+  <p:tag name="KSO_WM_UNIT_DIAGRAM_ISREFERUNIT" val="0"/>
+  <p:tag name="KSO_WM_DIAGRAM_GROUP_CODE" val="l1-1"/>
+  <p:tag name="KSO_WM_UNIT_TYPE" val="l_h_f"/>
+  <p:tag name="KSO_WM_UNIT_INDEX" val="1_1_1"/>
+  <p:tag name="KSO_WM_UNIT_ID" val="diagram20235161_3*l_h_f*1_1_1"/>
+  <p:tag name="KSO_WM_TEMPLATE_CATEGORY" val="diagram"/>
+  <p:tag name="KSO_WM_TEMPLATE_INDEX" val="20235161"/>
+  <p:tag name="KSO_WM_UNIT_LAYERLEVEL" val="1_1_1"/>
+  <p:tag name="KSO_WM_TAG_VERSION" val="3.0"/>
+  <p:tag name="KSO_WM_UNIT_VALUE" val="160"/>
+  <p:tag name="KSO_WM_DIAGRAM_MAX_ITEMCNT" val="4"/>
+  <p:tag name="KSO_WM_DIAGRAM_MIN_ITEMCNT" val="2"/>
+  <p:tag name="KSO_WM_DIAGRAM_VIRTUALLY_FRAME" val="{&quot;height&quot;:389,&quot;left&quot;:-65.24374626099593,&quot;top&quot;:35.90003937007877,&quot;width&quot;:850.4500122070312}"/>
+  <p:tag name="KSO_WM_DIAGRAM_COLOR_MATCH_VALUE" val="{&quot;shape&quot;:{&quot;fill&quot;:{&quot;type&quot;:0},&quot;glow&quot;:{&quot;colorType&quot;:0},&quot;line&quot;:{&quot;type&quot;:0},&quot;shadow&quot;:{&quot;colorType&quot;:0},&quot;threeD&quot;:{&quot;curvedSurface&quot;:{&quot;brightness&quot;:0,&quot;colorType&quot;:2,&quot;rgb&quot;:&quot;#000000&quot;},&quot;depth&quot;:{&quot;colorType&quot;:0}}},&quot;text&quot;:{&quot;fill&quot;:{&quot;solid&quot;:{&quot;brightness&quot;:0.15000000596046448,&quot;colorType&quot;:1,&quot;foreColorIndex&quot;:13,&quot;transparency&quot;:0},&quot;type&quot;:1},&quot;glow&quot;:{&quot;colorType&quot;:0},&quot;line&quot;:{&quot;type&quot;:0},&quot;shadow&quot;:{&quot;colorType&quot;:0},&quot;threeD&quot;:{&quot;curvedSurface&quot;:{&quot;brightness&quot;:0,&quot;colorType&quot;:2,&quot;rgb&quot;:&quot;#000000&quot;},&quot;depth&quot;:{&quot;colorType&quot;:0}}}}"/>
+  <p:tag name="KSO_WM_UNIT_TEXT_LAYER_COUNT" val="1"/>
+  <p:tag name="KSO_WM_BEAUTIFY_FLAG" val="#wm#"/>
+  <p:tag name="KSO_WM_DIAGRAM_VERSION" val="3"/>
+  <p:tag name="KSO_WM_DIAGRAM_COLOR_TRICK" val="1"/>
+  <p:tag name="KSO_WM_DIAGRAM_COLOR_TEXT_CAN_REMOVE" val="n"/>
+  <p:tag name="KSO_WM_UNIT_PRESET_TEXT" val="单击此处添加文本具体内容，简明扼要地阐述您的观点。根据需要可酌情增减文字，以便观者准确地理解您传达的思想。单击此处添加文本具体内容，简明扼要地阐述您的观点。根据需要可酌情增减文字。单击此处添加文本具体内容，简明扼要地阐述您的观点"/>
+  <p:tag name="KSO_WM_UNIT_TEXT_FILL_FORE_SCHEMECOLOR_INDEX" val="1"/>
+  <p:tag name="KSO_WM_UNIT_TEXT_FILL_TYPE" val="1"/>
+  <p:tag name="KSO_WM_UNIT_TEXT_TYPE" val="1"/>
+  <p:tag name="KSO_WM_UNIT_USESOURCEFORMAT_APPLY" val="0"/>
+</p:tagLst>
+</file>
+
+<file path=ppt/tags/tag7.xml><?xml version="1.0" encoding="utf-8"?>
+<p:tagLst xmlns:p="http://schemas.openxmlformats.org/presentationml/2006/main">
+  <p:tag name="KSO_WM_UNIT_HIGHLIGHT" val="0"/>
+  <p:tag name="KSO_WM_UNIT_COMPATIBLE" val="0"/>
+  <p:tag name="KSO_WM_UNIT_DIAGRAM_ISNUMVISUAL" val="0"/>
+  <p:tag name="KSO_WM_UNIT_DIAGRAM_ISREFERUNIT" val="0"/>
+  <p:tag name="KSO_WM_DIAGRAM_GROUP_CODE" val="l1-1"/>
+  <p:tag name="KSO_WM_UNIT_ID" val="diagram20235161_3*l_h_i*1_1_1"/>
+  <p:tag name="KSO_WM_TEMPLATE_CATEGORY" val="diagram"/>
+  <p:tag name="KSO_WM_TEMPLATE_INDEX" val="20235161"/>
+  <p:tag name="KSO_WM_UNIT_LAYERLEVEL" val="1_1_1"/>
+  <p:tag name="KSO_WM_TAG_VERSION" val="3.0"/>
+  <p:tag name="KSO_WM_BEAUTIFY_FLAG" val="#wm#"/>
+  <p:tag name="KSO_WM_UNIT_TYPE" val="l_h_i"/>
+  <p:tag name="KSO_WM_UNIT_INDEX" val="1_1_1"/>
+  <p:tag name="KSO_WM_DIAGRAM_VERSION" val="3"/>
+  <p:tag name="KSO_WM_DIAGRAM_COLOR_TRICK" val="1"/>
+  <p:tag name="KSO_WM_DIAGRAM_COLOR_TEXT_CAN_REMOVE" val="n"/>
+  <p:tag name="KSO_WM_UNIT_FILL_TYPE" val="3"/>
+  <p:tag name="KSO_WM_DIAGRAM_MAX_ITEMCNT" val="4"/>
+  <p:tag name="KSO_WM_DIAGRAM_MIN_ITEMCNT" val="2"/>
+  <p:tag name="KSO_WM_DIAGRAM_VIRTUALLY_FRAME" val="{&quot;height&quot;:389,&quot;left&quot;:-65.24374626099593,&quot;top&quot;:35.90003937007877,&quot;width&quot;:850.4500122070312}"/>
+  <p:tag name="KSO_WM_DIAGRAM_COLOR_MATCH_VALUE" val="{&quot;shape&quot;:{&quot;fill&quot;:{&quot;gradient&quot;:[{&quot;brightness&quot;:0.6000000238418579,&quot;colorType&quot;:1,&quot;foreColorIndex&quot;:5,&quot;pos&quot;:0,&quot;transparency&quot;:0},{&quot;brightness&quot;:0,&quot;colorType&quot;:1,&quot;foreColorIndex&quot;:5,&quot;pos&quot;:1,&quot;transparency&quot;:0}],&quot;type&quot;:3},&quot;glow&quot;:{&quot;colorType&quot;:0},&quot;line&quot;:{&quot;type&quot;:0},&quot;shadow&quot;:{&quot;brightness&quot;:-0.25,&quot;colorType&quot;:1,&quot;foreColorIndex&quot;:5,&quot;transparency&quot;:0.8500000238418579},&quot;threeD&quot;:{&quot;curvedSurface&quot;:{&quot;brightness&quot;:0,&quot;colorType&quot;:2,&quot;rgb&quot;:&quot;#000000&quot;},&quot;depth&quot;:{&quot;colorType&quot;:0}}},&quot;text&quot;:{&quot;fill&quot;:{&quot;solid&quot;:{&quot;brightness&quot;:0,&quot;colorType&quot;:1,&quot;foreColorIndex&quot;:2,&quot;transparency&quot;:0},&quot;type&quot;:1},&quot;glow&quot;:{&quot;colorType&quot;:0},&quot;line&quot;:{&quot;type&quot;:0},&quot;shadow&quot;:{&quot;colorType&quot;:0},&quot;threeD&quot;:{&quot;curvedSurface&quot;:{&quot;brightness&quot;:0,&quot;colorType&quot;:2,&quot;rgb&quot;:&quot;#000000&quot;},&quot;depth&quot;:{&quot;colorType&quot;:0}}}}"/>
+  <p:tag name="KSO_WM_UNIT_SHADOW_SCHEMECOLOR_INDEX" val="5"/>
+  <p:tag name="KSO_WM_UNIT_TEXT_FILL_FORE_SCHEMECOLOR_INDEX" val="2"/>
+  <p:tag name="KSO_WM_UNIT_TEXT_FILL_TYPE" val="1"/>
+  <p:tag name="KSO_WM_UNIT_USESOURCEFORMAT_APPLY" val="0"/>
+</p:tagLst>
+</file>
+
+<file path=ppt/tags/tag8.xml><?xml version="1.0" encoding="utf-8"?>
+<p:tagLst xmlns:p="http://schemas.openxmlformats.org/presentationml/2006/main">
+  <p:tag name="KSO_WM_UNIT_HIGHLIGHT" val="0"/>
+  <p:tag name="KSO_WM_UNIT_COMPATIBLE" val="0"/>
+  <p:tag name="KSO_WM_UNIT_DIAGRAM_ISNUMVISUAL" val="0"/>
+  <p:tag name="KSO_WM_UNIT_DIAGRAM_ISREFERUNIT" val="0"/>
+  <p:tag name="KSO_WM_DIAGRAM_GROUP_CODE" val="l1-1"/>
+  <p:tag name="KSO_WM_UNIT_ID" val="diagram20235161_3*l_h_x*1_1_1"/>
+  <p:tag name="KSO_WM_TEMPLATE_CATEGORY" val="diagram"/>
+  <p:tag name="KSO_WM_TEMPLATE_INDEX" val="20235161"/>
+  <p:tag name="KSO_WM_UNIT_LAYERLEVEL" val="1_1_1"/>
+  <p:tag name="KSO_WM_TAG_VERSION" val="3.0"/>
+  <p:tag name="KSO_WM_BEAUTIFY_FLAG" val="#wm#"/>
+  <p:tag name="KSO_WM_UNIT_VALUE" val="51*51"/>
+  <p:tag name="KSO_WM_UNIT_TYPE" val="l_h_x"/>
+  <p:tag name="KSO_WM_UNIT_INDEX" val="1_1_1"/>
+  <p:tag name="KSO_WM_DIAGRAM_VERSION" val="3"/>
+  <p:tag name="KSO_WM_DIAGRAM_COLOR_TRICK" val="1"/>
+  <p:tag name="KSO_WM_DIAGRAM_COLOR_TEXT_CAN_REMOVE" val="n"/>
+  <p:tag name="KSO_WM_DIAGRAM_MAX_ITEMCNT" val="4"/>
+  <p:tag name="KSO_WM_DIAGRAM_MIN_ITEMCNT" val="2"/>
+  <p:tag name="KSO_WM_DIAGRAM_VIRTUALLY_FRAME" val="{&quot;height&quot;:389,&quot;left&quot;:-65.24374626099593,&quot;top&quot;:35.90003937007877,&quot;width&quot;:850.4500122070312}"/>
+  <p:tag name="KSO_WM_DIAGRAM_COLOR_MATCH_VALUE" val="{&quot;shape&quot;:{&quot;fill&quot;:{&quot;solid&quot;:{&quot;brightness&quot;:0,&quot;colorType&quot;:2,&quot;rgb&quot;:&quot;#ffffff&quot;,&quot;transparency&quot;:0},&quot;type&quot;:1},&quot;glow&quot;:{&quot;colorType&quot;:0},&quot;line&quot;:{&quot;type&quot;:0},&quot;shadow&quot;:{&quot;colorType&quot;:0},&quot;threeD&quot;:{&quot;curvedSurface&quot;:{&quot;brightness&quot;:0,&quot;colorType&quot;:2,&quot;rgb&quot;:&quot;#000000&quot;},&quot;depth&quot;:{&quot;colorType&quot;:0}}},&quot;text&quot;:{&quot;fill&quot;:{},&quot;glow&quot;:{},&quot;line&quot;:{},&quot;shadow&quot;:{},&quot;threeD&quot;:{}}}"/>
+  <p:tag name="KSO_WM_UNIT_USESOURCEFORMAT_APPLY" val="0"/>
+</p:tagLst>
+</file>
+
+<file path=ppt/tags/tag9.xml><?xml version="1.0" encoding="utf-8"?>
+<p:tagLst xmlns:p="http://schemas.openxmlformats.org/presentationml/2006/main">
+  <p:tag name="KSO_WM_UNIT_HIGHLIGHT" val="0"/>
+  <p:tag name="KSO_WM_UNIT_COMPATIBLE" val="0"/>
+  <p:tag name="KSO_WM_UNIT_DIAGRAM_ISNUMVISUAL" val="0"/>
+  <p:tag name="KSO_WM_UNIT_DIAGRAM_ISREFERUNIT" val="0"/>
+  <p:tag name="KSO_WM_DIAGRAM_GROUP_CODE" val="l1-1"/>
+  <p:tag name="KSO_WM_UNIT_ID" val="diagram20235161_3*l_h_i*1_2_2"/>
+  <p:tag name="KSO_WM_TEMPLATE_CATEGORY" val="diagram"/>
+  <p:tag name="KSO_WM_TEMPLATE_INDEX" val="20235161"/>
+  <p:tag name="KSO_WM_UNIT_LAYERLEVEL" val="1_1_1"/>
+  <p:tag name="KSO_WM_TAG_VERSION" val="3.0"/>
+  <p:tag name="KSO_WM_BEAUTIFY_FLAG" val="#wm#"/>
+  <p:tag name="KSO_WM_UNIT_TYPE" val="l_h_i"/>
+  <p:tag name="KSO_WM_UNIT_INDEX" val="1_2_2"/>
+  <p:tag name="KSO_WM_DIAGRAM_VERSION" val="3"/>
+  <p:tag name="KSO_WM_DIAGRAM_COLOR_TRICK" val="1"/>
+  <p:tag name="KSO_WM_DIAGRAM_COLOR_TEXT_CAN_REMOVE" val="n"/>
+  <p:tag name="KSO_WM_UNIT_LINE_FORE_SCHEMECOLOR_INDEX" val="5"/>
+  <p:tag name="KSO_WM_DIAGRAM_MAX_ITEMCNT" val="4"/>
+  <p:tag name="KSO_WM_DIAGRAM_MIN_ITEMCNT" val="2"/>
+  <p:tag name="KSO_WM_DIAGRAM_VIRTUALLY_FRAME" val="{&quot;height&quot;:389,&quot;left&quot;:-65.24374626099593,&quot;top&quot;:35.90003937007877,&quot;width&quot;:850.4500122070312}"/>
+  <p:tag name="KSO_WM_DIAGRAM_COLOR_MATCH_VALUE" val="{&quot;shape&quot;:{&quot;fill&quot;:{&quot;type&quot;:0},&quot;glow&quot;:{&quot;colorType&quot;:0},&quot;line&quot;:{&quot;solidLine&quot;:{&quot;brightness&quot;:0.6000000238418579,&quot;colorType&quot;:1,&quot;foreColorIndex&quot;:5,&quot;transparency&quot;:0.6000000238418579},&quot;type&quot;:1},&quot;shadow&quot;:{&quot;colorType&quot;:0},&quot;threeD&quot;:{&quot;curvedSurface&quot;:{&quot;brightness&quot;:0,&quot;colorType&quot;:2,&quot;rgb&quot;:&quot;#000000&quot;},&quot;depth&quot;:{&quot;colorType&quot;:0}}},&quot;text&quot;:{&quot;fill&quot;:{},&quot;glow&quot;:{},&quot;line&quot;:{},&quot;shadow&quot;:{},&quot;threeD&quot;:{}}}"/>
+  <p:tag name="KSO_WM_UNIT_LINE_FILL_TYPE" val="2"/>
+  <p:tag name="KSO_WM_UNIT_USESOURCEFORMAT_APPLY" val="0"/>
+</p:tagLst>
 </file>
 
 <file path=ppt/theme/theme1.xml><?xml version="1.0" encoding="utf-8"?>
@@ -9175,7 +10927,7 @@
     </a:clrScheme>
     <a:fontScheme name="Office">
       <a:majorFont>
-        <a:latin typeface="Calibri Light" panose="020F0302020204030204"/>
+        <a:latin typeface="Calibri Light"/>
         <a:ea typeface=""/>
         <a:cs typeface=""/>
         <a:font script="Jpan" typeface="游ゴシック Light"/>
@@ -9208,26 +10960,9 @@
         <a:font script="Viet" typeface="Times New Roman"/>
         <a:font script="Uigh" typeface="Microsoft Uighur"/>
         <a:font script="Geor" typeface="Sylfaen"/>
-        <a:font script="Armn" typeface="Arial"/>
-        <a:font script="Bugi" typeface="Leelawadee UI"/>
-        <a:font script="Bopo" typeface="Microsoft JhengHei"/>
-        <a:font script="Java" typeface="Javanese Text"/>
-        <a:font script="Lisu" typeface="Segoe UI"/>
-        <a:font script="Mymr" typeface="Myanmar Text"/>
-        <a:font script="Nkoo" typeface="Ebrima"/>
-        <a:font script="Olck" typeface="Nirmala UI"/>
-        <a:font script="Osma" typeface="Ebrima"/>
-        <a:font script="Phag" typeface="Phagspa"/>
-        <a:font script="Syrn" typeface="Estrangelo Edessa"/>
-        <a:font script="Syrj" typeface="Estrangelo Edessa"/>
-        <a:font script="Syre" typeface="Estrangelo Edessa"/>
-        <a:font script="Sora" typeface="Nirmala UI"/>
-        <a:font script="Tale" typeface="Microsoft Tai Le"/>
-        <a:font script="Talu" typeface="Microsoft New Tai Lue"/>
-        <a:font script="Tfng" typeface="Ebrima"/>
       </a:majorFont>
       <a:minorFont>
-        <a:latin typeface="Calibri" panose="020F0502020204030204"/>
+        <a:latin typeface="Calibri"/>
         <a:ea typeface=""/>
         <a:cs typeface=""/>
         <a:font script="Jpan" typeface="游ゴシック"/>
@@ -9260,23 +10995,6 @@
         <a:font script="Viet" typeface="Arial"/>
         <a:font script="Uigh" typeface="Microsoft Uighur"/>
         <a:font script="Geor" typeface="Sylfaen"/>
-        <a:font script="Armn" typeface="Arial"/>
-        <a:font script="Bugi" typeface="Leelawadee UI"/>
-        <a:font script="Bopo" typeface="Microsoft JhengHei"/>
-        <a:font script="Java" typeface="Javanese Text"/>
-        <a:font script="Lisu" typeface="Segoe UI"/>
-        <a:font script="Mymr" typeface="Myanmar Text"/>
-        <a:font script="Nkoo" typeface="Ebrima"/>
-        <a:font script="Olck" typeface="Nirmala UI"/>
-        <a:font script="Osma" typeface="Ebrima"/>
-        <a:font script="Phag" typeface="Phagspa"/>
-        <a:font script="Syrn" typeface="Estrangelo Edessa"/>
-        <a:font script="Syrj" typeface="Estrangelo Edessa"/>
-        <a:font script="Syre" typeface="Estrangelo Edessa"/>
-        <a:font script="Sora" typeface="Nirmala UI"/>
-        <a:font script="Tale" typeface="Microsoft Tai Le"/>
-        <a:font script="Talu" typeface="Microsoft New Tai Lue"/>
-        <a:font script="Tfng" typeface="Ebrima"/>
       </a:minorFont>
     </a:fontScheme>
     <a:fmtScheme name="Office">
@@ -9417,8 +11135,265 @@
       </a:bgFillStyleLst>
     </a:fmtScheme>
   </a:themeElements>
-  <a:objectDefaults/>
-  <a:extraClrSchemeLst/>
+  <a:extLst>
+    <a:ext uri="{05A4C25C-085E-4340-85A3-A5531E510DB2}">
+      <thm15:themeFamily xmlns:thm15="http://schemas.microsoft.com/office/thememl/2012/main" name="Office Theme" id="{62F939B6-93AF-4DB8-9C6B-D6C7DFDC589F}" vid="{4A3C46E8-61CC-4603-A589-7422A47A8E4A}"/>
+    </a:ext>
+  </a:extLst>
+</a:theme>
+</file>
+
+<file path=ppt/theme/theme2.xml><?xml version="1.0" encoding="utf-8"?>
+<a:theme xmlns:a="http://schemas.openxmlformats.org/drawingml/2006/main" name="Office Theme">
+  <a:themeElements>
+    <a:clrScheme name="Office">
+      <a:dk1>
+        <a:sysClr val="windowText" lastClr="000000"/>
+      </a:dk1>
+      <a:lt1>
+        <a:sysClr val="window" lastClr="FFFFFF"/>
+      </a:lt1>
+      <a:dk2>
+        <a:srgbClr val="44546A"/>
+      </a:dk2>
+      <a:lt2>
+        <a:srgbClr val="E7E6E6"/>
+      </a:lt2>
+      <a:accent1>
+        <a:srgbClr val="4472C4"/>
+      </a:accent1>
+      <a:accent2>
+        <a:srgbClr val="ED7D31"/>
+      </a:accent2>
+      <a:accent3>
+        <a:srgbClr val="A5A5A5"/>
+      </a:accent3>
+      <a:accent4>
+        <a:srgbClr val="FFC000"/>
+      </a:accent4>
+      <a:accent5>
+        <a:srgbClr val="5B9BD5"/>
+      </a:accent5>
+      <a:accent6>
+        <a:srgbClr val="70AD47"/>
+      </a:accent6>
+      <a:hlink>
+        <a:srgbClr val="0563C1"/>
+      </a:hlink>
+      <a:folHlink>
+        <a:srgbClr val="954F72"/>
+      </a:folHlink>
+    </a:clrScheme>
+    <a:fontScheme name="Office">
+      <a:majorFont>
+        <a:latin typeface="Calibri Light"/>
+        <a:ea typeface=""/>
+        <a:cs typeface=""/>
+        <a:font script="Jpan" typeface="游ゴシック Light"/>
+        <a:font script="Hang" typeface="맑은 고딕"/>
+        <a:font script="Hans" typeface="等线 Light"/>
+        <a:font script="Hant" typeface="新細明體"/>
+        <a:font script="Arab" typeface="Times New Roman"/>
+        <a:font script="Hebr" typeface="Times New Roman"/>
+        <a:font script="Thai" typeface="Angsana New"/>
+        <a:font script="Ethi" typeface="Nyala"/>
+        <a:font script="Beng" typeface="Vrinda"/>
+        <a:font script="Gujr" typeface="Shruti"/>
+        <a:font script="Khmr" typeface="MoolBoran"/>
+        <a:font script="Knda" typeface="Tunga"/>
+        <a:font script="Guru" typeface="Raavi"/>
+        <a:font script="Cans" typeface="Euphemia"/>
+        <a:font script="Cher" typeface="Plantagenet Cherokee"/>
+        <a:font script="Yiii" typeface="Microsoft Yi Baiti"/>
+        <a:font script="Tibt" typeface="Microsoft Himalaya"/>
+        <a:font script="Thaa" typeface="MV Boli"/>
+        <a:font script="Deva" typeface="Mangal"/>
+        <a:font script="Telu" typeface="Gautami"/>
+        <a:font script="Taml" typeface="Latha"/>
+        <a:font script="Syrc" typeface="Estrangelo Edessa"/>
+        <a:font script="Orya" typeface="Kalinga"/>
+        <a:font script="Mlym" typeface="Kartika"/>
+        <a:font script="Laoo" typeface="DokChampa"/>
+        <a:font script="Sinh" typeface="Iskoola Pota"/>
+        <a:font script="Mong" typeface="Mongolian Baiti"/>
+        <a:font script="Viet" typeface="Times New Roman"/>
+        <a:font script="Uigh" typeface="Microsoft Uighur"/>
+        <a:font script="Geor" typeface="Sylfaen"/>
+      </a:majorFont>
+      <a:minorFont>
+        <a:latin typeface="Calibri"/>
+        <a:ea typeface=""/>
+        <a:cs typeface=""/>
+        <a:font script="Jpan" typeface="游ゴシック"/>
+        <a:font script="Hang" typeface="맑은 고딕"/>
+        <a:font script="Hans" typeface="等线"/>
+        <a:font script="Hant" typeface="新細明體"/>
+        <a:font script="Arab" typeface="Arial"/>
+        <a:font script="Hebr" typeface="Arial"/>
+        <a:font script="Thai" typeface="Cordia New"/>
+        <a:font script="Ethi" typeface="Nyala"/>
+        <a:font script="Beng" typeface="Vrinda"/>
+        <a:font script="Gujr" typeface="Shruti"/>
+        <a:font script="Khmr" typeface="DaunPenh"/>
+        <a:font script="Knda" typeface="Tunga"/>
+        <a:font script="Guru" typeface="Raavi"/>
+        <a:font script="Cans" typeface="Euphemia"/>
+        <a:font script="Cher" typeface="Plantagenet Cherokee"/>
+        <a:font script="Yiii" typeface="Microsoft Yi Baiti"/>
+        <a:font script="Tibt" typeface="Microsoft Himalaya"/>
+        <a:font script="Thaa" typeface="MV Boli"/>
+        <a:font script="Deva" typeface="Mangal"/>
+        <a:font script="Telu" typeface="Gautami"/>
+        <a:font script="Taml" typeface="Latha"/>
+        <a:font script="Syrc" typeface="Estrangelo Edessa"/>
+        <a:font script="Orya" typeface="Kalinga"/>
+        <a:font script="Mlym" typeface="Kartika"/>
+        <a:font script="Laoo" typeface="DokChampa"/>
+        <a:font script="Sinh" typeface="Iskoola Pota"/>
+        <a:font script="Mong" typeface="Mongolian Baiti"/>
+        <a:font script="Viet" typeface="Arial"/>
+        <a:font script="Uigh" typeface="Microsoft Uighur"/>
+        <a:font script="Geor" typeface="Sylfaen"/>
+      </a:minorFont>
+    </a:fontScheme>
+    <a:fmtScheme name="Office">
+      <a:fillStyleLst>
+        <a:solidFill>
+          <a:schemeClr val="phClr"/>
+        </a:solidFill>
+        <a:gradFill rotWithShape="1">
+          <a:gsLst>
+            <a:gs pos="0">
+              <a:schemeClr val="phClr">
+                <a:lumMod val="110000"/>
+                <a:satMod val="105000"/>
+                <a:tint val="67000"/>
+              </a:schemeClr>
+            </a:gs>
+            <a:gs pos="50000">
+              <a:schemeClr val="phClr">
+                <a:lumMod val="105000"/>
+                <a:satMod val="103000"/>
+                <a:tint val="73000"/>
+              </a:schemeClr>
+            </a:gs>
+            <a:gs pos="100000">
+              <a:schemeClr val="phClr">
+                <a:lumMod val="105000"/>
+                <a:satMod val="109000"/>
+                <a:tint val="81000"/>
+              </a:schemeClr>
+            </a:gs>
+          </a:gsLst>
+          <a:lin ang="5400000" scaled="0"/>
+        </a:gradFill>
+        <a:gradFill rotWithShape="1">
+          <a:gsLst>
+            <a:gs pos="0">
+              <a:schemeClr val="phClr">
+                <a:satMod val="103000"/>
+                <a:lumMod val="102000"/>
+                <a:tint val="94000"/>
+              </a:schemeClr>
+            </a:gs>
+            <a:gs pos="50000">
+              <a:schemeClr val="phClr">
+                <a:satMod val="110000"/>
+                <a:lumMod val="100000"/>
+                <a:shade val="100000"/>
+              </a:schemeClr>
+            </a:gs>
+            <a:gs pos="100000">
+              <a:schemeClr val="phClr">
+                <a:lumMod val="99000"/>
+                <a:satMod val="120000"/>
+                <a:shade val="78000"/>
+              </a:schemeClr>
+            </a:gs>
+          </a:gsLst>
+          <a:lin ang="5400000" scaled="0"/>
+        </a:gradFill>
+      </a:fillStyleLst>
+      <a:lnStyleLst>
+        <a:ln w="6350" cap="flat" cmpd="sng" algn="ctr">
+          <a:solidFill>
+            <a:schemeClr val="phClr"/>
+          </a:solidFill>
+          <a:prstDash val="solid"/>
+          <a:miter lim="800000"/>
+        </a:ln>
+        <a:ln w="12700" cap="flat" cmpd="sng" algn="ctr">
+          <a:solidFill>
+            <a:schemeClr val="phClr"/>
+          </a:solidFill>
+          <a:prstDash val="solid"/>
+          <a:miter lim="800000"/>
+        </a:ln>
+        <a:ln w="19050" cap="flat" cmpd="sng" algn="ctr">
+          <a:solidFill>
+            <a:schemeClr val="phClr"/>
+          </a:solidFill>
+          <a:prstDash val="solid"/>
+          <a:miter lim="800000"/>
+        </a:ln>
+      </a:lnStyleLst>
+      <a:effectStyleLst>
+        <a:effectStyle>
+          <a:effectLst/>
+        </a:effectStyle>
+        <a:effectStyle>
+          <a:effectLst/>
+        </a:effectStyle>
+        <a:effectStyle>
+          <a:effectLst>
+            <a:outerShdw blurRad="57150" dist="19050" dir="5400000" algn="ctr" rotWithShape="0">
+              <a:srgbClr val="000000">
+                <a:alpha val="63000"/>
+              </a:srgbClr>
+            </a:outerShdw>
+          </a:effectLst>
+        </a:effectStyle>
+      </a:effectStyleLst>
+      <a:bgFillStyleLst>
+        <a:solidFill>
+          <a:schemeClr val="phClr"/>
+        </a:solidFill>
+        <a:solidFill>
+          <a:schemeClr val="phClr">
+            <a:tint val="95000"/>
+            <a:satMod val="170000"/>
+          </a:schemeClr>
+        </a:solidFill>
+        <a:gradFill rotWithShape="1">
+          <a:gsLst>
+            <a:gs pos="0">
+              <a:schemeClr val="phClr">
+                <a:tint val="93000"/>
+                <a:satMod val="150000"/>
+                <a:shade val="98000"/>
+                <a:lumMod val="102000"/>
+              </a:schemeClr>
+            </a:gs>
+            <a:gs pos="50000">
+              <a:schemeClr val="phClr">
+                <a:tint val="98000"/>
+                <a:satMod val="130000"/>
+                <a:shade val="90000"/>
+                <a:lumMod val="103000"/>
+              </a:schemeClr>
+            </a:gs>
+            <a:gs pos="100000">
+              <a:schemeClr val="phClr">
+                <a:shade val="63000"/>
+                <a:satMod val="120000"/>
+              </a:schemeClr>
+            </a:gs>
+          </a:gsLst>
+          <a:lin ang="5400000" scaled="0"/>
+        </a:gradFill>
+      </a:bgFillStyleLst>
+    </a:fmtScheme>
+  </a:themeElements>
   <a:extLst>
     <a:ext uri="{05A4C25C-085E-4340-85A3-A5531E510DB2}">
       <thm15:themeFamily xmlns:thm15="http://schemas.microsoft.com/office/thememl/2012/main" name="Office Theme" id="{62F939B6-93AF-4DB8-9C6B-D6C7DFDC589F}" vid="{4A3C46E8-61CC-4603-A589-7422A47A8E4A}"/>
